--- a/Mapped Curriculum Lessons/Grade 7/Lesson 20 - Reliable Menus/Reliable Menus - Slides.pptx
+++ b/Mapped Curriculum Lessons/Grade 7/Lesson 20 - Reliable Menus/Reliable Menus - Slides.pptx
@@ -2,28 +2,28 @@
 <file path=ppt/presentation.xml><?xml version="1.0" encoding="utf-8"?>
 <p:presentation xmlns:p="http://schemas.openxmlformats.org/presentationml/2006/main" embedTrueTypeFonts="1" saveSubsetFonts="0">
   <p:sldMasterIdLst>
-    <p:sldMasterId xmlns:r="http://schemas.openxmlformats.org/officeDocument/2006/relationships" id="2147483648" r:id="R3b11772833014a72"/>
+    <p:sldMasterId xmlns:r="http://schemas.openxmlformats.org/officeDocument/2006/relationships" id="2147483648" r:id="R362e272345dd4c3a"/>
   </p:sldMasterIdLst>
   <p:notesMasterIdLst>
-    <p:notesMasterId xmlns:r="http://schemas.openxmlformats.org/officeDocument/2006/relationships" r:id="Re40aeab7597a487f"/>
+    <p:notesMasterId xmlns:r="http://schemas.openxmlformats.org/officeDocument/2006/relationships" r:id="R2e67dff6aa5840e6"/>
   </p:notesMasterIdLst>
   <p:sldIdLst>
-    <p:sldId xmlns:r="http://schemas.openxmlformats.org/officeDocument/2006/relationships" id="256" r:id="R5ad27c7189df4213"/>
-    <p:sldId xmlns:r="http://schemas.openxmlformats.org/officeDocument/2006/relationships" id="257" r:id="Rcb5ad852be444506"/>
-    <p:sldId xmlns:r="http://schemas.openxmlformats.org/officeDocument/2006/relationships" id="258" r:id="Ree2d2c2354f14cce"/>
-    <p:sldId xmlns:r="http://schemas.openxmlformats.org/officeDocument/2006/relationships" id="259" r:id="R552501f384b94cd3"/>
-    <p:sldId xmlns:r="http://schemas.openxmlformats.org/officeDocument/2006/relationships" id="260" r:id="R1c84eece49754fdb"/>
-    <p:sldId xmlns:r="http://schemas.openxmlformats.org/officeDocument/2006/relationships" id="261" r:id="R44f8be10100f49e9"/>
-    <p:sldId xmlns:r="http://schemas.openxmlformats.org/officeDocument/2006/relationships" id="262" r:id="R33822136c4994433"/>
-    <p:sldId xmlns:r="http://schemas.openxmlformats.org/officeDocument/2006/relationships" id="263" r:id="Rcd63c8b75af44103"/>
-    <p:sldId xmlns:r="http://schemas.openxmlformats.org/officeDocument/2006/relationships" id="264" r:id="Rd60e050543f64824"/>
+    <p:sldId xmlns:r="http://schemas.openxmlformats.org/officeDocument/2006/relationships" id="256" r:id="R4071f6bed20746dd"/>
+    <p:sldId xmlns:r="http://schemas.openxmlformats.org/officeDocument/2006/relationships" id="257" r:id="Rc9f3be275bfd4878"/>
+    <p:sldId xmlns:r="http://schemas.openxmlformats.org/officeDocument/2006/relationships" id="258" r:id="Rdc9edf9531584523"/>
+    <p:sldId xmlns:r="http://schemas.openxmlformats.org/officeDocument/2006/relationships" id="259" r:id="R17eeb48c101046ea"/>
+    <p:sldId xmlns:r="http://schemas.openxmlformats.org/officeDocument/2006/relationships" id="260" r:id="R91f8d84400614a58"/>
+    <p:sldId xmlns:r="http://schemas.openxmlformats.org/officeDocument/2006/relationships" id="261" r:id="Ra88ca475c8d44a9c"/>
+    <p:sldId xmlns:r="http://schemas.openxmlformats.org/officeDocument/2006/relationships" id="262" r:id="Re3bcf9585be642bc"/>
+    <p:sldId xmlns:r="http://schemas.openxmlformats.org/officeDocument/2006/relationships" id="263" r:id="R3594582ba16b4063"/>
+    <p:sldId xmlns:r="http://schemas.openxmlformats.org/officeDocument/2006/relationships" id="264" r:id="Rc467c410d51e429f"/>
   </p:sldIdLst>
   <p:sldSz cx="12192000" cy="6858000"/>
   <p:notesSz cx="6858000" cy="9144000"/>
   <p:embeddedFontLst>
     <p:embeddedFont>
       <p:font typeface="JetBrains Mono"/>
-      <p:regular xmlns:r="http://schemas.openxmlformats.org/officeDocument/2006/relationships" r:id="R2cf9310855b746a9"/>
+      <p:regular xmlns:r="http://schemas.openxmlformats.org/officeDocument/2006/relationships" r:id="Rcd1cae7e25844ce7"/>
     </p:embeddedFont>
   </p:embeddedFontLst>
 </p:presentation>
@@ -1071,7 +1071,7 @@
           <p:nvPr/>
         </p:nvPicPr>
         <p:blipFill rotWithShape="1">
-          <a:blip xmlns:r="http://schemas.openxmlformats.org/officeDocument/2006/relationships" xmlns:a="http://schemas.openxmlformats.org/drawingml/2006/main" r:embed="R0cc1504de0134f06"/>
+          <a:blip xmlns:r="http://schemas.openxmlformats.org/officeDocument/2006/relationships" xmlns:a="http://schemas.openxmlformats.org/drawingml/2006/main" r:embed="Reae62f81c04e47cf"/>
           <a:stretch xmlns:a="http://schemas.openxmlformats.org/drawingml/2006/main"/>
         </p:blipFill>
         <p:spPr>
@@ -1451,7 +1451,7 @@
           <p:nvPr/>
         </p:nvPicPr>
         <p:blipFill rotWithShape="1">
-          <a:blip xmlns:r="http://schemas.openxmlformats.org/officeDocument/2006/relationships" xmlns:a="http://schemas.openxmlformats.org/drawingml/2006/main" r:embed="R27cedec683c64745">
+          <a:blip xmlns:r="http://schemas.openxmlformats.org/officeDocument/2006/relationships" xmlns:a="http://schemas.openxmlformats.org/drawingml/2006/main" r:embed="R42e0044553784f89">
             <a:alphaModFix amt="28000"/>
           </a:blip>
           <a:stretch xmlns:a="http://schemas.openxmlformats.org/drawingml/2006/main"/>
@@ -1664,7 +1664,7 @@
           <p:nvPr/>
         </p:nvPicPr>
         <p:blipFill rotWithShape="1">
-          <a:blip xmlns:r="http://schemas.openxmlformats.org/officeDocument/2006/relationships" xmlns:a="http://schemas.openxmlformats.org/drawingml/2006/main" r:embed="R0a0e375f76c04239">
+          <a:blip xmlns:r="http://schemas.openxmlformats.org/officeDocument/2006/relationships" xmlns:a="http://schemas.openxmlformats.org/drawingml/2006/main" r:embed="Re7ff58349bfc4a94">
             <a:alphaModFix amt="28000"/>
           </a:blip>
           <a:stretch xmlns:a="http://schemas.openxmlformats.org/drawingml/2006/main"/>
@@ -1899,7 +1899,7 @@
           <p:nvPr/>
         </p:nvPicPr>
         <p:blipFill rotWithShape="1">
-          <a:blip xmlns:r="http://schemas.openxmlformats.org/officeDocument/2006/relationships" xmlns:a="http://schemas.openxmlformats.org/drawingml/2006/main" r:embed="Ref447e620a8d4284">
+          <a:blip xmlns:r="http://schemas.openxmlformats.org/officeDocument/2006/relationships" xmlns:a="http://schemas.openxmlformats.org/drawingml/2006/main" r:embed="Rec4cd71916104bc0">
             <a:alphaModFix amt="28000"/>
           </a:blip>
           <a:stretch xmlns:a="http://schemas.openxmlformats.org/drawingml/2006/main"/>
@@ -2176,7 +2176,7 @@
           <p:nvPr/>
         </p:nvPicPr>
         <p:blipFill rotWithShape="1">
-          <a:blip xmlns:r="http://schemas.openxmlformats.org/officeDocument/2006/relationships" xmlns:a="http://schemas.openxmlformats.org/drawingml/2006/main" r:embed="R81a2dd9bde6f4ff8">
+          <a:blip xmlns:r="http://schemas.openxmlformats.org/officeDocument/2006/relationships" xmlns:a="http://schemas.openxmlformats.org/drawingml/2006/main" r:embed="R89eab5cfaea7407f">
             <a:alphaModFix amt="28000"/>
           </a:blip>
           <a:stretch xmlns:a="http://schemas.openxmlformats.org/drawingml/2006/main"/>
@@ -2451,7 +2451,7 @@
           <p:nvPr/>
         </p:nvPicPr>
         <p:blipFill rotWithShape="1">
-          <a:blip xmlns:r="http://schemas.openxmlformats.org/officeDocument/2006/relationships" xmlns:a="http://schemas.openxmlformats.org/drawingml/2006/main" r:embed="R52335c8b989b4c7d">
+          <a:blip xmlns:r="http://schemas.openxmlformats.org/officeDocument/2006/relationships" xmlns:a="http://schemas.openxmlformats.org/drawingml/2006/main" r:embed="Rba7ecf5720864fe5">
             <a:alphaModFix amt="28000"/>
           </a:blip>
           <a:stretch xmlns:a="http://schemas.openxmlformats.org/drawingml/2006/main"/>
@@ -2875,7 +2875,7 @@
           <p:nvPr/>
         </p:nvPicPr>
         <p:blipFill rotWithShape="1">
-          <a:blip xmlns:r="http://schemas.openxmlformats.org/officeDocument/2006/relationships" xmlns:a="http://schemas.openxmlformats.org/drawingml/2006/main" r:embed="R5a08b8cf8c554b8a">
+          <a:blip xmlns:r="http://schemas.openxmlformats.org/officeDocument/2006/relationships" xmlns:a="http://schemas.openxmlformats.org/drawingml/2006/main" r:embed="R3812598326a54310">
             <a:alphaModFix amt="28000"/>
           </a:blip>
           <a:stretch xmlns:a="http://schemas.openxmlformats.org/drawingml/2006/main"/>
@@ -3016,7 +3016,7 @@
           <p:nvPr/>
         </p:nvPicPr>
         <p:blipFill rotWithShape="1">
-          <a:blip xmlns:r="http://schemas.openxmlformats.org/officeDocument/2006/relationships" xmlns:a="http://schemas.openxmlformats.org/drawingml/2006/main" r:embed="Rb24471eb1b3a4c1e">
+          <a:blip xmlns:r="http://schemas.openxmlformats.org/officeDocument/2006/relationships" xmlns:a="http://schemas.openxmlformats.org/drawingml/2006/main" r:embed="R4c2efc48dc0f48b6">
             <a:alphaModFix amt="28000"/>
           </a:blip>
           <a:stretch xmlns:a="http://schemas.openxmlformats.org/drawingml/2006/main"/>
@@ -3130,7 +3130,7 @@
           <p:nvPr/>
         </p:nvPicPr>
         <p:blipFill rotWithShape="1">
-          <a:blip xmlns:r="http://schemas.openxmlformats.org/officeDocument/2006/relationships" xmlns:a="http://schemas.openxmlformats.org/drawingml/2006/main" r:embed="R2b9c5579a31f4df5">
+          <a:blip xmlns:r="http://schemas.openxmlformats.org/officeDocument/2006/relationships" xmlns:a="http://schemas.openxmlformats.org/drawingml/2006/main" r:embed="Rdd10c31e60024f07">
             <a:alphaModFix amt="28000"/>
           </a:blip>
           <a:stretch xmlns:a="http://schemas.openxmlformats.org/drawingml/2006/main"/>
@@ -3457,7 +3457,7 @@
           <p:nvPr/>
         </p:nvPicPr>
         <p:blipFill rotWithShape="1">
-          <a:blip xmlns:r="http://schemas.openxmlformats.org/officeDocument/2006/relationships" xmlns:a="http://schemas.openxmlformats.org/drawingml/2006/main" r:embed="R7f33c508f64b42aa">
+          <a:blip xmlns:r="http://schemas.openxmlformats.org/officeDocument/2006/relationships" xmlns:a="http://schemas.openxmlformats.org/drawingml/2006/main" r:embed="Rbe1a4c6cab0b4ff2">
             <a:alphaModFix amt="28000"/>
           </a:blip>
           <a:stretch xmlns:a="http://schemas.openxmlformats.org/drawingml/2006/main"/>
@@ -3745,7 +3745,7 @@
           <p:nvPr/>
         </p:nvPicPr>
         <p:blipFill rotWithShape="1">
-          <a:blip xmlns:r="http://schemas.openxmlformats.org/officeDocument/2006/relationships" xmlns:a="http://schemas.openxmlformats.org/drawingml/2006/main" r:embed="R17a8b154442d4bff">
+          <a:blip xmlns:r="http://schemas.openxmlformats.org/officeDocument/2006/relationships" xmlns:a="http://schemas.openxmlformats.org/drawingml/2006/main" r:embed="R26f69c9a148241a2">
             <a:alphaModFix amt="28000"/>
           </a:blip>
           <a:stretch xmlns:a="http://schemas.openxmlformats.org/drawingml/2006/main"/>
@@ -3982,17 +3982,17 @@
   </p:cSld>
   <p:clrMap bg1="lt1" tx1="dk1" bg2="lt2" tx2="dk2" accent1="accent1" accent2="accent2" accent3="accent3" accent4="accent4" accent5="accent5" accent6="accent6" hlink="hlink" folHlink="folHlink"/>
   <p:sldLayoutIdLst>
-    <p:sldLayoutId xmlns:r="http://schemas.openxmlformats.org/officeDocument/2006/relationships" id="2147483649" r:id="Raec37c7b6f124c59"/>
-    <p:sldLayoutId xmlns:r="http://schemas.openxmlformats.org/officeDocument/2006/relationships" id="2147483650" r:id="R868c93621a074d34"/>
-    <p:sldLayoutId xmlns:r="http://schemas.openxmlformats.org/officeDocument/2006/relationships" id="2147483651" r:id="R020ab52b25b0428f"/>
-    <p:sldLayoutId xmlns:r="http://schemas.openxmlformats.org/officeDocument/2006/relationships" id="2147483652" r:id="R857948b42a534250"/>
-    <p:sldLayoutId xmlns:r="http://schemas.openxmlformats.org/officeDocument/2006/relationships" id="2147483653" r:id="Rf41422a2d94749be"/>
-    <p:sldLayoutId xmlns:r="http://schemas.openxmlformats.org/officeDocument/2006/relationships" id="2147483654" r:id="R355f0c3b8af54c64"/>
-    <p:sldLayoutId xmlns:r="http://schemas.openxmlformats.org/officeDocument/2006/relationships" id="2147483655" r:id="Rbd4c2062074c4468"/>
-    <p:sldLayoutId xmlns:r="http://schemas.openxmlformats.org/officeDocument/2006/relationships" id="2147483656" r:id="R5633cffd78f1485a"/>
-    <p:sldLayoutId xmlns:r="http://schemas.openxmlformats.org/officeDocument/2006/relationships" id="2147483657" r:id="R61adfeb09ff54b58"/>
-    <p:sldLayoutId xmlns:r="http://schemas.openxmlformats.org/officeDocument/2006/relationships" id="2147483658" r:id="Rbb9a816cca5d4386"/>
-    <p:sldLayoutId xmlns:r="http://schemas.openxmlformats.org/officeDocument/2006/relationships" id="2147483659" r:id="Ra09598cdb11e41d2"/>
+    <p:sldLayoutId xmlns:r="http://schemas.openxmlformats.org/officeDocument/2006/relationships" id="2147483649" r:id="Rb8358659890d44ca"/>
+    <p:sldLayoutId xmlns:r="http://schemas.openxmlformats.org/officeDocument/2006/relationships" id="2147483650" r:id="R992d600109904a42"/>
+    <p:sldLayoutId xmlns:r="http://schemas.openxmlformats.org/officeDocument/2006/relationships" id="2147483651" r:id="Rc7bd0be10c3c48a6"/>
+    <p:sldLayoutId xmlns:r="http://schemas.openxmlformats.org/officeDocument/2006/relationships" id="2147483652" r:id="R07c8922905184923"/>
+    <p:sldLayoutId xmlns:r="http://schemas.openxmlformats.org/officeDocument/2006/relationships" id="2147483653" r:id="R49fd76af8c144519"/>
+    <p:sldLayoutId xmlns:r="http://schemas.openxmlformats.org/officeDocument/2006/relationships" id="2147483654" r:id="R4234bcf344da4a2e"/>
+    <p:sldLayoutId xmlns:r="http://schemas.openxmlformats.org/officeDocument/2006/relationships" id="2147483655" r:id="Rcb30a411c6064da3"/>
+    <p:sldLayoutId xmlns:r="http://schemas.openxmlformats.org/officeDocument/2006/relationships" id="2147483656" r:id="Rd553ade8bb38486c"/>
+    <p:sldLayoutId xmlns:r="http://schemas.openxmlformats.org/officeDocument/2006/relationships" id="2147483657" r:id="R2416cbdcdcbf4ddd"/>
+    <p:sldLayoutId xmlns:r="http://schemas.openxmlformats.org/officeDocument/2006/relationships" id="2147483658" r:id="Rcd034bde72ef4d06"/>
+    <p:sldLayoutId xmlns:r="http://schemas.openxmlformats.org/officeDocument/2006/relationships" id="2147483659" r:id="R30c68ac2775049c5"/>
   </p:sldLayoutIdLst>
   <p:hf hdr="0" ftr="0" dt="0"/>
   <p:txStyles>

--- a/Mapped Curriculum Lessons/Grade 7/Lesson 20 - Reliable Menus/Reliable Menus - Slides.pptx
+++ b/Mapped Curriculum Lessons/Grade 7/Lesson 20 - Reliable Menus/Reliable Menus - Slides.pptx
@@ -2,28 +2,28 @@
 <file path=ppt/presentation.xml><?xml version="1.0" encoding="utf-8"?>
 <p:presentation xmlns:p="http://schemas.openxmlformats.org/presentationml/2006/main" embedTrueTypeFonts="1" saveSubsetFonts="0">
   <p:sldMasterIdLst>
-    <p:sldMasterId xmlns:r="http://schemas.openxmlformats.org/officeDocument/2006/relationships" id="2147483648" r:id="R362e272345dd4c3a"/>
+    <p:sldMasterId xmlns:r="http://schemas.openxmlformats.org/officeDocument/2006/relationships" id="2147483648" r:id="Ra738230500e6408c"/>
   </p:sldMasterIdLst>
   <p:notesMasterIdLst>
-    <p:notesMasterId xmlns:r="http://schemas.openxmlformats.org/officeDocument/2006/relationships" r:id="R2e67dff6aa5840e6"/>
+    <p:notesMasterId xmlns:r="http://schemas.openxmlformats.org/officeDocument/2006/relationships" r:id="R1fed4c0a87d14822"/>
   </p:notesMasterIdLst>
   <p:sldIdLst>
-    <p:sldId xmlns:r="http://schemas.openxmlformats.org/officeDocument/2006/relationships" id="256" r:id="R4071f6bed20746dd"/>
-    <p:sldId xmlns:r="http://schemas.openxmlformats.org/officeDocument/2006/relationships" id="257" r:id="Rc9f3be275bfd4878"/>
-    <p:sldId xmlns:r="http://schemas.openxmlformats.org/officeDocument/2006/relationships" id="258" r:id="Rdc9edf9531584523"/>
-    <p:sldId xmlns:r="http://schemas.openxmlformats.org/officeDocument/2006/relationships" id="259" r:id="R17eeb48c101046ea"/>
-    <p:sldId xmlns:r="http://schemas.openxmlformats.org/officeDocument/2006/relationships" id="260" r:id="R91f8d84400614a58"/>
-    <p:sldId xmlns:r="http://schemas.openxmlformats.org/officeDocument/2006/relationships" id="261" r:id="Ra88ca475c8d44a9c"/>
-    <p:sldId xmlns:r="http://schemas.openxmlformats.org/officeDocument/2006/relationships" id="262" r:id="Re3bcf9585be642bc"/>
-    <p:sldId xmlns:r="http://schemas.openxmlformats.org/officeDocument/2006/relationships" id="263" r:id="R3594582ba16b4063"/>
-    <p:sldId xmlns:r="http://schemas.openxmlformats.org/officeDocument/2006/relationships" id="264" r:id="Rc467c410d51e429f"/>
+    <p:sldId xmlns:r="http://schemas.openxmlformats.org/officeDocument/2006/relationships" id="256" r:id="Ra2d4bb2f51254d4e"/>
+    <p:sldId xmlns:r="http://schemas.openxmlformats.org/officeDocument/2006/relationships" id="257" r:id="Rccb0d6039d704ff9"/>
+    <p:sldId xmlns:r="http://schemas.openxmlformats.org/officeDocument/2006/relationships" id="258" r:id="Rab908662c18a4def"/>
+    <p:sldId xmlns:r="http://schemas.openxmlformats.org/officeDocument/2006/relationships" id="259" r:id="Rdf95b936cf9c4646"/>
+    <p:sldId xmlns:r="http://schemas.openxmlformats.org/officeDocument/2006/relationships" id="260" r:id="Re24cb9a17dfd4061"/>
+    <p:sldId xmlns:r="http://schemas.openxmlformats.org/officeDocument/2006/relationships" id="261" r:id="R8e249eaef184484b"/>
+    <p:sldId xmlns:r="http://schemas.openxmlformats.org/officeDocument/2006/relationships" id="262" r:id="Rb7567b42c73a4777"/>
+    <p:sldId xmlns:r="http://schemas.openxmlformats.org/officeDocument/2006/relationships" id="263" r:id="R9da64dee98af4cfe"/>
+    <p:sldId xmlns:r="http://schemas.openxmlformats.org/officeDocument/2006/relationships" id="264" r:id="R71e98e2ad7aa45b6"/>
   </p:sldIdLst>
   <p:sldSz cx="12192000" cy="6858000"/>
   <p:notesSz cx="6858000" cy="9144000"/>
   <p:embeddedFontLst>
     <p:embeddedFont>
       <p:font typeface="JetBrains Mono"/>
-      <p:regular xmlns:r="http://schemas.openxmlformats.org/officeDocument/2006/relationships" r:id="Rcd1cae7e25844ce7"/>
+      <p:regular xmlns:r="http://schemas.openxmlformats.org/officeDocument/2006/relationships" r:id="R247c267d214b4cce"/>
     </p:embeddedFont>
   </p:embeddedFontLst>
 </p:presentation>
@@ -1071,7 +1071,7 @@
           <p:nvPr/>
         </p:nvPicPr>
         <p:blipFill rotWithShape="1">
-          <a:blip xmlns:r="http://schemas.openxmlformats.org/officeDocument/2006/relationships" xmlns:a="http://schemas.openxmlformats.org/drawingml/2006/main" r:embed="Reae62f81c04e47cf"/>
+          <a:blip xmlns:r="http://schemas.openxmlformats.org/officeDocument/2006/relationships" xmlns:a="http://schemas.openxmlformats.org/drawingml/2006/main" r:embed="R29e293239d0a4854"/>
           <a:stretch xmlns:a="http://schemas.openxmlformats.org/drawingml/2006/main"/>
         </p:blipFill>
         <p:spPr>
@@ -1451,7 +1451,7 @@
           <p:nvPr/>
         </p:nvPicPr>
         <p:blipFill rotWithShape="1">
-          <a:blip xmlns:r="http://schemas.openxmlformats.org/officeDocument/2006/relationships" xmlns:a="http://schemas.openxmlformats.org/drawingml/2006/main" r:embed="R42e0044553784f89">
+          <a:blip xmlns:r="http://schemas.openxmlformats.org/officeDocument/2006/relationships" xmlns:a="http://schemas.openxmlformats.org/drawingml/2006/main" r:embed="R0ab6bc59cfa64240">
             <a:alphaModFix amt="28000"/>
           </a:blip>
           <a:stretch xmlns:a="http://schemas.openxmlformats.org/drawingml/2006/main"/>
@@ -1664,7 +1664,7 @@
           <p:nvPr/>
         </p:nvPicPr>
         <p:blipFill rotWithShape="1">
-          <a:blip xmlns:r="http://schemas.openxmlformats.org/officeDocument/2006/relationships" xmlns:a="http://schemas.openxmlformats.org/drawingml/2006/main" r:embed="Re7ff58349bfc4a94">
+          <a:blip xmlns:r="http://schemas.openxmlformats.org/officeDocument/2006/relationships" xmlns:a="http://schemas.openxmlformats.org/drawingml/2006/main" r:embed="R3bcf78bf484c48a0">
             <a:alphaModFix amt="28000"/>
           </a:blip>
           <a:stretch xmlns:a="http://schemas.openxmlformats.org/drawingml/2006/main"/>
@@ -1899,7 +1899,7 @@
           <p:nvPr/>
         </p:nvPicPr>
         <p:blipFill rotWithShape="1">
-          <a:blip xmlns:r="http://schemas.openxmlformats.org/officeDocument/2006/relationships" xmlns:a="http://schemas.openxmlformats.org/drawingml/2006/main" r:embed="Rec4cd71916104bc0">
+          <a:blip xmlns:r="http://schemas.openxmlformats.org/officeDocument/2006/relationships" xmlns:a="http://schemas.openxmlformats.org/drawingml/2006/main" r:embed="R17dba57a91e74cfb">
             <a:alphaModFix amt="28000"/>
           </a:blip>
           <a:stretch xmlns:a="http://schemas.openxmlformats.org/drawingml/2006/main"/>
@@ -2176,7 +2176,7 @@
           <p:nvPr/>
         </p:nvPicPr>
         <p:blipFill rotWithShape="1">
-          <a:blip xmlns:r="http://schemas.openxmlformats.org/officeDocument/2006/relationships" xmlns:a="http://schemas.openxmlformats.org/drawingml/2006/main" r:embed="R89eab5cfaea7407f">
+          <a:blip xmlns:r="http://schemas.openxmlformats.org/officeDocument/2006/relationships" xmlns:a="http://schemas.openxmlformats.org/drawingml/2006/main" r:embed="R80ac5d7775c84dff">
             <a:alphaModFix amt="28000"/>
           </a:blip>
           <a:stretch xmlns:a="http://schemas.openxmlformats.org/drawingml/2006/main"/>
@@ -2451,7 +2451,7 @@
           <p:nvPr/>
         </p:nvPicPr>
         <p:blipFill rotWithShape="1">
-          <a:blip xmlns:r="http://schemas.openxmlformats.org/officeDocument/2006/relationships" xmlns:a="http://schemas.openxmlformats.org/drawingml/2006/main" r:embed="Rba7ecf5720864fe5">
+          <a:blip xmlns:r="http://schemas.openxmlformats.org/officeDocument/2006/relationships" xmlns:a="http://schemas.openxmlformats.org/drawingml/2006/main" r:embed="R10b0dda253664a96">
             <a:alphaModFix amt="28000"/>
           </a:blip>
           <a:stretch xmlns:a="http://schemas.openxmlformats.org/drawingml/2006/main"/>
@@ -2875,7 +2875,7 @@
           <p:nvPr/>
         </p:nvPicPr>
         <p:blipFill rotWithShape="1">
-          <a:blip xmlns:r="http://schemas.openxmlformats.org/officeDocument/2006/relationships" xmlns:a="http://schemas.openxmlformats.org/drawingml/2006/main" r:embed="R3812598326a54310">
+          <a:blip xmlns:r="http://schemas.openxmlformats.org/officeDocument/2006/relationships" xmlns:a="http://schemas.openxmlformats.org/drawingml/2006/main" r:embed="Rc8fb0548a0214c20">
             <a:alphaModFix amt="28000"/>
           </a:blip>
           <a:stretch xmlns:a="http://schemas.openxmlformats.org/drawingml/2006/main"/>
@@ -3016,7 +3016,7 @@
           <p:nvPr/>
         </p:nvPicPr>
         <p:blipFill rotWithShape="1">
-          <a:blip xmlns:r="http://schemas.openxmlformats.org/officeDocument/2006/relationships" xmlns:a="http://schemas.openxmlformats.org/drawingml/2006/main" r:embed="R4c2efc48dc0f48b6">
+          <a:blip xmlns:r="http://schemas.openxmlformats.org/officeDocument/2006/relationships" xmlns:a="http://schemas.openxmlformats.org/drawingml/2006/main" r:embed="R89fc103ebcb44325">
             <a:alphaModFix amt="28000"/>
           </a:blip>
           <a:stretch xmlns:a="http://schemas.openxmlformats.org/drawingml/2006/main"/>
@@ -3130,7 +3130,7 @@
           <p:nvPr/>
         </p:nvPicPr>
         <p:blipFill rotWithShape="1">
-          <a:blip xmlns:r="http://schemas.openxmlformats.org/officeDocument/2006/relationships" xmlns:a="http://schemas.openxmlformats.org/drawingml/2006/main" r:embed="Rdd10c31e60024f07">
+          <a:blip xmlns:r="http://schemas.openxmlformats.org/officeDocument/2006/relationships" xmlns:a="http://schemas.openxmlformats.org/drawingml/2006/main" r:embed="R57ace0103c974bd1">
             <a:alphaModFix amt="28000"/>
           </a:blip>
           <a:stretch xmlns:a="http://schemas.openxmlformats.org/drawingml/2006/main"/>
@@ -3457,7 +3457,7 @@
           <p:nvPr/>
         </p:nvPicPr>
         <p:blipFill rotWithShape="1">
-          <a:blip xmlns:r="http://schemas.openxmlformats.org/officeDocument/2006/relationships" xmlns:a="http://schemas.openxmlformats.org/drawingml/2006/main" r:embed="Rbe1a4c6cab0b4ff2">
+          <a:blip xmlns:r="http://schemas.openxmlformats.org/officeDocument/2006/relationships" xmlns:a="http://schemas.openxmlformats.org/drawingml/2006/main" r:embed="R803939212e694eac">
             <a:alphaModFix amt="28000"/>
           </a:blip>
           <a:stretch xmlns:a="http://schemas.openxmlformats.org/drawingml/2006/main"/>
@@ -3745,7 +3745,7 @@
           <p:nvPr/>
         </p:nvPicPr>
         <p:blipFill rotWithShape="1">
-          <a:blip xmlns:r="http://schemas.openxmlformats.org/officeDocument/2006/relationships" xmlns:a="http://schemas.openxmlformats.org/drawingml/2006/main" r:embed="R26f69c9a148241a2">
+          <a:blip xmlns:r="http://schemas.openxmlformats.org/officeDocument/2006/relationships" xmlns:a="http://schemas.openxmlformats.org/drawingml/2006/main" r:embed="Rf67335de42ce4393">
             <a:alphaModFix amt="28000"/>
           </a:blip>
           <a:stretch xmlns:a="http://schemas.openxmlformats.org/drawingml/2006/main"/>
@@ -3982,17 +3982,17 @@
   </p:cSld>
   <p:clrMap bg1="lt1" tx1="dk1" bg2="lt2" tx2="dk2" accent1="accent1" accent2="accent2" accent3="accent3" accent4="accent4" accent5="accent5" accent6="accent6" hlink="hlink" folHlink="folHlink"/>
   <p:sldLayoutIdLst>
-    <p:sldLayoutId xmlns:r="http://schemas.openxmlformats.org/officeDocument/2006/relationships" id="2147483649" r:id="Rb8358659890d44ca"/>
-    <p:sldLayoutId xmlns:r="http://schemas.openxmlformats.org/officeDocument/2006/relationships" id="2147483650" r:id="R992d600109904a42"/>
-    <p:sldLayoutId xmlns:r="http://schemas.openxmlformats.org/officeDocument/2006/relationships" id="2147483651" r:id="Rc7bd0be10c3c48a6"/>
-    <p:sldLayoutId xmlns:r="http://schemas.openxmlformats.org/officeDocument/2006/relationships" id="2147483652" r:id="R07c8922905184923"/>
-    <p:sldLayoutId xmlns:r="http://schemas.openxmlformats.org/officeDocument/2006/relationships" id="2147483653" r:id="R49fd76af8c144519"/>
-    <p:sldLayoutId xmlns:r="http://schemas.openxmlformats.org/officeDocument/2006/relationships" id="2147483654" r:id="R4234bcf344da4a2e"/>
-    <p:sldLayoutId xmlns:r="http://schemas.openxmlformats.org/officeDocument/2006/relationships" id="2147483655" r:id="Rcb30a411c6064da3"/>
-    <p:sldLayoutId xmlns:r="http://schemas.openxmlformats.org/officeDocument/2006/relationships" id="2147483656" r:id="Rd553ade8bb38486c"/>
-    <p:sldLayoutId xmlns:r="http://schemas.openxmlformats.org/officeDocument/2006/relationships" id="2147483657" r:id="R2416cbdcdcbf4ddd"/>
-    <p:sldLayoutId xmlns:r="http://schemas.openxmlformats.org/officeDocument/2006/relationships" id="2147483658" r:id="Rcd034bde72ef4d06"/>
-    <p:sldLayoutId xmlns:r="http://schemas.openxmlformats.org/officeDocument/2006/relationships" id="2147483659" r:id="R30c68ac2775049c5"/>
+    <p:sldLayoutId xmlns:r="http://schemas.openxmlformats.org/officeDocument/2006/relationships" id="2147483649" r:id="R6cb3133910c94f33"/>
+    <p:sldLayoutId xmlns:r="http://schemas.openxmlformats.org/officeDocument/2006/relationships" id="2147483650" r:id="Rcd95e45ef1fd4e91"/>
+    <p:sldLayoutId xmlns:r="http://schemas.openxmlformats.org/officeDocument/2006/relationships" id="2147483651" r:id="R82ed8adf0d994290"/>
+    <p:sldLayoutId xmlns:r="http://schemas.openxmlformats.org/officeDocument/2006/relationships" id="2147483652" r:id="R945f764ede8348c2"/>
+    <p:sldLayoutId xmlns:r="http://schemas.openxmlformats.org/officeDocument/2006/relationships" id="2147483653" r:id="R24e5465b0f084bc9"/>
+    <p:sldLayoutId xmlns:r="http://schemas.openxmlformats.org/officeDocument/2006/relationships" id="2147483654" r:id="R5fe8564f1ce04d52"/>
+    <p:sldLayoutId xmlns:r="http://schemas.openxmlformats.org/officeDocument/2006/relationships" id="2147483655" r:id="R9dfe05db9ae144b2"/>
+    <p:sldLayoutId xmlns:r="http://schemas.openxmlformats.org/officeDocument/2006/relationships" id="2147483656" r:id="R3b5672f702e34988"/>
+    <p:sldLayoutId xmlns:r="http://schemas.openxmlformats.org/officeDocument/2006/relationships" id="2147483657" r:id="R0fdd46971182478e"/>
+    <p:sldLayoutId xmlns:r="http://schemas.openxmlformats.org/officeDocument/2006/relationships" id="2147483658" r:id="R28e6c058524c422b"/>
+    <p:sldLayoutId xmlns:r="http://schemas.openxmlformats.org/officeDocument/2006/relationships" id="2147483659" r:id="R852043f03240475c"/>
   </p:sldLayoutIdLst>
   <p:hf hdr="0" ftr="0" dt="0"/>
   <p:txStyles>
@@ -8499,18 +8499,18 @@
                 <a:ea typeface="Calibri"/>
                 <a:cs typeface="Calibri"/>
               </a:rPr>
-              <a:t>Change the exit route from 2 to 0. Update the menu prompt and the </a:t>
+              <a:t>Change the exit option from </a:t>
             </a:r>
             <a:r>
               <a:rPr sz="2400" b="0">
                 <a:solidFill>
-                  <a:srgbClr val="1750EB"/>
-                </a:solidFill>
-                <a:latin typeface="JetBrains Mono"/>
-                <a:ea typeface="JetBrains Mono"/>
-                <a:cs typeface="JetBrains Mono"/>
-              </a:rPr>
-              <a:t>elif</a:t>
+                  <a:srgbClr val="067D17"/>
+                </a:solidFill>
+                <a:latin typeface="JetBrains Mono"/>
+                <a:ea typeface="JetBrains Mono"/>
+                <a:cs typeface="JetBrains Mono"/>
+              </a:rPr>
+              <a:t>"2"</a:t>
             </a:r>
             <a:r>
               <a:rPr sz="2400" b="0">
@@ -8521,7 +8521,194 @@
                 <a:ea typeface="Calibri"/>
                 <a:cs typeface="Calibri"/>
               </a:rPr>
-              <a:t> comparison. Route 1 and invalid input must keep their existing behaviour. Test route 1, the invalid input x, and exit route 0.</a:t>
+              <a:t> to </a:t>
+            </a:r>
+            <a:r>
+              <a:rPr sz="2400" b="0">
+                <a:solidFill>
+                  <a:srgbClr val="067D17"/>
+                </a:solidFill>
+                <a:latin typeface="JetBrains Mono"/>
+                <a:ea typeface="JetBrains Mono"/>
+                <a:cs typeface="JetBrains Mono"/>
+              </a:rPr>
+              <a:t>"0"</a:t>
+            </a:r>
+            <a:r>
+              <a:rPr sz="2400" b="0">
+                <a:solidFill>
+                  <a:srgbClr val="080808"/>
+                </a:solidFill>
+                <a:latin typeface="Calibri"/>
+                <a:ea typeface="Calibri"/>
+                <a:cs typeface="Calibri"/>
+              </a:rPr>
+              <a:t> in both the input message and the </a:t>
+            </a:r>
+            <a:r>
+              <a:rPr sz="2400" b="0">
+                <a:solidFill>
+                  <a:srgbClr val="1750EB"/>
+                </a:solidFill>
+                <a:latin typeface="JetBrains Mono"/>
+                <a:ea typeface="JetBrains Mono"/>
+                <a:cs typeface="JetBrains Mono"/>
+              </a:rPr>
+              <a:t>elif</a:t>
+            </a:r>
+            <a:r>
+              <a:rPr sz="2400" b="0">
+                <a:solidFill>
+                  <a:srgbClr val="080808"/>
+                </a:solidFill>
+                <a:latin typeface="Calibri"/>
+                <a:ea typeface="Calibri"/>
+                <a:cs typeface="Calibri"/>
+              </a:rPr>
+              <a:t> condition. Keep option </a:t>
+            </a:r>
+            <a:r>
+              <a:rPr sz="2400" b="0">
+                <a:solidFill>
+                  <a:srgbClr val="067D17"/>
+                </a:solidFill>
+                <a:latin typeface="JetBrains Mono"/>
+                <a:ea typeface="JetBrains Mono"/>
+                <a:cs typeface="JetBrains Mono"/>
+              </a:rPr>
+              <a:t>"1"</a:t>
+            </a:r>
+            <a:r>
+              <a:rPr sz="2400" b="0">
+                <a:solidFill>
+                  <a:srgbClr val="080808"/>
+                </a:solidFill>
+                <a:latin typeface="Calibri"/>
+                <a:ea typeface="Calibri"/>
+                <a:cs typeface="Calibri"/>
+              </a:rPr>
+              <a:t> and the invalid-input message unchanged. Test </a:t>
+            </a:r>
+            <a:r>
+              <a:rPr sz="2400" b="0">
+                <a:solidFill>
+                  <a:srgbClr val="067D17"/>
+                </a:solidFill>
+                <a:latin typeface="JetBrains Mono"/>
+                <a:ea typeface="JetBrains Mono"/>
+                <a:cs typeface="JetBrains Mono"/>
+              </a:rPr>
+              <a:t>"1"</a:t>
+            </a:r>
+            <a:r>
+              <a:rPr sz="2400" b="0">
+                <a:solidFill>
+                  <a:srgbClr val="080808"/>
+                </a:solidFill>
+                <a:latin typeface="Calibri"/>
+                <a:ea typeface="Calibri"/>
+                <a:cs typeface="Calibri"/>
+              </a:rPr>
+              <a:t>, then </a:t>
+            </a:r>
+            <a:r>
+              <a:rPr sz="2400" b="0">
+                <a:solidFill>
+                  <a:srgbClr val="067D17"/>
+                </a:solidFill>
+                <a:latin typeface="JetBrains Mono"/>
+                <a:ea typeface="JetBrains Mono"/>
+                <a:cs typeface="JetBrains Mono"/>
+              </a:rPr>
+              <a:t>"x"</a:t>
+            </a:r>
+            <a:r>
+              <a:rPr sz="2400" b="0">
+                <a:solidFill>
+                  <a:srgbClr val="080808"/>
+                </a:solidFill>
+                <a:latin typeface="Calibri"/>
+                <a:ea typeface="Calibri"/>
+                <a:cs typeface="Calibri"/>
+              </a:rPr>
+              <a:t>, then </a:t>
+            </a:r>
+            <a:r>
+              <a:rPr sz="2400" b="0">
+                <a:solidFill>
+                  <a:srgbClr val="067D17"/>
+                </a:solidFill>
+                <a:latin typeface="JetBrains Mono"/>
+                <a:ea typeface="JetBrains Mono"/>
+                <a:cs typeface="JetBrains Mono"/>
+              </a:rPr>
+              <a:t>"0"</a:t>
+            </a:r>
+            <a:r>
+              <a:rPr sz="2400" b="0">
+                <a:solidFill>
+                  <a:srgbClr val="080808"/>
+                </a:solidFill>
+                <a:latin typeface="Calibri"/>
+                <a:ea typeface="Calibri"/>
+                <a:cs typeface="Calibri"/>
+              </a:rPr>
+              <a:t>; display </a:t>
+            </a:r>
+            <a:r>
+              <a:rPr sz="2400" b="0">
+                <a:solidFill>
+                  <a:srgbClr val="067D17"/>
+                </a:solidFill>
+                <a:latin typeface="JetBrains Mono"/>
+                <a:ea typeface="JetBrains Mono"/>
+                <a:cs typeface="JetBrains Mono"/>
+              </a:rPr>
+              <a:t>"Hello!"</a:t>
+            </a:r>
+            <a:r>
+              <a:rPr sz="2400" b="0">
+                <a:solidFill>
+                  <a:srgbClr val="080808"/>
+                </a:solidFill>
+                <a:latin typeface="Calibri"/>
+                <a:ea typeface="Calibri"/>
+                <a:cs typeface="Calibri"/>
+              </a:rPr>
+              <a:t>, </a:t>
+            </a:r>
+            <a:r>
+              <a:rPr sz="2400" b="0">
+                <a:solidFill>
+                  <a:srgbClr val="067D17"/>
+                </a:solidFill>
+                <a:latin typeface="JetBrains Mono"/>
+                <a:ea typeface="JetBrains Mono"/>
+                <a:cs typeface="JetBrains Mono"/>
+              </a:rPr>
+              <a:t>"Choose 1 or 0."</a:t>
+            </a:r>
+            <a:r>
+              <a:rPr sz="2400" b="0">
+                <a:solidFill>
+                  <a:srgbClr val="080808"/>
+                </a:solidFill>
+                <a:latin typeface="Calibri"/>
+                <a:ea typeface="Calibri"/>
+                <a:cs typeface="Calibri"/>
+              </a:rPr>
+              <a:t> and finally </a:t>
+            </a:r>
+            <a:r>
+              <a:rPr sz="2400" b="0">
+                <a:solidFill>
+                  <a:srgbClr val="067D17"/>
+                </a:solidFill>
+                <a:latin typeface="JetBrains Mono"/>
+                <a:ea typeface="JetBrains Mono"/>
+                <a:cs typeface="JetBrains Mono"/>
+              </a:rPr>
+              <a:t>"Menu closed."</a:t>
             </a:r>
           </a:p>
         </p:txBody>
@@ -9513,7 +9700,7 @@
                 <a:ea typeface="Calibri"/>
                 <a:cs typeface="Calibri"/>
               </a:rPr>
-              <a:t>Add route 3 to display </a:t>
+              <a:t>Add </a:t>
             </a:r>
             <a:r>
               <a:rPr sz="2400" b="0">
@@ -9524,7 +9711,7 @@
                 <a:ea typeface="JetBrains Mono"/>
                 <a:cs typeface="JetBrains Mono"/>
               </a:rPr>
-              <a:t>"Help: choose a number."</a:t>
+              <a:t>"3: help"</a:t>
             </a:r>
             <a:r>
               <a:rPr sz="2400" b="0">
@@ -9535,7 +9722,172 @@
                 <a:ea typeface="Calibri"/>
                 <a:cs typeface="Calibri"/>
               </a:rPr>
-              <a:t> Update the prompt and invalid guidance. Test the path 3, x, 2.</a:t>
+              <a:t> to the menu input message. Use an </a:t>
+            </a:r>
+            <a:r>
+              <a:rPr sz="2400" b="0">
+                <a:solidFill>
+                  <a:srgbClr val="1750EB"/>
+                </a:solidFill>
+                <a:latin typeface="JetBrains Mono"/>
+                <a:ea typeface="JetBrains Mono"/>
+                <a:cs typeface="JetBrains Mono"/>
+              </a:rPr>
+              <a:t>elif</a:t>
+            </a:r>
+            <a:r>
+              <a:rPr sz="2400" b="0">
+                <a:solidFill>
+                  <a:srgbClr val="080808"/>
+                </a:solidFill>
+                <a:latin typeface="Calibri"/>
+                <a:ea typeface="Calibri"/>
+                <a:cs typeface="Calibri"/>
+              </a:rPr>
+              <a:t> condition so </a:t>
+            </a:r>
+            <a:r>
+              <a:rPr sz="2400" b="0">
+                <a:solidFill>
+                  <a:srgbClr val="067D17"/>
+                </a:solidFill>
+                <a:latin typeface="JetBrains Mono"/>
+                <a:ea typeface="JetBrains Mono"/>
+                <a:cs typeface="JetBrains Mono"/>
+              </a:rPr>
+              <a:t>"3"</a:t>
+            </a:r>
+            <a:r>
+              <a:rPr sz="2400" b="0">
+                <a:solidFill>
+                  <a:srgbClr val="080808"/>
+                </a:solidFill>
+                <a:latin typeface="Calibri"/>
+                <a:ea typeface="Calibri"/>
+                <a:cs typeface="Calibri"/>
+              </a:rPr>
+              <a:t> displays </a:t>
+            </a:r>
+            <a:r>
+              <a:rPr sz="2400" b="0">
+                <a:solidFill>
+                  <a:srgbClr val="067D17"/>
+                </a:solidFill>
+                <a:latin typeface="JetBrains Mono"/>
+                <a:ea typeface="JetBrains Mono"/>
+                <a:cs typeface="JetBrains Mono"/>
+              </a:rPr>
+              <a:t>"Help: choose a number."</a:t>
+            </a:r>
+            <a:r>
+              <a:rPr sz="2400" b="0">
+                <a:solidFill>
+                  <a:srgbClr val="080808"/>
+                </a:solidFill>
+                <a:latin typeface="Calibri"/>
+                <a:ea typeface="Calibri"/>
+                <a:cs typeface="Calibri"/>
+              </a:rPr>
+              <a:t> Change the invalid-input message to </a:t>
+            </a:r>
+            <a:r>
+              <a:rPr sz="2400" b="0">
+                <a:solidFill>
+                  <a:srgbClr val="067D17"/>
+                </a:solidFill>
+                <a:latin typeface="JetBrains Mono"/>
+                <a:ea typeface="JetBrains Mono"/>
+                <a:cs typeface="JetBrains Mono"/>
+              </a:rPr>
+              <a:t>"Choose 1, 2 or 3."</a:t>
+            </a:r>
+            <a:r>
+              <a:rPr sz="2400" b="0">
+                <a:solidFill>
+                  <a:srgbClr val="080808"/>
+                </a:solidFill>
+                <a:latin typeface="Calibri"/>
+                <a:ea typeface="Calibri"/>
+                <a:cs typeface="Calibri"/>
+              </a:rPr>
+              <a:t> Test </a:t>
+            </a:r>
+            <a:r>
+              <a:rPr sz="2400" b="0">
+                <a:solidFill>
+                  <a:srgbClr val="067D17"/>
+                </a:solidFill>
+                <a:latin typeface="JetBrains Mono"/>
+                <a:ea typeface="JetBrains Mono"/>
+                <a:cs typeface="JetBrains Mono"/>
+              </a:rPr>
+              <a:t>"3"</a:t>
+            </a:r>
+            <a:r>
+              <a:rPr sz="2400" b="0">
+                <a:solidFill>
+                  <a:srgbClr val="080808"/>
+                </a:solidFill>
+                <a:latin typeface="Calibri"/>
+                <a:ea typeface="Calibri"/>
+                <a:cs typeface="Calibri"/>
+              </a:rPr>
+              <a:t>, </a:t>
+            </a:r>
+            <a:r>
+              <a:rPr sz="2400" b="0">
+                <a:solidFill>
+                  <a:srgbClr val="067D17"/>
+                </a:solidFill>
+                <a:latin typeface="JetBrains Mono"/>
+                <a:ea typeface="JetBrains Mono"/>
+                <a:cs typeface="JetBrains Mono"/>
+              </a:rPr>
+              <a:t>"x"</a:t>
+            </a:r>
+            <a:r>
+              <a:rPr sz="2400" b="0">
+                <a:solidFill>
+                  <a:srgbClr val="080808"/>
+                </a:solidFill>
+                <a:latin typeface="Calibri"/>
+                <a:ea typeface="Calibri"/>
+                <a:cs typeface="Calibri"/>
+              </a:rPr>
+              <a:t>, then </a:t>
+            </a:r>
+            <a:r>
+              <a:rPr sz="2400" b="0">
+                <a:solidFill>
+                  <a:srgbClr val="067D17"/>
+                </a:solidFill>
+                <a:latin typeface="JetBrains Mono"/>
+                <a:ea typeface="JetBrains Mono"/>
+                <a:cs typeface="JetBrains Mono"/>
+              </a:rPr>
+              <a:t>"2"</a:t>
+            </a:r>
+            <a:r>
+              <a:rPr sz="2400" b="0">
+                <a:solidFill>
+                  <a:srgbClr val="080808"/>
+                </a:solidFill>
+                <a:latin typeface="Calibri"/>
+                <a:ea typeface="Calibri"/>
+                <a:cs typeface="Calibri"/>
+              </a:rPr>
+              <a:t>; display the help message, invalid-input message, then </a:t>
+            </a:r>
+            <a:r>
+              <a:rPr sz="2400" b="0">
+                <a:solidFill>
+                  <a:srgbClr val="067D17"/>
+                </a:solidFill>
+                <a:latin typeface="JetBrains Mono"/>
+                <a:ea typeface="JetBrains Mono"/>
+                <a:cs typeface="JetBrains Mono"/>
+              </a:rPr>
+              <a:t>"Menu closed."</a:t>
             </a:r>
           </a:p>
         </p:txBody>
@@ -10508,7 +10860,7 @@
         </p:spPr>
         <p:txBody>
           <a:bodyPr xmlns:a="http://schemas.openxmlformats.org/drawingml/2006/main">
-            <a:normAutofit fontScale="100000"/>
+            <a:normAutofit fontScale="87835"/>
           </a:bodyPr>
           <a:lstStyle xmlns:a="http://schemas.openxmlformats.org/drawingml/2006/main"/>
           <a:p xmlns:a="http://schemas.openxmlformats.org/drawingml/2006/main">
@@ -10527,7 +10879,337 @@
                 <a:ea typeface="Calibri"/>
                 <a:cs typeface="Calibri"/>
               </a:rPr>
-              <a:t>Build a repeating transport menu with two useful routes, one exit route and one invalid-input message. At least one useful route must ask a follow-up question and display a labelled response.</a:t>
+              <a:t>Use a </a:t>
+            </a:r>
+            <a:r>
+              <a:rPr sz="2400" b="0">
+                <a:solidFill>
+                  <a:srgbClr val="1750EB"/>
+                </a:solidFill>
+                <a:latin typeface="JetBrains Mono"/>
+                <a:ea typeface="JetBrains Mono"/>
+                <a:cs typeface="JetBrains Mono"/>
+              </a:rPr>
+              <a:t>while</a:t>
+            </a:r>
+            <a:r>
+              <a:rPr sz="2400" b="0">
+                <a:solidFill>
+                  <a:srgbClr val="080808"/>
+                </a:solidFill>
+                <a:latin typeface="Calibri"/>
+                <a:ea typeface="Calibri"/>
+                <a:cs typeface="Calibri"/>
+              </a:rPr>
+              <a:t> loop to repeat the menu </a:t>
+            </a:r>
+            <a:r>
+              <a:rPr sz="2400" b="0">
+                <a:solidFill>
+                  <a:srgbClr val="067D17"/>
+                </a:solidFill>
+                <a:latin typeface="JetBrains Mono"/>
+                <a:ea typeface="JetBrains Mono"/>
+                <a:cs typeface="JetBrains Mono"/>
+              </a:rPr>
+              <a:t>"1: bus, 2: walk, 3: leave"</a:t>
+            </a:r>
+            <a:r>
+              <a:rPr sz="2400" b="0">
+                <a:solidFill>
+                  <a:srgbClr val="080808"/>
+                </a:solidFill>
+                <a:latin typeface="Calibri"/>
+                <a:ea typeface="Calibri"/>
+                <a:cs typeface="Calibri"/>
+              </a:rPr>
+              <a:t>. Use </a:t>
+            </a:r>
+            <a:r>
+              <a:rPr sz="2400" b="0">
+                <a:solidFill>
+                  <a:srgbClr val="1750EB"/>
+                </a:solidFill>
+                <a:latin typeface="JetBrains Mono"/>
+                <a:ea typeface="JetBrains Mono"/>
+                <a:cs typeface="JetBrains Mono"/>
+              </a:rPr>
+              <a:t>if</a:t>
+            </a:r>
+            <a:r>
+              <a:rPr sz="2400" b="0">
+                <a:solidFill>
+                  <a:srgbClr val="080808"/>
+                </a:solidFill>
+                <a:latin typeface="Calibri"/>
+                <a:ea typeface="Calibri"/>
+                <a:cs typeface="Calibri"/>
+              </a:rPr>
+              <a:t> and </a:t>
+            </a:r>
+            <a:r>
+              <a:rPr sz="2400" b="0">
+                <a:solidFill>
+                  <a:srgbClr val="1750EB"/>
+                </a:solidFill>
+                <a:latin typeface="JetBrains Mono"/>
+                <a:ea typeface="JetBrains Mono"/>
+                <a:cs typeface="JetBrains Mono"/>
+              </a:rPr>
+              <a:t>elif</a:t>
+            </a:r>
+            <a:r>
+              <a:rPr sz="2400" b="0">
+                <a:solidFill>
+                  <a:srgbClr val="080808"/>
+                </a:solidFill>
+                <a:latin typeface="Calibri"/>
+                <a:ea typeface="Calibri"/>
+                <a:cs typeface="Calibri"/>
+              </a:rPr>
+              <a:t> conditions for the choices. For </a:t>
+            </a:r>
+            <a:r>
+              <a:rPr sz="2400" b="0">
+                <a:solidFill>
+                  <a:srgbClr val="067D17"/>
+                </a:solidFill>
+                <a:latin typeface="JetBrains Mono"/>
+                <a:ea typeface="JetBrains Mono"/>
+                <a:cs typeface="JetBrains Mono"/>
+              </a:rPr>
+              <a:t>"1"</a:t>
+            </a:r>
+            <a:r>
+              <a:rPr sz="2400" b="0">
+                <a:solidFill>
+                  <a:srgbClr val="080808"/>
+                </a:solidFill>
+                <a:latin typeface="Calibri"/>
+                <a:ea typeface="Calibri"/>
+                <a:cs typeface="Calibri"/>
+              </a:rPr>
+              <a:t>, ask for a bus stop in [stop] and display </a:t>
+            </a:r>
+            <a:r>
+              <a:rPr sz="2400" b="0">
+                <a:solidFill>
+                  <a:srgbClr val="067D17"/>
+                </a:solidFill>
+                <a:latin typeface="JetBrains Mono"/>
+                <a:ea typeface="JetBrains Mono"/>
+                <a:cs typeface="JetBrains Mono"/>
+              </a:rPr>
+              <a:t>"Selected stop:"</a:t>
+            </a:r>
+            <a:r>
+              <a:rPr sz="2400" b="0">
+                <a:solidFill>
+                  <a:srgbClr val="080808"/>
+                </a:solidFill>
+                <a:latin typeface="Calibri"/>
+                <a:ea typeface="Calibri"/>
+                <a:cs typeface="Calibri"/>
+              </a:rPr>
+              <a:t> with [stop]. For </a:t>
+            </a:r>
+            <a:r>
+              <a:rPr sz="2400" b="0">
+                <a:solidFill>
+                  <a:srgbClr val="067D17"/>
+                </a:solidFill>
+                <a:latin typeface="JetBrains Mono"/>
+                <a:ea typeface="JetBrains Mono"/>
+                <a:cs typeface="JetBrains Mono"/>
+              </a:rPr>
+              <a:t>"2"</a:t>
+            </a:r>
+            <a:r>
+              <a:rPr sz="2400" b="0">
+                <a:solidFill>
+                  <a:srgbClr val="080808"/>
+                </a:solidFill>
+                <a:latin typeface="Calibri"/>
+                <a:ea typeface="Calibri"/>
+                <a:cs typeface="Calibri"/>
+              </a:rPr>
+              <a:t>, display </a:t>
+            </a:r>
+            <a:r>
+              <a:rPr sz="2400" b="0">
+                <a:solidFill>
+                  <a:srgbClr val="067D17"/>
+                </a:solidFill>
+                <a:latin typeface="JetBrains Mono"/>
+                <a:ea typeface="JetBrains Mono"/>
+                <a:cs typeface="JetBrains Mono"/>
+              </a:rPr>
+              <a:t>"Walk selected."</a:t>
+            </a:r>
+            <a:r>
+              <a:rPr sz="2400" b="0">
+                <a:solidFill>
+                  <a:srgbClr val="080808"/>
+                </a:solidFill>
+                <a:latin typeface="Calibri"/>
+                <a:ea typeface="Calibri"/>
+                <a:cs typeface="Calibri"/>
+              </a:rPr>
+              <a:t> For </a:t>
+            </a:r>
+            <a:r>
+              <a:rPr sz="2400" b="0">
+                <a:solidFill>
+                  <a:srgbClr val="067D17"/>
+                </a:solidFill>
+                <a:latin typeface="JetBrains Mono"/>
+                <a:ea typeface="JetBrains Mono"/>
+                <a:cs typeface="JetBrains Mono"/>
+              </a:rPr>
+              <a:t>"3"</a:t>
+            </a:r>
+            <a:r>
+              <a:rPr sz="2400" b="0">
+                <a:solidFill>
+                  <a:srgbClr val="080808"/>
+                </a:solidFill>
+                <a:latin typeface="Calibri"/>
+                <a:ea typeface="Calibri"/>
+                <a:cs typeface="Calibri"/>
+              </a:rPr>
+              <a:t>, end the loop and display </a:t>
+            </a:r>
+            <a:r>
+              <a:rPr sz="2400" b="0">
+                <a:solidFill>
+                  <a:srgbClr val="067D17"/>
+                </a:solidFill>
+                <a:latin typeface="JetBrains Mono"/>
+                <a:ea typeface="JetBrains Mono"/>
+                <a:cs typeface="JetBrains Mono"/>
+              </a:rPr>
+              <a:t>"Planner closed."</a:t>
+            </a:r>
+            <a:r>
+              <a:rPr sz="2400" b="0">
+                <a:solidFill>
+                  <a:srgbClr val="080808"/>
+                </a:solidFill>
+                <a:latin typeface="Calibri"/>
+                <a:ea typeface="Calibri"/>
+                <a:cs typeface="Calibri"/>
+              </a:rPr>
+              <a:t> Otherwise, display </a:t>
+            </a:r>
+            <a:r>
+              <a:rPr sz="2400" b="0">
+                <a:solidFill>
+                  <a:srgbClr val="067D17"/>
+                </a:solidFill>
+                <a:latin typeface="JetBrains Mono"/>
+                <a:ea typeface="JetBrains Mono"/>
+                <a:cs typeface="JetBrains Mono"/>
+              </a:rPr>
+              <a:t>"Choose 1, 2 or 3."</a:t>
+            </a:r>
+            <a:r>
+              <a:rPr sz="2400" b="0">
+                <a:solidFill>
+                  <a:srgbClr val="080808"/>
+                </a:solidFill>
+                <a:latin typeface="Calibri"/>
+                <a:ea typeface="Calibri"/>
+                <a:cs typeface="Calibri"/>
+              </a:rPr>
+              <a:t> Test </a:t>
+            </a:r>
+            <a:r>
+              <a:rPr sz="2400" b="0">
+                <a:solidFill>
+                  <a:srgbClr val="067D17"/>
+                </a:solidFill>
+                <a:latin typeface="JetBrains Mono"/>
+                <a:ea typeface="JetBrains Mono"/>
+                <a:cs typeface="JetBrains Mono"/>
+              </a:rPr>
+              <a:t>"1"</a:t>
+            </a:r>
+            <a:r>
+              <a:rPr sz="2400" b="0">
+                <a:solidFill>
+                  <a:srgbClr val="080808"/>
+                </a:solidFill>
+                <a:latin typeface="Calibri"/>
+                <a:ea typeface="Calibri"/>
+                <a:cs typeface="Calibri"/>
+              </a:rPr>
+              <a:t>, </a:t>
+            </a:r>
+            <a:r>
+              <a:rPr sz="2400" b="0">
+                <a:solidFill>
+                  <a:srgbClr val="067D17"/>
+                </a:solidFill>
+                <a:latin typeface="JetBrains Mono"/>
+                <a:ea typeface="JetBrains Mono"/>
+                <a:cs typeface="JetBrains Mono"/>
+              </a:rPr>
+              <a:t>"Central"</a:t>
+            </a:r>
+            <a:r>
+              <a:rPr sz="2400" b="0">
+                <a:solidFill>
+                  <a:srgbClr val="080808"/>
+                </a:solidFill>
+                <a:latin typeface="Calibri"/>
+                <a:ea typeface="Calibri"/>
+                <a:cs typeface="Calibri"/>
+              </a:rPr>
+              <a:t>, </a:t>
+            </a:r>
+            <a:r>
+              <a:rPr sz="2400" b="0">
+                <a:solidFill>
+                  <a:srgbClr val="067D17"/>
+                </a:solidFill>
+                <a:latin typeface="JetBrains Mono"/>
+                <a:ea typeface="JetBrains Mono"/>
+                <a:cs typeface="JetBrains Mono"/>
+              </a:rPr>
+              <a:t>"2"</a:t>
+            </a:r>
+            <a:r>
+              <a:rPr sz="2400" b="0">
+                <a:solidFill>
+                  <a:srgbClr val="080808"/>
+                </a:solidFill>
+                <a:latin typeface="Calibri"/>
+                <a:ea typeface="Calibri"/>
+                <a:cs typeface="Calibri"/>
+              </a:rPr>
+              <a:t>, then </a:t>
+            </a:r>
+            <a:r>
+              <a:rPr sz="2400" b="0">
+                <a:solidFill>
+                  <a:srgbClr val="067D17"/>
+                </a:solidFill>
+                <a:latin typeface="JetBrains Mono"/>
+                <a:ea typeface="JetBrains Mono"/>
+                <a:cs typeface="JetBrains Mono"/>
+              </a:rPr>
+              <a:t>"3"</a:t>
+            </a:r>
+            <a:r>
+              <a:rPr sz="2400" b="0">
+                <a:solidFill>
+                  <a:srgbClr val="080808"/>
+                </a:solidFill>
+                <a:latin typeface="Calibri"/>
+                <a:ea typeface="Calibri"/>
+                <a:cs typeface="Calibri"/>
+              </a:rPr>
+              <a:t>.</a:t>
             </a:r>
           </a:p>
         </p:txBody>

--- a/Mapped Curriculum Lessons/Grade 7/Lesson 20 - Reliable Menus/Reliable Menus - Slides.pptx
+++ b/Mapped Curriculum Lessons/Grade 7/Lesson 20 - Reliable Menus/Reliable Menus - Slides.pptx
@@ -2,28 +2,28 @@
 <file path=ppt/presentation.xml><?xml version="1.0" encoding="utf-8"?>
 <p:presentation xmlns:p="http://schemas.openxmlformats.org/presentationml/2006/main" embedTrueTypeFonts="1" saveSubsetFonts="0">
   <p:sldMasterIdLst>
-    <p:sldMasterId xmlns:r="http://schemas.openxmlformats.org/officeDocument/2006/relationships" id="2147483648" r:id="Ra738230500e6408c"/>
+    <p:sldMasterId xmlns:r="http://schemas.openxmlformats.org/officeDocument/2006/relationships" id="2147483648" r:id="R5533950a810a4d4c"/>
   </p:sldMasterIdLst>
   <p:notesMasterIdLst>
-    <p:notesMasterId xmlns:r="http://schemas.openxmlformats.org/officeDocument/2006/relationships" r:id="R1fed4c0a87d14822"/>
+    <p:notesMasterId xmlns:r="http://schemas.openxmlformats.org/officeDocument/2006/relationships" r:id="Ra37c0195fefc4d67"/>
   </p:notesMasterIdLst>
   <p:sldIdLst>
-    <p:sldId xmlns:r="http://schemas.openxmlformats.org/officeDocument/2006/relationships" id="256" r:id="Ra2d4bb2f51254d4e"/>
-    <p:sldId xmlns:r="http://schemas.openxmlformats.org/officeDocument/2006/relationships" id="257" r:id="Rccb0d6039d704ff9"/>
-    <p:sldId xmlns:r="http://schemas.openxmlformats.org/officeDocument/2006/relationships" id="258" r:id="Rab908662c18a4def"/>
-    <p:sldId xmlns:r="http://schemas.openxmlformats.org/officeDocument/2006/relationships" id="259" r:id="Rdf95b936cf9c4646"/>
-    <p:sldId xmlns:r="http://schemas.openxmlformats.org/officeDocument/2006/relationships" id="260" r:id="Re24cb9a17dfd4061"/>
-    <p:sldId xmlns:r="http://schemas.openxmlformats.org/officeDocument/2006/relationships" id="261" r:id="R8e249eaef184484b"/>
-    <p:sldId xmlns:r="http://schemas.openxmlformats.org/officeDocument/2006/relationships" id="262" r:id="Rb7567b42c73a4777"/>
-    <p:sldId xmlns:r="http://schemas.openxmlformats.org/officeDocument/2006/relationships" id="263" r:id="R9da64dee98af4cfe"/>
-    <p:sldId xmlns:r="http://schemas.openxmlformats.org/officeDocument/2006/relationships" id="264" r:id="R71e98e2ad7aa45b6"/>
+    <p:sldId xmlns:r="http://schemas.openxmlformats.org/officeDocument/2006/relationships" id="256" r:id="Rf544ca955c484560"/>
+    <p:sldId xmlns:r="http://schemas.openxmlformats.org/officeDocument/2006/relationships" id="257" r:id="Rc515586090e8423c"/>
+    <p:sldId xmlns:r="http://schemas.openxmlformats.org/officeDocument/2006/relationships" id="258" r:id="R731fdbe9dfca4405"/>
+    <p:sldId xmlns:r="http://schemas.openxmlformats.org/officeDocument/2006/relationships" id="259" r:id="R0757bc657e5a445d"/>
+    <p:sldId xmlns:r="http://schemas.openxmlformats.org/officeDocument/2006/relationships" id="260" r:id="R1fb3cad1ae7045be"/>
+    <p:sldId xmlns:r="http://schemas.openxmlformats.org/officeDocument/2006/relationships" id="261" r:id="R5662f1d244f14fdf"/>
+    <p:sldId xmlns:r="http://schemas.openxmlformats.org/officeDocument/2006/relationships" id="262" r:id="R72be2c6ba7324944"/>
+    <p:sldId xmlns:r="http://schemas.openxmlformats.org/officeDocument/2006/relationships" id="263" r:id="R3cbfd78203f04a9f"/>
+    <p:sldId xmlns:r="http://schemas.openxmlformats.org/officeDocument/2006/relationships" id="264" r:id="Rbb4474e3e80b4564"/>
   </p:sldIdLst>
   <p:sldSz cx="12192000" cy="6858000"/>
   <p:notesSz cx="6858000" cy="9144000"/>
   <p:embeddedFontLst>
     <p:embeddedFont>
       <p:font typeface="JetBrains Mono"/>
-      <p:regular xmlns:r="http://schemas.openxmlformats.org/officeDocument/2006/relationships" r:id="R247c267d214b4cce"/>
+      <p:regular xmlns:r="http://schemas.openxmlformats.org/officeDocument/2006/relationships" r:id="R2e984d30a8fa4f28"/>
     </p:embeddedFont>
   </p:embeddedFontLst>
 </p:presentation>
@@ -1071,7 +1071,7 @@
           <p:nvPr/>
         </p:nvPicPr>
         <p:blipFill rotWithShape="1">
-          <a:blip xmlns:r="http://schemas.openxmlformats.org/officeDocument/2006/relationships" xmlns:a="http://schemas.openxmlformats.org/drawingml/2006/main" r:embed="R29e293239d0a4854"/>
+          <a:blip xmlns:r="http://schemas.openxmlformats.org/officeDocument/2006/relationships" xmlns:a="http://schemas.openxmlformats.org/drawingml/2006/main" r:embed="R8888a6b3821e424a"/>
           <a:stretch xmlns:a="http://schemas.openxmlformats.org/drawingml/2006/main"/>
         </p:blipFill>
         <p:spPr>
@@ -1451,7 +1451,7 @@
           <p:nvPr/>
         </p:nvPicPr>
         <p:blipFill rotWithShape="1">
-          <a:blip xmlns:r="http://schemas.openxmlformats.org/officeDocument/2006/relationships" xmlns:a="http://schemas.openxmlformats.org/drawingml/2006/main" r:embed="R0ab6bc59cfa64240">
+          <a:blip xmlns:r="http://schemas.openxmlformats.org/officeDocument/2006/relationships" xmlns:a="http://schemas.openxmlformats.org/drawingml/2006/main" r:embed="Ra678b1bf7cae4bfe">
             <a:alphaModFix amt="28000"/>
           </a:blip>
           <a:stretch xmlns:a="http://schemas.openxmlformats.org/drawingml/2006/main"/>
@@ -1664,7 +1664,7 @@
           <p:nvPr/>
         </p:nvPicPr>
         <p:blipFill rotWithShape="1">
-          <a:blip xmlns:r="http://schemas.openxmlformats.org/officeDocument/2006/relationships" xmlns:a="http://schemas.openxmlformats.org/drawingml/2006/main" r:embed="R3bcf78bf484c48a0">
+          <a:blip xmlns:r="http://schemas.openxmlformats.org/officeDocument/2006/relationships" xmlns:a="http://schemas.openxmlformats.org/drawingml/2006/main" r:embed="R47eed3ea454a4f2b">
             <a:alphaModFix amt="28000"/>
           </a:blip>
           <a:stretch xmlns:a="http://schemas.openxmlformats.org/drawingml/2006/main"/>
@@ -1899,7 +1899,7 @@
           <p:nvPr/>
         </p:nvPicPr>
         <p:blipFill rotWithShape="1">
-          <a:blip xmlns:r="http://schemas.openxmlformats.org/officeDocument/2006/relationships" xmlns:a="http://schemas.openxmlformats.org/drawingml/2006/main" r:embed="R17dba57a91e74cfb">
+          <a:blip xmlns:r="http://schemas.openxmlformats.org/officeDocument/2006/relationships" xmlns:a="http://schemas.openxmlformats.org/drawingml/2006/main" r:embed="R844601a0ae724bb3">
             <a:alphaModFix amt="28000"/>
           </a:blip>
           <a:stretch xmlns:a="http://schemas.openxmlformats.org/drawingml/2006/main"/>
@@ -2176,7 +2176,7 @@
           <p:nvPr/>
         </p:nvPicPr>
         <p:blipFill rotWithShape="1">
-          <a:blip xmlns:r="http://schemas.openxmlformats.org/officeDocument/2006/relationships" xmlns:a="http://schemas.openxmlformats.org/drawingml/2006/main" r:embed="R80ac5d7775c84dff">
+          <a:blip xmlns:r="http://schemas.openxmlformats.org/officeDocument/2006/relationships" xmlns:a="http://schemas.openxmlformats.org/drawingml/2006/main" r:embed="R200bd853621740f1">
             <a:alphaModFix amt="28000"/>
           </a:blip>
           <a:stretch xmlns:a="http://schemas.openxmlformats.org/drawingml/2006/main"/>
@@ -2451,7 +2451,7 @@
           <p:nvPr/>
         </p:nvPicPr>
         <p:blipFill rotWithShape="1">
-          <a:blip xmlns:r="http://schemas.openxmlformats.org/officeDocument/2006/relationships" xmlns:a="http://schemas.openxmlformats.org/drawingml/2006/main" r:embed="R10b0dda253664a96">
+          <a:blip xmlns:r="http://schemas.openxmlformats.org/officeDocument/2006/relationships" xmlns:a="http://schemas.openxmlformats.org/drawingml/2006/main" r:embed="Rac2ca79c837f4a72">
             <a:alphaModFix amt="28000"/>
           </a:blip>
           <a:stretch xmlns:a="http://schemas.openxmlformats.org/drawingml/2006/main"/>
@@ -2875,7 +2875,7 @@
           <p:nvPr/>
         </p:nvPicPr>
         <p:blipFill rotWithShape="1">
-          <a:blip xmlns:r="http://schemas.openxmlformats.org/officeDocument/2006/relationships" xmlns:a="http://schemas.openxmlformats.org/drawingml/2006/main" r:embed="Rc8fb0548a0214c20">
+          <a:blip xmlns:r="http://schemas.openxmlformats.org/officeDocument/2006/relationships" xmlns:a="http://schemas.openxmlformats.org/drawingml/2006/main" r:embed="Rf35d10c0f1f247e2">
             <a:alphaModFix amt="28000"/>
           </a:blip>
           <a:stretch xmlns:a="http://schemas.openxmlformats.org/drawingml/2006/main"/>
@@ -3016,7 +3016,7 @@
           <p:nvPr/>
         </p:nvPicPr>
         <p:blipFill rotWithShape="1">
-          <a:blip xmlns:r="http://schemas.openxmlformats.org/officeDocument/2006/relationships" xmlns:a="http://schemas.openxmlformats.org/drawingml/2006/main" r:embed="R89fc103ebcb44325">
+          <a:blip xmlns:r="http://schemas.openxmlformats.org/officeDocument/2006/relationships" xmlns:a="http://schemas.openxmlformats.org/drawingml/2006/main" r:embed="R33ad2b98a40b4d46">
             <a:alphaModFix amt="28000"/>
           </a:blip>
           <a:stretch xmlns:a="http://schemas.openxmlformats.org/drawingml/2006/main"/>
@@ -3130,7 +3130,7 @@
           <p:nvPr/>
         </p:nvPicPr>
         <p:blipFill rotWithShape="1">
-          <a:blip xmlns:r="http://schemas.openxmlformats.org/officeDocument/2006/relationships" xmlns:a="http://schemas.openxmlformats.org/drawingml/2006/main" r:embed="R57ace0103c974bd1">
+          <a:blip xmlns:r="http://schemas.openxmlformats.org/officeDocument/2006/relationships" xmlns:a="http://schemas.openxmlformats.org/drawingml/2006/main" r:embed="R4f787d7702df485c">
             <a:alphaModFix amt="28000"/>
           </a:blip>
           <a:stretch xmlns:a="http://schemas.openxmlformats.org/drawingml/2006/main"/>
@@ -3457,7 +3457,7 @@
           <p:nvPr/>
         </p:nvPicPr>
         <p:blipFill rotWithShape="1">
-          <a:blip xmlns:r="http://schemas.openxmlformats.org/officeDocument/2006/relationships" xmlns:a="http://schemas.openxmlformats.org/drawingml/2006/main" r:embed="R803939212e694eac">
+          <a:blip xmlns:r="http://schemas.openxmlformats.org/officeDocument/2006/relationships" xmlns:a="http://schemas.openxmlformats.org/drawingml/2006/main" r:embed="R78027389b5e545dc">
             <a:alphaModFix amt="28000"/>
           </a:blip>
           <a:stretch xmlns:a="http://schemas.openxmlformats.org/drawingml/2006/main"/>
@@ -3745,7 +3745,7 @@
           <p:nvPr/>
         </p:nvPicPr>
         <p:blipFill rotWithShape="1">
-          <a:blip xmlns:r="http://schemas.openxmlformats.org/officeDocument/2006/relationships" xmlns:a="http://schemas.openxmlformats.org/drawingml/2006/main" r:embed="Rf67335de42ce4393">
+          <a:blip xmlns:r="http://schemas.openxmlformats.org/officeDocument/2006/relationships" xmlns:a="http://schemas.openxmlformats.org/drawingml/2006/main" r:embed="Rb89827e493b64f57">
             <a:alphaModFix amt="28000"/>
           </a:blip>
           <a:stretch xmlns:a="http://schemas.openxmlformats.org/drawingml/2006/main"/>
@@ -3982,17 +3982,17 @@
   </p:cSld>
   <p:clrMap bg1="lt1" tx1="dk1" bg2="lt2" tx2="dk2" accent1="accent1" accent2="accent2" accent3="accent3" accent4="accent4" accent5="accent5" accent6="accent6" hlink="hlink" folHlink="folHlink"/>
   <p:sldLayoutIdLst>
-    <p:sldLayoutId xmlns:r="http://schemas.openxmlformats.org/officeDocument/2006/relationships" id="2147483649" r:id="R6cb3133910c94f33"/>
-    <p:sldLayoutId xmlns:r="http://schemas.openxmlformats.org/officeDocument/2006/relationships" id="2147483650" r:id="Rcd95e45ef1fd4e91"/>
-    <p:sldLayoutId xmlns:r="http://schemas.openxmlformats.org/officeDocument/2006/relationships" id="2147483651" r:id="R82ed8adf0d994290"/>
-    <p:sldLayoutId xmlns:r="http://schemas.openxmlformats.org/officeDocument/2006/relationships" id="2147483652" r:id="R945f764ede8348c2"/>
-    <p:sldLayoutId xmlns:r="http://schemas.openxmlformats.org/officeDocument/2006/relationships" id="2147483653" r:id="R24e5465b0f084bc9"/>
-    <p:sldLayoutId xmlns:r="http://schemas.openxmlformats.org/officeDocument/2006/relationships" id="2147483654" r:id="R5fe8564f1ce04d52"/>
-    <p:sldLayoutId xmlns:r="http://schemas.openxmlformats.org/officeDocument/2006/relationships" id="2147483655" r:id="R9dfe05db9ae144b2"/>
-    <p:sldLayoutId xmlns:r="http://schemas.openxmlformats.org/officeDocument/2006/relationships" id="2147483656" r:id="R3b5672f702e34988"/>
-    <p:sldLayoutId xmlns:r="http://schemas.openxmlformats.org/officeDocument/2006/relationships" id="2147483657" r:id="R0fdd46971182478e"/>
-    <p:sldLayoutId xmlns:r="http://schemas.openxmlformats.org/officeDocument/2006/relationships" id="2147483658" r:id="R28e6c058524c422b"/>
-    <p:sldLayoutId xmlns:r="http://schemas.openxmlformats.org/officeDocument/2006/relationships" id="2147483659" r:id="R852043f03240475c"/>
+    <p:sldLayoutId xmlns:r="http://schemas.openxmlformats.org/officeDocument/2006/relationships" id="2147483649" r:id="Rd3fe58a6547a48d6"/>
+    <p:sldLayoutId xmlns:r="http://schemas.openxmlformats.org/officeDocument/2006/relationships" id="2147483650" r:id="R68362db0d1784229"/>
+    <p:sldLayoutId xmlns:r="http://schemas.openxmlformats.org/officeDocument/2006/relationships" id="2147483651" r:id="Rf29439f89cf34c93"/>
+    <p:sldLayoutId xmlns:r="http://schemas.openxmlformats.org/officeDocument/2006/relationships" id="2147483652" r:id="Rdfd5ce8e91564ed1"/>
+    <p:sldLayoutId xmlns:r="http://schemas.openxmlformats.org/officeDocument/2006/relationships" id="2147483653" r:id="Reaf40539ee484765"/>
+    <p:sldLayoutId xmlns:r="http://schemas.openxmlformats.org/officeDocument/2006/relationships" id="2147483654" r:id="R4cb06fdcb43742bc"/>
+    <p:sldLayoutId xmlns:r="http://schemas.openxmlformats.org/officeDocument/2006/relationships" id="2147483655" r:id="R63e978b50ef14426"/>
+    <p:sldLayoutId xmlns:r="http://schemas.openxmlformats.org/officeDocument/2006/relationships" id="2147483656" r:id="Red68baf0cb5f47ef"/>
+    <p:sldLayoutId xmlns:r="http://schemas.openxmlformats.org/officeDocument/2006/relationships" id="2147483657" r:id="Rfdbefa1879c94028"/>
+    <p:sldLayoutId xmlns:r="http://schemas.openxmlformats.org/officeDocument/2006/relationships" id="2147483658" r:id="Rff1e29b26f2b48e1"/>
+    <p:sldLayoutId xmlns:r="http://schemas.openxmlformats.org/officeDocument/2006/relationships" id="2147483659" r:id="R04321b1453714ccd"/>
   </p:sldLayoutIdLst>
   <p:hf hdr="0" ftr="0" dt="0"/>
   <p:txStyles>
@@ -8499,10 +8499,10 @@
                 <a:ea typeface="Calibri"/>
                 <a:cs typeface="Calibri"/>
               </a:rPr>
-              <a:t>Change the exit option from </a:t>
-            </a:r>
-            <a:r>
-              <a:rPr sz="2400" b="0">
+              <a:t>Change the example so it counts how many times the user chooses </a:t>
+            </a:r>
+            <a:r>
+              <a:rPr sz="2050" b="0">
                 <a:solidFill>
                   <a:srgbClr val="067D17"/>
                 </a:solidFill>
@@ -8510,7 +8510,7 @@
                 <a:ea typeface="JetBrains Mono"/>
                 <a:cs typeface="JetBrains Mono"/>
               </a:rPr>
-              <a:t>"2"</a:t>
+              <a:t>"1"</a:t>
             </a:r>
             <a:r>
               <a:rPr sz="2400" b="0">
@@ -8521,18 +8521,21 @@
                 <a:ea typeface="Calibri"/>
                 <a:cs typeface="Calibri"/>
               </a:rPr>
-              <a:t> to </a:t>
-            </a:r>
-            <a:r>
-              <a:rPr sz="2400" b="0">
-                <a:solidFill>
-                  <a:srgbClr val="067D17"/>
-                </a:solidFill>
-                <a:latin typeface="JetBrains Mono"/>
-                <a:ea typeface="JetBrains Mono"/>
-                <a:cs typeface="JetBrains Mono"/>
-              </a:rPr>
-              <a:t>"0"</a:t>
+              <a:t>. Store 0 in </a:t>
+            </a:r>
+            <a:r>
+              <a:rPr sz="2050" b="0">
+                <a:solidFill>
+                  <a:srgbClr val="6A1B9A"/>
+                </a:solidFill>
+                <a:highlight>
+                  <a:srgbClr val="ECEAF4"/>
+                </a:highlight>
+                <a:latin typeface="JetBrains Mono"/>
+                <a:ea typeface="JetBrains Mono"/>
+                <a:cs typeface="JetBrains Mono"/>
+              </a:rPr>
+              <a:t> greetings </a:t>
             </a:r>
             <a:r>
               <a:rPr sz="2400" b="0">
@@ -8543,18 +8546,18 @@
                 <a:ea typeface="Calibri"/>
                 <a:cs typeface="Calibri"/>
               </a:rPr>
-              <a:t> in both the input message and the </a:t>
-            </a:r>
-            <a:r>
-              <a:rPr sz="2400" b="0">
-                <a:solidFill>
-                  <a:srgbClr val="1750EB"/>
-                </a:solidFill>
-                <a:latin typeface="JetBrains Mono"/>
-                <a:ea typeface="JetBrains Mono"/>
-                <a:cs typeface="JetBrains Mono"/>
-              </a:rPr>
-              <a:t>elif</a:t>
+              <a:t> before the loop and add 1 each time </a:t>
+            </a:r>
+            <a:r>
+              <a:rPr sz="2050" b="0">
+                <a:solidFill>
+                  <a:srgbClr val="067D17"/>
+                </a:solidFill>
+                <a:latin typeface="JetBrains Mono"/>
+                <a:ea typeface="JetBrains Mono"/>
+                <a:cs typeface="JetBrains Mono"/>
+              </a:rPr>
+              <a:t>"Hello!"</a:t>
             </a:r>
             <a:r>
               <a:rPr sz="2400" b="0">
@@ -8565,10 +8568,10 @@
                 <a:ea typeface="Calibri"/>
                 <a:cs typeface="Calibri"/>
               </a:rPr>
-              <a:t> condition. Keep option </a:t>
-            </a:r>
-            <a:r>
-              <a:rPr sz="2400" b="0">
+              <a:t> is displayed. After the loop, display </a:t>
+            </a:r>
+            <a:r>
+              <a:rPr sz="2050" b="0">
                 <a:solidFill>
                   <a:srgbClr val="067D17"/>
                 </a:solidFill>
@@ -8576,7 +8579,7 @@
                 <a:ea typeface="JetBrains Mono"/>
                 <a:cs typeface="JetBrains Mono"/>
               </a:rPr>
-              <a:t>"1"</a:t>
+              <a:t>"Greetings:"</a:t>
             </a:r>
             <a:r>
               <a:rPr sz="2400" b="0">
@@ -8587,18 +8590,21 @@
                 <a:ea typeface="Calibri"/>
                 <a:cs typeface="Calibri"/>
               </a:rPr>
-              <a:t> and the invalid-input message unchanged. Test </a:t>
-            </a:r>
-            <a:r>
-              <a:rPr sz="2400" b="0">
-                <a:solidFill>
-                  <a:srgbClr val="067D17"/>
-                </a:solidFill>
-                <a:latin typeface="JetBrains Mono"/>
-                <a:ea typeface="JetBrains Mono"/>
-                <a:cs typeface="JetBrains Mono"/>
-              </a:rPr>
-              <a:t>"1"</a:t>
+              <a:t> followed by </a:t>
+            </a:r>
+            <a:r>
+              <a:rPr sz="2050" b="0">
+                <a:solidFill>
+                  <a:srgbClr val="6A1B9A"/>
+                </a:solidFill>
+                <a:highlight>
+                  <a:srgbClr val="ECEAF4"/>
+                </a:highlight>
+                <a:latin typeface="JetBrains Mono"/>
+                <a:ea typeface="JetBrains Mono"/>
+                <a:cs typeface="JetBrains Mono"/>
+              </a:rPr>
+              <a:t> greetings </a:t>
             </a:r>
             <a:r>
               <a:rPr sz="2400" b="0">
@@ -8609,10 +8615,10 @@
                 <a:ea typeface="Calibri"/>
                 <a:cs typeface="Calibri"/>
               </a:rPr>
-              <a:t>, then </a:t>
-            </a:r>
-            <a:r>
-              <a:rPr sz="2400" b="0">
+              <a:t>. For example, </a:t>
+            </a:r>
+            <a:r>
+              <a:rPr sz="2050" b="0">
                 <a:solidFill>
                   <a:srgbClr val="067D17"/>
                 </a:solidFill>
@@ -8620,7 +8626,7 @@
                 <a:ea typeface="JetBrains Mono"/>
                 <a:cs typeface="JetBrains Mono"/>
               </a:rPr>
-              <a:t>"x"</a:t>
+              <a:t>"1"</a:t>
             </a:r>
             <a:r>
               <a:rPr sz="2400" b="0">
@@ -8631,10 +8637,10 @@
                 <a:ea typeface="Calibri"/>
                 <a:cs typeface="Calibri"/>
               </a:rPr>
-              <a:t>, then </a:t>
-            </a:r>
-            <a:r>
-              <a:rPr sz="2400" b="0">
+              <a:t>, </a:t>
+            </a:r>
+            <a:r>
+              <a:rPr sz="2050" b="0">
                 <a:solidFill>
                   <a:srgbClr val="067D17"/>
                 </a:solidFill>
@@ -8642,7 +8648,7 @@
                 <a:ea typeface="JetBrains Mono"/>
                 <a:cs typeface="JetBrains Mono"/>
               </a:rPr>
-              <a:t>"0"</a:t>
+              <a:t>"1"</a:t>
             </a:r>
             <a:r>
               <a:rPr sz="2400" b="0">
@@ -8653,10 +8659,10 @@
                 <a:ea typeface="Calibri"/>
                 <a:cs typeface="Calibri"/>
               </a:rPr>
-              <a:t>; display </a:t>
-            </a:r>
-            <a:r>
-              <a:rPr sz="2400" b="0">
+              <a:t> and </a:t>
+            </a:r>
+            <a:r>
+              <a:rPr sz="2050" b="0">
                 <a:solidFill>
                   <a:srgbClr val="067D17"/>
                 </a:solidFill>
@@ -8664,7 +8670,7 @@
                 <a:ea typeface="JetBrains Mono"/>
                 <a:cs typeface="JetBrains Mono"/>
               </a:rPr>
-              <a:t>"Hello!"</a:t>
+              <a:t>"2"</a:t>
             </a:r>
             <a:r>
               <a:rPr sz="2400" b="0">
@@ -8675,10 +8681,10 @@
                 <a:ea typeface="Calibri"/>
                 <a:cs typeface="Calibri"/>
               </a:rPr>
-              <a:t>, </a:t>
-            </a:r>
-            <a:r>
-              <a:rPr sz="2400" b="0">
+              <a:t> display </a:t>
+            </a:r>
+            <a:r>
+              <a:rPr sz="2050" b="0">
                 <a:solidFill>
                   <a:srgbClr val="067D17"/>
                 </a:solidFill>
@@ -8686,7 +8692,7 @@
                 <a:ea typeface="JetBrains Mono"/>
                 <a:cs typeface="JetBrains Mono"/>
               </a:rPr>
-              <a:t>"Choose 1 or 0."</a:t>
+              <a:t>"Greetings: 2"</a:t>
             </a:r>
             <a:r>
               <a:rPr sz="2400" b="0">
@@ -8697,18 +8703,7 @@
                 <a:ea typeface="Calibri"/>
                 <a:cs typeface="Calibri"/>
               </a:rPr>
-              <a:t> and finally </a:t>
-            </a:r>
-            <a:r>
-              <a:rPr sz="2400" b="0">
-                <a:solidFill>
-                  <a:srgbClr val="067D17"/>
-                </a:solidFill>
-                <a:latin typeface="JetBrains Mono"/>
-                <a:ea typeface="JetBrains Mono"/>
-                <a:cs typeface="JetBrains Mono"/>
-              </a:rPr>
-              <a:t>"Menu closed."</a:t>
+              <a:t>.</a:t>
             </a:r>
           </a:p>
         </p:txBody>
@@ -9700,10 +9695,10 @@
                 <a:ea typeface="Calibri"/>
                 <a:cs typeface="Calibri"/>
               </a:rPr>
-              <a:t>Add </a:t>
-            </a:r>
-            <a:r>
-              <a:rPr sz="2400" b="0">
+              <a:t>Extend the example menu with </a:t>
+            </a:r>
+            <a:r>
+              <a:rPr sz="2050" b="0">
                 <a:solidFill>
                   <a:srgbClr val="067D17"/>
                 </a:solidFill>
@@ -9722,10 +9717,10 @@
                 <a:ea typeface="Calibri"/>
                 <a:cs typeface="Calibri"/>
               </a:rPr>
-              <a:t> to the menu input message. Use an </a:t>
-            </a:r>
-            <a:r>
-              <a:rPr sz="2400" b="0">
+              <a:t>. Add an </a:t>
+            </a:r>
+            <a:r>
+              <a:rPr sz="2050" b="0">
                 <a:solidFill>
                   <a:srgbClr val="1750EB"/>
                 </a:solidFill>
@@ -9744,10 +9739,10 @@
                 <a:ea typeface="Calibri"/>
                 <a:cs typeface="Calibri"/>
               </a:rPr>
-              <a:t> condition so </a:t>
-            </a:r>
-            <a:r>
-              <a:rPr sz="2400" b="0">
+              <a:t> condition that displays </a:t>
+            </a:r>
+            <a:r>
+              <a:rPr sz="2050" b="0">
                 <a:solidFill>
                   <a:srgbClr val="067D17"/>
                 </a:solidFill>
@@ -9755,7 +9750,7 @@
                 <a:ea typeface="JetBrains Mono"/>
                 <a:cs typeface="JetBrains Mono"/>
               </a:rPr>
-              <a:t>"3"</a:t>
+              <a:t>"Help: choose a number."</a:t>
             </a:r>
             <a:r>
               <a:rPr sz="2400" b="0">
@@ -9766,10 +9761,10 @@
                 <a:ea typeface="Calibri"/>
                 <a:cs typeface="Calibri"/>
               </a:rPr>
-              <a:t> displays </a:t>
-            </a:r>
-            <a:r>
-              <a:rPr sz="2400" b="0">
+              <a:t> and change the invalid-input message to </a:t>
+            </a:r>
+            <a:r>
+              <a:rPr sz="2050" b="0">
                 <a:solidFill>
                   <a:srgbClr val="067D17"/>
                 </a:solidFill>
@@ -9777,7 +9772,7 @@
                 <a:ea typeface="JetBrains Mono"/>
                 <a:cs typeface="JetBrains Mono"/>
               </a:rPr>
-              <a:t>"Help: choose a number."</a:t>
+              <a:t>"Choose 1, 2 or 3."</a:t>
             </a:r>
             <a:r>
               <a:rPr sz="2400" b="0">
@@ -9788,10 +9783,10 @@
                 <a:ea typeface="Calibri"/>
                 <a:cs typeface="Calibri"/>
               </a:rPr>
-              <a:t> Change the invalid-input message to </a:t>
-            </a:r>
-            <a:r>
-              <a:rPr sz="2400" b="0">
+              <a:t> For example, </a:t>
+            </a:r>
+            <a:r>
+              <a:rPr sz="2050" b="0">
                 <a:solidFill>
                   <a:srgbClr val="067D17"/>
                 </a:solidFill>
@@ -9799,7 +9794,7 @@
                 <a:ea typeface="JetBrains Mono"/>
                 <a:cs typeface="JetBrains Mono"/>
               </a:rPr>
-              <a:t>"Choose 1, 2 or 3."</a:t>
+              <a:t>"3"</a:t>
             </a:r>
             <a:r>
               <a:rPr sz="2400" b="0">
@@ -9810,10 +9805,10 @@
                 <a:ea typeface="Calibri"/>
                 <a:cs typeface="Calibri"/>
               </a:rPr>
-              <a:t> Test </a:t>
-            </a:r>
-            <a:r>
-              <a:rPr sz="2400" b="0">
+              <a:t>, </a:t>
+            </a:r>
+            <a:r>
+              <a:rPr sz="2050" b="0">
                 <a:solidFill>
                   <a:srgbClr val="067D17"/>
                 </a:solidFill>
@@ -9821,7 +9816,7 @@
                 <a:ea typeface="JetBrains Mono"/>
                 <a:cs typeface="JetBrains Mono"/>
               </a:rPr>
-              <a:t>"3"</a:t>
+              <a:t>"x"</a:t>
             </a:r>
             <a:r>
               <a:rPr sz="2400" b="0">
@@ -9832,10 +9827,10 @@
                 <a:ea typeface="Calibri"/>
                 <a:cs typeface="Calibri"/>
               </a:rPr>
-              <a:t>, </a:t>
-            </a:r>
-            <a:r>
-              <a:rPr sz="2400" b="0">
+              <a:t> and </a:t>
+            </a:r>
+            <a:r>
+              <a:rPr sz="2050" b="0">
                 <a:solidFill>
                   <a:srgbClr val="067D17"/>
                 </a:solidFill>
@@ -9843,7 +9838,7 @@
                 <a:ea typeface="JetBrains Mono"/>
                 <a:cs typeface="JetBrains Mono"/>
               </a:rPr>
-              <a:t>"x"</a:t>
+              <a:t>"2"</a:t>
             </a:r>
             <a:r>
               <a:rPr sz="2400" b="0">
@@ -9854,32 +9849,10 @@
                 <a:ea typeface="Calibri"/>
                 <a:cs typeface="Calibri"/>
               </a:rPr>
-              <a:t>, then </a:t>
-            </a:r>
-            <a:r>
-              <a:rPr sz="2400" b="0">
-                <a:solidFill>
-                  <a:srgbClr val="067D17"/>
-                </a:solidFill>
-                <a:latin typeface="JetBrains Mono"/>
-                <a:ea typeface="JetBrains Mono"/>
-                <a:cs typeface="JetBrains Mono"/>
-              </a:rPr>
-              <a:t>"2"</a:t>
-            </a:r>
-            <a:r>
-              <a:rPr sz="2400" b="0">
-                <a:solidFill>
-                  <a:srgbClr val="080808"/>
-                </a:solidFill>
-                <a:latin typeface="Calibri"/>
-                <a:ea typeface="Calibri"/>
-                <a:cs typeface="Calibri"/>
-              </a:rPr>
-              <a:t>; display the help message, invalid-input message, then </a:t>
-            </a:r>
-            <a:r>
-              <a:rPr sz="2400" b="0">
+              <a:t> show the help message, the invalid message, then </a:t>
+            </a:r>
+            <a:r>
+              <a:rPr sz="2050" b="0">
                 <a:solidFill>
                   <a:srgbClr val="067D17"/>
                 </a:solidFill>
@@ -10860,7 +10833,7 @@
         </p:spPr>
         <p:txBody>
           <a:bodyPr xmlns:a="http://schemas.openxmlformats.org/drawingml/2006/main">
-            <a:normAutofit fontScale="87835"/>
+            <a:normAutofit fontScale="92658"/>
           </a:bodyPr>
           <a:lstStyle xmlns:a="http://schemas.openxmlformats.org/drawingml/2006/main"/>
           <a:p xmlns:a="http://schemas.openxmlformats.org/drawingml/2006/main">
@@ -10879,18 +10852,18 @@
                 <a:ea typeface="Calibri"/>
                 <a:cs typeface="Calibri"/>
               </a:rPr>
-              <a:t>Use a </a:t>
-            </a:r>
-            <a:r>
-              <a:rPr sz="2400" b="0">
-                <a:solidFill>
-                  <a:srgbClr val="1750EB"/>
-                </a:solidFill>
-                <a:latin typeface="JetBrains Mono"/>
-                <a:ea typeface="JetBrains Mono"/>
-                <a:cs typeface="JetBrains Mono"/>
-              </a:rPr>
-              <a:t>while</a:t>
+              <a:t>Create a travel-planner menu with </a:t>
+            </a:r>
+            <a:r>
+              <a:rPr sz="2050" b="0">
+                <a:solidFill>
+                  <a:srgbClr val="067D17"/>
+                </a:solidFill>
+                <a:latin typeface="JetBrains Mono"/>
+                <a:ea typeface="JetBrains Mono"/>
+                <a:cs typeface="JetBrains Mono"/>
+              </a:rPr>
+              <a:t>"1: bus, 2: walk, 3: leave"</a:t>
             </a:r>
             <a:r>
               <a:rPr sz="2400" b="0">
@@ -10901,18 +10874,18 @@
                 <a:ea typeface="Calibri"/>
                 <a:cs typeface="Calibri"/>
               </a:rPr>
-              <a:t> loop to repeat the menu </a:t>
-            </a:r>
-            <a:r>
-              <a:rPr sz="2400" b="0">
-                <a:solidFill>
-                  <a:srgbClr val="067D17"/>
-                </a:solidFill>
-                <a:latin typeface="JetBrains Mono"/>
-                <a:ea typeface="JetBrains Mono"/>
-                <a:cs typeface="JetBrains Mono"/>
-              </a:rPr>
-              <a:t>"1: bus, 2: walk, 3: leave"</a:t>
+              <a:t>. Use a </a:t>
+            </a:r>
+            <a:r>
+              <a:rPr sz="2050" b="0">
+                <a:solidFill>
+                  <a:srgbClr val="1750EB"/>
+                </a:solidFill>
+                <a:latin typeface="JetBrains Mono"/>
+                <a:ea typeface="JetBrains Mono"/>
+                <a:cs typeface="JetBrains Mono"/>
+              </a:rPr>
+              <a:t>while</a:t>
             </a:r>
             <a:r>
               <a:rPr sz="2400" b="0">
@@ -10923,10 +10896,10 @@
                 <a:ea typeface="Calibri"/>
                 <a:cs typeface="Calibri"/>
               </a:rPr>
-              <a:t>. Use </a:t>
-            </a:r>
-            <a:r>
-              <a:rPr sz="2400" b="0">
+              <a:t> loop with a </a:t>
+            </a:r>
+            <a:r>
+              <a:rPr sz="2050" b="0">
                 <a:solidFill>
                   <a:srgbClr val="1750EB"/>
                 </a:solidFill>
@@ -10934,7 +10907,7 @@
                 <a:ea typeface="JetBrains Mono"/>
                 <a:cs typeface="JetBrains Mono"/>
               </a:rPr>
-              <a:t>if</a:t>
+              <a:t>Boolean</a:t>
             </a:r>
             <a:r>
               <a:rPr sz="2400" b="0">
@@ -10945,10 +10918,10 @@
                 <a:ea typeface="Calibri"/>
                 <a:cs typeface="Calibri"/>
               </a:rPr>
-              <a:t> and </a:t>
-            </a:r>
-            <a:r>
-              <a:rPr sz="2400" b="0">
+              <a:t> flag, and if, </a:t>
+            </a:r>
+            <a:r>
+              <a:rPr sz="2050" b="0">
                 <a:solidFill>
                   <a:srgbClr val="1750EB"/>
                 </a:solidFill>
@@ -10967,18 +10940,18 @@
                 <a:ea typeface="Calibri"/>
                 <a:cs typeface="Calibri"/>
               </a:rPr>
-              <a:t> conditions for the choices. For </a:t>
-            </a:r>
-            <a:r>
-              <a:rPr sz="2400" b="0">
-                <a:solidFill>
-                  <a:srgbClr val="067D17"/>
-                </a:solidFill>
-                <a:latin typeface="JetBrains Mono"/>
-                <a:ea typeface="JetBrains Mono"/>
-                <a:cs typeface="JetBrains Mono"/>
-              </a:rPr>
-              <a:t>"1"</a:t>
+              <a:t> and </a:t>
+            </a:r>
+            <a:r>
+              <a:rPr sz="2050" b="0">
+                <a:solidFill>
+                  <a:srgbClr val="1750EB"/>
+                </a:solidFill>
+                <a:latin typeface="JetBrains Mono"/>
+                <a:ea typeface="JetBrains Mono"/>
+                <a:cs typeface="JetBrains Mono"/>
+              </a:rPr>
+              <a:t>else</a:t>
             </a:r>
             <a:r>
               <a:rPr sz="2400" b="0">
@@ -10989,10 +10962,10 @@
                 <a:ea typeface="Calibri"/>
                 <a:cs typeface="Calibri"/>
               </a:rPr>
-              <a:t>, ask for a bus stop in [stop] and display </a:t>
-            </a:r>
-            <a:r>
-              <a:rPr sz="2400" b="0">
+              <a:t> for the choices. For </a:t>
+            </a:r>
+            <a:r>
+              <a:rPr sz="2050" b="0">
                 <a:solidFill>
                   <a:srgbClr val="067D17"/>
                 </a:solidFill>
@@ -11000,7 +10973,7 @@
                 <a:ea typeface="JetBrains Mono"/>
                 <a:cs typeface="JetBrains Mono"/>
               </a:rPr>
-              <a:t>"Selected stop:"</a:t>
+              <a:t>"1"</a:t>
             </a:r>
             <a:r>
               <a:rPr sz="2400" b="0">
@@ -11011,10 +10984,10 @@
                 <a:ea typeface="Calibri"/>
                 <a:cs typeface="Calibri"/>
               </a:rPr>
-              <a:t> with [stop]. For </a:t>
-            </a:r>
-            <a:r>
-              <a:rPr sz="2400" b="0">
+              <a:t>, ask for a bus stop and display it after </a:t>
+            </a:r>
+            <a:r>
+              <a:rPr sz="2050" b="0">
                 <a:solidFill>
                   <a:srgbClr val="067D17"/>
                 </a:solidFill>
@@ -11022,7 +10995,7 @@
                 <a:ea typeface="JetBrains Mono"/>
                 <a:cs typeface="JetBrains Mono"/>
               </a:rPr>
-              <a:t>"2"</a:t>
+              <a:t>"Selected stop:"</a:t>
             </a:r>
             <a:r>
               <a:rPr sz="2400" b="0">
@@ -11033,10 +11006,10 @@
                 <a:ea typeface="Calibri"/>
                 <a:cs typeface="Calibri"/>
               </a:rPr>
-              <a:t>, display </a:t>
-            </a:r>
-            <a:r>
-              <a:rPr sz="2400" b="0">
+              <a:t>. For </a:t>
+            </a:r>
+            <a:r>
+              <a:rPr sz="2050" b="0">
                 <a:solidFill>
                   <a:srgbClr val="067D17"/>
                 </a:solidFill>
@@ -11044,7 +11017,7 @@
                 <a:ea typeface="JetBrains Mono"/>
                 <a:cs typeface="JetBrains Mono"/>
               </a:rPr>
-              <a:t>"Walk selected."</a:t>
+              <a:t>"2"</a:t>
             </a:r>
             <a:r>
               <a:rPr sz="2400" b="0">
@@ -11055,10 +11028,10 @@
                 <a:ea typeface="Calibri"/>
                 <a:cs typeface="Calibri"/>
               </a:rPr>
-              <a:t> For </a:t>
-            </a:r>
-            <a:r>
-              <a:rPr sz="2400" b="0">
+              <a:t>, display </a:t>
+            </a:r>
+            <a:r>
+              <a:rPr sz="2050" b="0">
                 <a:solidFill>
                   <a:srgbClr val="067D17"/>
                 </a:solidFill>
@@ -11066,7 +11039,7 @@
                 <a:ea typeface="JetBrains Mono"/>
                 <a:cs typeface="JetBrains Mono"/>
               </a:rPr>
-              <a:t>"3"</a:t>
+              <a:t>"Walk selected."</a:t>
             </a:r>
             <a:r>
               <a:rPr sz="2400" b="0">
@@ -11077,10 +11050,10 @@
                 <a:ea typeface="Calibri"/>
                 <a:cs typeface="Calibri"/>
               </a:rPr>
-              <a:t>, end the loop and display </a:t>
-            </a:r>
-            <a:r>
-              <a:rPr sz="2400" b="0">
+              <a:t>. For </a:t>
+            </a:r>
+            <a:r>
+              <a:rPr sz="2050" b="0">
                 <a:solidFill>
                   <a:srgbClr val="067D17"/>
                 </a:solidFill>
@@ -11088,7 +11061,7 @@
                 <a:ea typeface="JetBrains Mono"/>
                 <a:cs typeface="JetBrains Mono"/>
               </a:rPr>
-              <a:t>"Planner closed."</a:t>
+              <a:t>"3"</a:t>
             </a:r>
             <a:r>
               <a:rPr sz="2400" b="0">
@@ -11099,10 +11072,10 @@
                 <a:ea typeface="Calibri"/>
                 <a:cs typeface="Calibri"/>
               </a:rPr>
-              <a:t> Otherwise, display </a:t>
-            </a:r>
-            <a:r>
-              <a:rPr sz="2400" b="0">
+              <a:t>, stop and display </a:t>
+            </a:r>
+            <a:r>
+              <a:rPr sz="2050" b="0">
                 <a:solidFill>
                   <a:srgbClr val="067D17"/>
                 </a:solidFill>
@@ -11110,7 +11083,7 @@
                 <a:ea typeface="JetBrains Mono"/>
                 <a:cs typeface="JetBrains Mono"/>
               </a:rPr>
-              <a:t>"Choose 1, 2 or 3."</a:t>
+              <a:t>"Planner closed."</a:t>
             </a:r>
             <a:r>
               <a:rPr sz="2400" b="0">
@@ -11121,10 +11094,10 @@
                 <a:ea typeface="Calibri"/>
                 <a:cs typeface="Calibri"/>
               </a:rPr>
-              <a:t> Test </a:t>
-            </a:r>
-            <a:r>
-              <a:rPr sz="2400" b="0">
+              <a:t>. Otherwise display </a:t>
+            </a:r>
+            <a:r>
+              <a:rPr sz="2050" b="0">
                 <a:solidFill>
                   <a:srgbClr val="067D17"/>
                 </a:solidFill>
@@ -11132,84 +11105,7 @@
                 <a:ea typeface="JetBrains Mono"/>
                 <a:cs typeface="JetBrains Mono"/>
               </a:rPr>
-              <a:t>"1"</a:t>
-            </a:r>
-            <a:r>
-              <a:rPr sz="2400" b="0">
-                <a:solidFill>
-                  <a:srgbClr val="080808"/>
-                </a:solidFill>
-                <a:latin typeface="Calibri"/>
-                <a:ea typeface="Calibri"/>
-                <a:cs typeface="Calibri"/>
-              </a:rPr>
-              <a:t>, </a:t>
-            </a:r>
-            <a:r>
-              <a:rPr sz="2400" b="0">
-                <a:solidFill>
-                  <a:srgbClr val="067D17"/>
-                </a:solidFill>
-                <a:latin typeface="JetBrains Mono"/>
-                <a:ea typeface="JetBrains Mono"/>
-                <a:cs typeface="JetBrains Mono"/>
-              </a:rPr>
-              <a:t>"Central"</a:t>
-            </a:r>
-            <a:r>
-              <a:rPr sz="2400" b="0">
-                <a:solidFill>
-                  <a:srgbClr val="080808"/>
-                </a:solidFill>
-                <a:latin typeface="Calibri"/>
-                <a:ea typeface="Calibri"/>
-                <a:cs typeface="Calibri"/>
-              </a:rPr>
-              <a:t>, </a:t>
-            </a:r>
-            <a:r>
-              <a:rPr sz="2400" b="0">
-                <a:solidFill>
-                  <a:srgbClr val="067D17"/>
-                </a:solidFill>
-                <a:latin typeface="JetBrains Mono"/>
-                <a:ea typeface="JetBrains Mono"/>
-                <a:cs typeface="JetBrains Mono"/>
-              </a:rPr>
-              <a:t>"2"</a:t>
-            </a:r>
-            <a:r>
-              <a:rPr sz="2400" b="0">
-                <a:solidFill>
-                  <a:srgbClr val="080808"/>
-                </a:solidFill>
-                <a:latin typeface="Calibri"/>
-                <a:ea typeface="Calibri"/>
-                <a:cs typeface="Calibri"/>
-              </a:rPr>
-              <a:t>, then </a:t>
-            </a:r>
-            <a:r>
-              <a:rPr sz="2400" b="0">
-                <a:solidFill>
-                  <a:srgbClr val="067D17"/>
-                </a:solidFill>
-                <a:latin typeface="JetBrains Mono"/>
-                <a:ea typeface="JetBrains Mono"/>
-                <a:cs typeface="JetBrains Mono"/>
-              </a:rPr>
-              <a:t>"3"</a:t>
-            </a:r>
-            <a:r>
-              <a:rPr sz="2400" b="0">
-                <a:solidFill>
-                  <a:srgbClr val="080808"/>
-                </a:solidFill>
-                <a:latin typeface="Calibri"/>
-                <a:ea typeface="Calibri"/>
-                <a:cs typeface="Calibri"/>
-              </a:rPr>
-              <a:t>.</a:t>
+              <a:t>"Choose 1, 2 or 3."</a:t>
             </a:r>
           </a:p>
         </p:txBody>

--- a/Mapped Curriculum Lessons/Grade 7/Lesson 20 - Reliable Menus/Reliable Menus - Slides.pptx
+++ b/Mapped Curriculum Lessons/Grade 7/Lesson 20 - Reliable Menus/Reliable Menus - Slides.pptx
@@ -2,28 +2,28 @@
 <file path=ppt/presentation.xml><?xml version="1.0" encoding="utf-8"?>
 <p:presentation xmlns:p="http://schemas.openxmlformats.org/presentationml/2006/main" embedTrueTypeFonts="1" saveSubsetFonts="0">
   <p:sldMasterIdLst>
-    <p:sldMasterId xmlns:r="http://schemas.openxmlformats.org/officeDocument/2006/relationships" id="2147483648" r:id="R5533950a810a4d4c"/>
+    <p:sldMasterId xmlns:r="http://schemas.openxmlformats.org/officeDocument/2006/relationships" id="2147483648" r:id="R108e432a69b745c5"/>
   </p:sldMasterIdLst>
   <p:notesMasterIdLst>
-    <p:notesMasterId xmlns:r="http://schemas.openxmlformats.org/officeDocument/2006/relationships" r:id="Ra37c0195fefc4d67"/>
+    <p:notesMasterId xmlns:r="http://schemas.openxmlformats.org/officeDocument/2006/relationships" r:id="R9e9a15d0bc274248"/>
   </p:notesMasterIdLst>
   <p:sldIdLst>
-    <p:sldId xmlns:r="http://schemas.openxmlformats.org/officeDocument/2006/relationships" id="256" r:id="Rf544ca955c484560"/>
-    <p:sldId xmlns:r="http://schemas.openxmlformats.org/officeDocument/2006/relationships" id="257" r:id="Rc515586090e8423c"/>
-    <p:sldId xmlns:r="http://schemas.openxmlformats.org/officeDocument/2006/relationships" id="258" r:id="R731fdbe9dfca4405"/>
-    <p:sldId xmlns:r="http://schemas.openxmlformats.org/officeDocument/2006/relationships" id="259" r:id="R0757bc657e5a445d"/>
-    <p:sldId xmlns:r="http://schemas.openxmlformats.org/officeDocument/2006/relationships" id="260" r:id="R1fb3cad1ae7045be"/>
-    <p:sldId xmlns:r="http://schemas.openxmlformats.org/officeDocument/2006/relationships" id="261" r:id="R5662f1d244f14fdf"/>
-    <p:sldId xmlns:r="http://schemas.openxmlformats.org/officeDocument/2006/relationships" id="262" r:id="R72be2c6ba7324944"/>
-    <p:sldId xmlns:r="http://schemas.openxmlformats.org/officeDocument/2006/relationships" id="263" r:id="R3cbfd78203f04a9f"/>
-    <p:sldId xmlns:r="http://schemas.openxmlformats.org/officeDocument/2006/relationships" id="264" r:id="Rbb4474e3e80b4564"/>
+    <p:sldId xmlns:r="http://schemas.openxmlformats.org/officeDocument/2006/relationships" id="256" r:id="Re59986b64a074725"/>
+    <p:sldId xmlns:r="http://schemas.openxmlformats.org/officeDocument/2006/relationships" id="257" r:id="Rb4655916410b413b"/>
+    <p:sldId xmlns:r="http://schemas.openxmlformats.org/officeDocument/2006/relationships" id="258" r:id="R0066aa724a124b20"/>
+    <p:sldId xmlns:r="http://schemas.openxmlformats.org/officeDocument/2006/relationships" id="259" r:id="R33d6f1841ffa4e1b"/>
+    <p:sldId xmlns:r="http://schemas.openxmlformats.org/officeDocument/2006/relationships" id="260" r:id="R5ef613087fd846c6"/>
+    <p:sldId xmlns:r="http://schemas.openxmlformats.org/officeDocument/2006/relationships" id="261" r:id="Rbc675149d06546ae"/>
+    <p:sldId xmlns:r="http://schemas.openxmlformats.org/officeDocument/2006/relationships" id="262" r:id="Rc6bf029011f04e34"/>
+    <p:sldId xmlns:r="http://schemas.openxmlformats.org/officeDocument/2006/relationships" id="263" r:id="R49d535ecb54d4fe0"/>
+    <p:sldId xmlns:r="http://schemas.openxmlformats.org/officeDocument/2006/relationships" id="264" r:id="R5be0bd72d3374461"/>
   </p:sldIdLst>
   <p:sldSz cx="12192000" cy="6858000"/>
   <p:notesSz cx="6858000" cy="9144000"/>
   <p:embeddedFontLst>
     <p:embeddedFont>
       <p:font typeface="JetBrains Mono"/>
-      <p:regular xmlns:r="http://schemas.openxmlformats.org/officeDocument/2006/relationships" r:id="R2e984d30a8fa4f28"/>
+      <p:regular xmlns:r="http://schemas.openxmlformats.org/officeDocument/2006/relationships" r:id="Rc3d6ceeae3e24877"/>
     </p:embeddedFont>
   </p:embeddedFontLst>
 </p:presentation>
@@ -1071,7 +1071,7 @@
           <p:nvPr/>
         </p:nvPicPr>
         <p:blipFill rotWithShape="1">
-          <a:blip xmlns:r="http://schemas.openxmlformats.org/officeDocument/2006/relationships" xmlns:a="http://schemas.openxmlformats.org/drawingml/2006/main" r:embed="R8888a6b3821e424a"/>
+          <a:blip xmlns:r="http://schemas.openxmlformats.org/officeDocument/2006/relationships" xmlns:a="http://schemas.openxmlformats.org/drawingml/2006/main" r:embed="R90129f4424704849"/>
           <a:stretch xmlns:a="http://schemas.openxmlformats.org/drawingml/2006/main"/>
         </p:blipFill>
         <p:spPr>
@@ -1451,7 +1451,7 @@
           <p:nvPr/>
         </p:nvPicPr>
         <p:blipFill rotWithShape="1">
-          <a:blip xmlns:r="http://schemas.openxmlformats.org/officeDocument/2006/relationships" xmlns:a="http://schemas.openxmlformats.org/drawingml/2006/main" r:embed="Ra678b1bf7cae4bfe">
+          <a:blip xmlns:r="http://schemas.openxmlformats.org/officeDocument/2006/relationships" xmlns:a="http://schemas.openxmlformats.org/drawingml/2006/main" r:embed="Rd03f2f2f4d1b4316">
             <a:alphaModFix amt="28000"/>
           </a:blip>
           <a:stretch xmlns:a="http://schemas.openxmlformats.org/drawingml/2006/main"/>
@@ -1664,7 +1664,7 @@
           <p:nvPr/>
         </p:nvPicPr>
         <p:blipFill rotWithShape="1">
-          <a:blip xmlns:r="http://schemas.openxmlformats.org/officeDocument/2006/relationships" xmlns:a="http://schemas.openxmlformats.org/drawingml/2006/main" r:embed="R47eed3ea454a4f2b">
+          <a:blip xmlns:r="http://schemas.openxmlformats.org/officeDocument/2006/relationships" xmlns:a="http://schemas.openxmlformats.org/drawingml/2006/main" r:embed="Rc2a82153d06c4c5a">
             <a:alphaModFix amt="28000"/>
           </a:blip>
           <a:stretch xmlns:a="http://schemas.openxmlformats.org/drawingml/2006/main"/>
@@ -1899,7 +1899,7 @@
           <p:nvPr/>
         </p:nvPicPr>
         <p:blipFill rotWithShape="1">
-          <a:blip xmlns:r="http://schemas.openxmlformats.org/officeDocument/2006/relationships" xmlns:a="http://schemas.openxmlformats.org/drawingml/2006/main" r:embed="R844601a0ae724bb3">
+          <a:blip xmlns:r="http://schemas.openxmlformats.org/officeDocument/2006/relationships" xmlns:a="http://schemas.openxmlformats.org/drawingml/2006/main" r:embed="Rcbc052db3b6a4c15">
             <a:alphaModFix amt="28000"/>
           </a:blip>
           <a:stretch xmlns:a="http://schemas.openxmlformats.org/drawingml/2006/main"/>
@@ -2176,7 +2176,7 @@
           <p:nvPr/>
         </p:nvPicPr>
         <p:blipFill rotWithShape="1">
-          <a:blip xmlns:r="http://schemas.openxmlformats.org/officeDocument/2006/relationships" xmlns:a="http://schemas.openxmlformats.org/drawingml/2006/main" r:embed="R200bd853621740f1">
+          <a:blip xmlns:r="http://schemas.openxmlformats.org/officeDocument/2006/relationships" xmlns:a="http://schemas.openxmlformats.org/drawingml/2006/main" r:embed="R9d12a4e1ccbf4649">
             <a:alphaModFix amt="28000"/>
           </a:blip>
           <a:stretch xmlns:a="http://schemas.openxmlformats.org/drawingml/2006/main"/>
@@ -2451,7 +2451,7 @@
           <p:nvPr/>
         </p:nvPicPr>
         <p:blipFill rotWithShape="1">
-          <a:blip xmlns:r="http://schemas.openxmlformats.org/officeDocument/2006/relationships" xmlns:a="http://schemas.openxmlformats.org/drawingml/2006/main" r:embed="Rac2ca79c837f4a72">
+          <a:blip xmlns:r="http://schemas.openxmlformats.org/officeDocument/2006/relationships" xmlns:a="http://schemas.openxmlformats.org/drawingml/2006/main" r:embed="R0a45b89a845f4249">
             <a:alphaModFix amt="28000"/>
           </a:blip>
           <a:stretch xmlns:a="http://schemas.openxmlformats.org/drawingml/2006/main"/>
@@ -2875,7 +2875,7 @@
           <p:nvPr/>
         </p:nvPicPr>
         <p:blipFill rotWithShape="1">
-          <a:blip xmlns:r="http://schemas.openxmlformats.org/officeDocument/2006/relationships" xmlns:a="http://schemas.openxmlformats.org/drawingml/2006/main" r:embed="Rf35d10c0f1f247e2">
+          <a:blip xmlns:r="http://schemas.openxmlformats.org/officeDocument/2006/relationships" xmlns:a="http://schemas.openxmlformats.org/drawingml/2006/main" r:embed="R3ddb4276fa9a4bd6">
             <a:alphaModFix amt="28000"/>
           </a:blip>
           <a:stretch xmlns:a="http://schemas.openxmlformats.org/drawingml/2006/main"/>
@@ -3016,7 +3016,7 @@
           <p:nvPr/>
         </p:nvPicPr>
         <p:blipFill rotWithShape="1">
-          <a:blip xmlns:r="http://schemas.openxmlformats.org/officeDocument/2006/relationships" xmlns:a="http://schemas.openxmlformats.org/drawingml/2006/main" r:embed="R33ad2b98a40b4d46">
+          <a:blip xmlns:r="http://schemas.openxmlformats.org/officeDocument/2006/relationships" xmlns:a="http://schemas.openxmlformats.org/drawingml/2006/main" r:embed="R22bc0901cacc46a9">
             <a:alphaModFix amt="28000"/>
           </a:blip>
           <a:stretch xmlns:a="http://schemas.openxmlformats.org/drawingml/2006/main"/>
@@ -3130,7 +3130,7 @@
           <p:nvPr/>
         </p:nvPicPr>
         <p:blipFill rotWithShape="1">
-          <a:blip xmlns:r="http://schemas.openxmlformats.org/officeDocument/2006/relationships" xmlns:a="http://schemas.openxmlformats.org/drawingml/2006/main" r:embed="R4f787d7702df485c">
+          <a:blip xmlns:r="http://schemas.openxmlformats.org/officeDocument/2006/relationships" xmlns:a="http://schemas.openxmlformats.org/drawingml/2006/main" r:embed="Rc6d46e867f0c4f7f">
             <a:alphaModFix amt="28000"/>
           </a:blip>
           <a:stretch xmlns:a="http://schemas.openxmlformats.org/drawingml/2006/main"/>
@@ -3457,7 +3457,7 @@
           <p:nvPr/>
         </p:nvPicPr>
         <p:blipFill rotWithShape="1">
-          <a:blip xmlns:r="http://schemas.openxmlformats.org/officeDocument/2006/relationships" xmlns:a="http://schemas.openxmlformats.org/drawingml/2006/main" r:embed="R78027389b5e545dc">
+          <a:blip xmlns:r="http://schemas.openxmlformats.org/officeDocument/2006/relationships" xmlns:a="http://schemas.openxmlformats.org/drawingml/2006/main" r:embed="Rb6c8892268e64023">
             <a:alphaModFix amt="28000"/>
           </a:blip>
           <a:stretch xmlns:a="http://schemas.openxmlformats.org/drawingml/2006/main"/>
@@ -3745,7 +3745,7 @@
           <p:nvPr/>
         </p:nvPicPr>
         <p:blipFill rotWithShape="1">
-          <a:blip xmlns:r="http://schemas.openxmlformats.org/officeDocument/2006/relationships" xmlns:a="http://schemas.openxmlformats.org/drawingml/2006/main" r:embed="Rb89827e493b64f57">
+          <a:blip xmlns:r="http://schemas.openxmlformats.org/officeDocument/2006/relationships" xmlns:a="http://schemas.openxmlformats.org/drawingml/2006/main" r:embed="Rb7836ad108124bcc">
             <a:alphaModFix amt="28000"/>
           </a:blip>
           <a:stretch xmlns:a="http://schemas.openxmlformats.org/drawingml/2006/main"/>
@@ -3982,17 +3982,17 @@
   </p:cSld>
   <p:clrMap bg1="lt1" tx1="dk1" bg2="lt2" tx2="dk2" accent1="accent1" accent2="accent2" accent3="accent3" accent4="accent4" accent5="accent5" accent6="accent6" hlink="hlink" folHlink="folHlink"/>
   <p:sldLayoutIdLst>
-    <p:sldLayoutId xmlns:r="http://schemas.openxmlformats.org/officeDocument/2006/relationships" id="2147483649" r:id="Rd3fe58a6547a48d6"/>
-    <p:sldLayoutId xmlns:r="http://schemas.openxmlformats.org/officeDocument/2006/relationships" id="2147483650" r:id="R68362db0d1784229"/>
-    <p:sldLayoutId xmlns:r="http://schemas.openxmlformats.org/officeDocument/2006/relationships" id="2147483651" r:id="Rf29439f89cf34c93"/>
-    <p:sldLayoutId xmlns:r="http://schemas.openxmlformats.org/officeDocument/2006/relationships" id="2147483652" r:id="Rdfd5ce8e91564ed1"/>
-    <p:sldLayoutId xmlns:r="http://schemas.openxmlformats.org/officeDocument/2006/relationships" id="2147483653" r:id="Reaf40539ee484765"/>
-    <p:sldLayoutId xmlns:r="http://schemas.openxmlformats.org/officeDocument/2006/relationships" id="2147483654" r:id="R4cb06fdcb43742bc"/>
-    <p:sldLayoutId xmlns:r="http://schemas.openxmlformats.org/officeDocument/2006/relationships" id="2147483655" r:id="R63e978b50ef14426"/>
-    <p:sldLayoutId xmlns:r="http://schemas.openxmlformats.org/officeDocument/2006/relationships" id="2147483656" r:id="Red68baf0cb5f47ef"/>
-    <p:sldLayoutId xmlns:r="http://schemas.openxmlformats.org/officeDocument/2006/relationships" id="2147483657" r:id="Rfdbefa1879c94028"/>
-    <p:sldLayoutId xmlns:r="http://schemas.openxmlformats.org/officeDocument/2006/relationships" id="2147483658" r:id="Rff1e29b26f2b48e1"/>
-    <p:sldLayoutId xmlns:r="http://schemas.openxmlformats.org/officeDocument/2006/relationships" id="2147483659" r:id="R04321b1453714ccd"/>
+    <p:sldLayoutId xmlns:r="http://schemas.openxmlformats.org/officeDocument/2006/relationships" id="2147483649" r:id="R94727401eaf24437"/>
+    <p:sldLayoutId xmlns:r="http://schemas.openxmlformats.org/officeDocument/2006/relationships" id="2147483650" r:id="R91c853d820784ef7"/>
+    <p:sldLayoutId xmlns:r="http://schemas.openxmlformats.org/officeDocument/2006/relationships" id="2147483651" r:id="R117e4c9e8e07417f"/>
+    <p:sldLayoutId xmlns:r="http://schemas.openxmlformats.org/officeDocument/2006/relationships" id="2147483652" r:id="Rc4bbb1df15d84624"/>
+    <p:sldLayoutId xmlns:r="http://schemas.openxmlformats.org/officeDocument/2006/relationships" id="2147483653" r:id="Rd3d77b6a32754672"/>
+    <p:sldLayoutId xmlns:r="http://schemas.openxmlformats.org/officeDocument/2006/relationships" id="2147483654" r:id="R1bddce5e9a184d96"/>
+    <p:sldLayoutId xmlns:r="http://schemas.openxmlformats.org/officeDocument/2006/relationships" id="2147483655" r:id="R3fc32416db5947f1"/>
+    <p:sldLayoutId xmlns:r="http://schemas.openxmlformats.org/officeDocument/2006/relationships" id="2147483656" r:id="R36fa2db855814c06"/>
+    <p:sldLayoutId xmlns:r="http://schemas.openxmlformats.org/officeDocument/2006/relationships" id="2147483657" r:id="Rf24f639d04b84e96"/>
+    <p:sldLayoutId xmlns:r="http://schemas.openxmlformats.org/officeDocument/2006/relationships" id="2147483658" r:id="R604d06ce14904c23"/>
+    <p:sldLayoutId xmlns:r="http://schemas.openxmlformats.org/officeDocument/2006/relationships" id="2147483659" r:id="Rfc060c64c0f84ef3"/>
   </p:sldLayoutIdLst>
   <p:hf hdr="0" ftr="0" dt="0"/>
   <p:txStyles>
@@ -4909,7 +4909,7 @@
             <a:r>
               <a:rPr sz="2400">
                 <a:solidFill>
-                  <a:srgbClr val="1750EB"/>
+                  <a:srgbClr val="C45E00"/>
                 </a:solidFill>
                 <a:latin typeface="JetBrains Mono"/>
                 <a:ea typeface="JetBrains Mono"/>
@@ -4928,7 +4928,7 @@
             <a:r>
               <a:rPr sz="2400">
                 <a:solidFill>
-                  <a:srgbClr val="1750EB"/>
+                  <a:srgbClr val="C45E00"/>
                 </a:solidFill>
                 <a:latin typeface="JetBrains Mono"/>
                 <a:ea typeface="JetBrains Mono"/>
@@ -4972,7 +4972,7 @@
             <a:r>
               <a:rPr sz="2400">
                 <a:solidFill>
-                  <a:srgbClr val="1750EB"/>
+                  <a:srgbClr val="C45E00"/>
                 </a:solidFill>
                 <a:latin typeface="JetBrains Mono"/>
                 <a:ea typeface="JetBrains Mono"/>
@@ -5095,7 +5095,7 @@
             <a:r>
               <a:rPr sz="2400">
                 <a:solidFill>
-                  <a:srgbClr val="1750EB"/>
+                  <a:srgbClr val="C45E00"/>
                 </a:solidFill>
                 <a:latin typeface="JetBrains Mono"/>
                 <a:ea typeface="JetBrains Mono"/>
@@ -5243,7 +5243,7 @@
             <a:r>
               <a:rPr sz="2400">
                 <a:solidFill>
-                  <a:srgbClr val="1750EB"/>
+                  <a:srgbClr val="C45E00"/>
                 </a:solidFill>
                 <a:latin typeface="JetBrains Mono"/>
                 <a:ea typeface="JetBrains Mono"/>
@@ -5328,7 +5328,7 @@
             <a:r>
               <a:rPr sz="2400">
                 <a:solidFill>
-                  <a:srgbClr val="1750EB"/>
+                  <a:srgbClr val="C45E00"/>
                 </a:solidFill>
                 <a:latin typeface="JetBrains Mono"/>
                 <a:ea typeface="JetBrains Mono"/>
@@ -5358,7 +5358,7 @@
             <a:r>
               <a:rPr sz="2400">
                 <a:solidFill>
-                  <a:srgbClr val="1750EB"/>
+                  <a:srgbClr val="C45E00"/>
                 </a:solidFill>
                 <a:latin typeface="JetBrains Mono"/>
                 <a:ea typeface="JetBrains Mono"/>
@@ -5791,7 +5791,7 @@
             <a:r>
               <a:rPr sz="2400">
                 <a:solidFill>
-                  <a:srgbClr val="1750EB"/>
+                  <a:srgbClr val="C45E00"/>
                 </a:solidFill>
                 <a:latin typeface="JetBrains Mono"/>
                 <a:ea typeface="JetBrains Mono"/>
@@ -5810,7 +5810,7 @@
             <a:r>
               <a:rPr sz="2400">
                 <a:solidFill>
-                  <a:srgbClr val="1750EB"/>
+                  <a:srgbClr val="C45E00"/>
                 </a:solidFill>
                 <a:latin typeface="JetBrains Mono"/>
                 <a:ea typeface="JetBrains Mono"/>
@@ -5854,7 +5854,7 @@
             <a:r>
               <a:rPr sz="2400">
                 <a:solidFill>
-                  <a:srgbClr val="1750EB"/>
+                  <a:srgbClr val="C45E00"/>
                 </a:solidFill>
                 <a:latin typeface="JetBrains Mono"/>
                 <a:ea typeface="JetBrains Mono"/>
@@ -5977,7 +5977,7 @@
             <a:r>
               <a:rPr sz="2400">
                 <a:solidFill>
-                  <a:srgbClr val="1750EB"/>
+                  <a:srgbClr val="C45E00"/>
                 </a:solidFill>
                 <a:latin typeface="JetBrains Mono"/>
                 <a:ea typeface="JetBrains Mono"/>
@@ -6125,7 +6125,7 @@
             <a:r>
               <a:rPr sz="2400">
                 <a:solidFill>
-                  <a:srgbClr val="1750EB"/>
+                  <a:srgbClr val="C45E00"/>
                 </a:solidFill>
                 <a:latin typeface="JetBrains Mono"/>
                 <a:ea typeface="JetBrains Mono"/>
@@ -6210,7 +6210,7 @@
             <a:r>
               <a:rPr sz="2400">
                 <a:solidFill>
-                  <a:srgbClr val="1750EB"/>
+                  <a:srgbClr val="C45E00"/>
                 </a:solidFill>
                 <a:latin typeface="JetBrains Mono"/>
                 <a:ea typeface="JetBrains Mono"/>
@@ -6240,7 +6240,7 @@
             <a:r>
               <a:rPr sz="2400">
                 <a:solidFill>
-                  <a:srgbClr val="1750EB"/>
+                  <a:srgbClr val="C45E00"/>
                 </a:solidFill>
                 <a:latin typeface="JetBrains Mono"/>
                 <a:ea typeface="JetBrains Mono"/>
@@ -6673,7 +6673,7 @@
             <a:r>
               <a:rPr sz="2400">
                 <a:solidFill>
-                  <a:srgbClr val="1750EB"/>
+                  <a:srgbClr val="C45E00"/>
                 </a:solidFill>
                 <a:latin typeface="JetBrains Mono"/>
                 <a:ea typeface="JetBrains Mono"/>
@@ -6692,7 +6692,7 @@
             <a:r>
               <a:rPr sz="2400">
                 <a:solidFill>
-                  <a:srgbClr val="1750EB"/>
+                  <a:srgbClr val="C45E00"/>
                 </a:solidFill>
                 <a:latin typeface="JetBrains Mono"/>
                 <a:ea typeface="JetBrains Mono"/>
@@ -6736,7 +6736,7 @@
             <a:r>
               <a:rPr sz="2400">
                 <a:solidFill>
-                  <a:srgbClr val="1750EB"/>
+                  <a:srgbClr val="C45E00"/>
                 </a:solidFill>
                 <a:latin typeface="JetBrains Mono"/>
                 <a:ea typeface="JetBrains Mono"/>
@@ -6859,7 +6859,7 @@
             <a:r>
               <a:rPr sz="2400">
                 <a:solidFill>
-                  <a:srgbClr val="1750EB"/>
+                  <a:srgbClr val="C45E00"/>
                 </a:solidFill>
                 <a:latin typeface="JetBrains Mono"/>
                 <a:ea typeface="JetBrains Mono"/>
@@ -7007,7 +7007,7 @@
             <a:r>
               <a:rPr sz="2400">
                 <a:solidFill>
-                  <a:srgbClr val="1750EB"/>
+                  <a:srgbClr val="C45E00"/>
                 </a:solidFill>
                 <a:latin typeface="JetBrains Mono"/>
                 <a:ea typeface="JetBrains Mono"/>
@@ -7092,7 +7092,7 @@
             <a:r>
               <a:rPr sz="2400">
                 <a:solidFill>
-                  <a:srgbClr val="1750EB"/>
+                  <a:srgbClr val="C45E00"/>
                 </a:solidFill>
                 <a:latin typeface="JetBrains Mono"/>
                 <a:ea typeface="JetBrains Mono"/>
@@ -7122,7 +7122,7 @@
             <a:r>
               <a:rPr sz="2400">
                 <a:solidFill>
-                  <a:srgbClr val="1750EB"/>
+                  <a:srgbClr val="C45E00"/>
                 </a:solidFill>
                 <a:latin typeface="JetBrains Mono"/>
                 <a:ea typeface="JetBrains Mono"/>
@@ -7794,7 +7794,7 @@
             <a:r>
               <a:rPr sz="1100">
                 <a:solidFill>
-                  <a:srgbClr val="1750EB"/>
+                  <a:srgbClr val="C45E00"/>
                 </a:solidFill>
                 <a:latin typeface="JetBrains Mono"/>
                 <a:ea typeface="JetBrains Mono"/>
@@ -7815,7 +7815,7 @@
             <a:r>
               <a:rPr sz="1100">
                 <a:solidFill>
-                  <a:srgbClr val="1750EB"/>
+                  <a:srgbClr val="C45E00"/>
                 </a:solidFill>
                 <a:latin typeface="JetBrains Mono"/>
                 <a:ea typeface="JetBrains Mono"/>
@@ -7859,24 +7859,89 @@
             <a:r>
               <a:rPr sz="1100">
                 <a:solidFill>
+                  <a:srgbClr val="C45E00"/>
+                </a:solidFill>
+                <a:latin typeface="JetBrains Mono"/>
+                <a:ea typeface="JetBrains Mono"/>
+                <a:cs typeface="JetBrains Mono"/>
+              </a:rPr>
+              <a:t>True</a:t>
+            </a:r>
+            <a:r>
+              <a:rPr sz="1100">
+                <a:solidFill>
+                  <a:srgbClr val="080808"/>
+                </a:solidFill>
+                <a:latin typeface="JetBrains Mono"/>
+                <a:ea typeface="JetBrains Mono"/>
+                <a:cs typeface="JetBrains Mono"/>
+              </a:rPr>
+              <a:t>:</a:t>
+            </a:r>
+            <a:br>
+              <a:rPr sz="1100">
+                <a:solidFill>
+                  <a:srgbClr val="080808"/>
+                </a:solidFill>
+                <a:latin typeface="JetBrains Mono"/>
+                <a:ea typeface="JetBrains Mono"/>
+                <a:cs typeface="JetBrains Mono"/>
+              </a:rPr>
+            </a:br>
+            <a:r>
+              <a:rPr sz="1100">
+                <a:solidFill>
+                  <a:srgbClr val="080808"/>
+                </a:solidFill>
+                <a:latin typeface="JetBrains Mono"/>
+                <a:ea typeface="JetBrains Mono"/>
+                <a:cs typeface="JetBrains Mono"/>
+              </a:rPr>
+              <a:t>    choice = </a:t>
+            </a:r>
+            <a:r>
+              <a:rPr sz="1100">
+                <a:solidFill>
                   <a:srgbClr val="1750EB"/>
                 </a:solidFill>
                 <a:latin typeface="JetBrains Mono"/>
                 <a:ea typeface="JetBrains Mono"/>
                 <a:cs typeface="JetBrains Mono"/>
               </a:rPr>
-              <a:t>True</a:t>
-            </a:r>
-            <a:r>
-              <a:rPr sz="1100">
-                <a:solidFill>
-                  <a:srgbClr val="080808"/>
-                </a:solidFill>
-                <a:latin typeface="JetBrains Mono"/>
-                <a:ea typeface="JetBrains Mono"/>
-                <a:cs typeface="JetBrains Mono"/>
-              </a:rPr>
-              <a:t>:</a:t>
+              <a:t>input</a:t>
+            </a:r>
+            <a:r>
+              <a:rPr sz="1100">
+                <a:solidFill>
+                  <a:srgbClr val="080808"/>
+                </a:solidFill>
+                <a:latin typeface="JetBrains Mono"/>
+                <a:ea typeface="JetBrains Mono"/>
+                <a:cs typeface="JetBrains Mono"/>
+              </a:rPr>
+              <a:t>(</a:t>
+            </a:r>
+            <a:r>
+              <a:rPr sz="1100">
+                <a:solidFill>
+                  <a:srgbClr val="067D17"/>
+                </a:solidFill>
+                <a:latin typeface="JetBrains Mono"/>
+                <a:ea typeface="JetBrains Mono"/>
+                <a:cs typeface="JetBrains Mono"/>
+              </a:rPr>
+              <a:t>"1: greet, 2: leave: "</a:t>
+            </a:r>
+            <a:r>
+              <a:rPr sz="1100">
+                <a:solidFill>
+                  <a:srgbClr val="080808"/>
+                </a:solidFill>
+                <a:latin typeface="JetBrains Mono"/>
+                <a:ea typeface="JetBrains Mono"/>
+                <a:cs typeface="JetBrains Mono"/>
+              </a:rPr>
+              <a:t>)</a:t>
             </a:r>
             <a:br>
               <a:rPr sz="1100">
@@ -7897,51 +7962,7 @@
                 <a:ea typeface="JetBrains Mono"/>
                 <a:cs typeface="JetBrains Mono"/>
               </a:rPr>
-              <a:t>    choice = </a:t>
-            </a:r>
-            <a:r>
-              <a:rPr sz="1100">
-                <a:solidFill>
-                  <a:srgbClr val="1750EB"/>
-                </a:solidFill>
-                <a:latin typeface="JetBrains Mono"/>
-                <a:ea typeface="JetBrains Mono"/>
-                <a:cs typeface="JetBrains Mono"/>
-              </a:rPr>
-              <a:t>input</a:t>
-            </a:r>
-            <a:r>
-              <a:rPr sz="1100">
-                <a:solidFill>
-                  <a:srgbClr val="080808"/>
-                </a:solidFill>
-                <a:latin typeface="JetBrains Mono"/>
-                <a:ea typeface="JetBrains Mono"/>
-                <a:cs typeface="JetBrains Mono"/>
-              </a:rPr>
-              <a:t>(</a:t>
-            </a:r>
-            <a:r>
-              <a:rPr sz="1100">
-                <a:solidFill>
-                  <a:srgbClr val="067D17"/>
-                </a:solidFill>
-                <a:latin typeface="JetBrains Mono"/>
-                <a:ea typeface="JetBrains Mono"/>
-                <a:cs typeface="JetBrains Mono"/>
-              </a:rPr>
-              <a:t>"1: greet, 2: leave: "</a:t>
-            </a:r>
-            <a:r>
-              <a:rPr sz="1100">
-                <a:solidFill>
-                  <a:srgbClr val="080808"/>
-                </a:solidFill>
-                <a:latin typeface="JetBrains Mono"/>
-                <a:ea typeface="JetBrains Mono"/>
-                <a:cs typeface="JetBrains Mono"/>
-              </a:rPr>
-              <a:t>)</a:t>
+              <a:t>    choice = choice.lower()</a:t>
             </a:r>
             <a:br>
               <a:rPr sz="1100">
@@ -7962,33 +7983,12 @@
                 <a:ea typeface="JetBrains Mono"/>
                 <a:cs typeface="JetBrains Mono"/>
               </a:rPr>
-              <a:t>    choice = choice.lower()</a:t>
-            </a:r>
-            <a:br>
-              <a:rPr sz="1100">
-                <a:solidFill>
-                  <a:srgbClr val="080808"/>
-                </a:solidFill>
-                <a:latin typeface="JetBrains Mono"/>
-                <a:ea typeface="JetBrains Mono"/>
-                <a:cs typeface="JetBrains Mono"/>
-              </a:rPr>
-            </a:br>
-            <a:r>
-              <a:rPr sz="1100">
-                <a:solidFill>
-                  <a:srgbClr val="080808"/>
-                </a:solidFill>
-                <a:latin typeface="JetBrains Mono"/>
-                <a:ea typeface="JetBrains Mono"/>
-                <a:cs typeface="JetBrains Mono"/>
-              </a:rPr>
               <a:t>    </a:t>
             </a:r>
             <a:r>
               <a:rPr sz="1100">
                 <a:solidFill>
-                  <a:srgbClr val="1750EB"/>
+                  <a:srgbClr val="C45E00"/>
                 </a:solidFill>
                 <a:latin typeface="JetBrains Mono"/>
                 <a:ea typeface="JetBrains Mono"/>
@@ -8140,7 +8140,7 @@
             <a:r>
               <a:rPr sz="1100">
                 <a:solidFill>
-                  <a:srgbClr val="1750EB"/>
+                  <a:srgbClr val="C45E00"/>
                 </a:solidFill>
                 <a:latin typeface="JetBrains Mono"/>
                 <a:ea typeface="JetBrains Mono"/>
@@ -8227,7 +8227,7 @@
             <a:r>
               <a:rPr sz="1100">
                 <a:solidFill>
-                  <a:srgbClr val="1750EB"/>
+                  <a:srgbClr val="C45E00"/>
                 </a:solidFill>
                 <a:latin typeface="JetBrains Mono"/>
                 <a:ea typeface="JetBrains Mono"/>
@@ -8259,7 +8259,7 @@
             <a:r>
               <a:rPr sz="1100">
                 <a:solidFill>
-                  <a:srgbClr val="1750EB"/>
+                  <a:srgbClr val="C45E00"/>
                 </a:solidFill>
                 <a:latin typeface="JetBrains Mono"/>
                 <a:ea typeface="JetBrains Mono"/>
@@ -8990,7 +8990,7 @@
             <a:r>
               <a:rPr sz="1100">
                 <a:solidFill>
-                  <a:srgbClr val="1750EB"/>
+                  <a:srgbClr val="C45E00"/>
                 </a:solidFill>
                 <a:latin typeface="JetBrains Mono"/>
                 <a:ea typeface="JetBrains Mono"/>
@@ -9011,7 +9011,7 @@
             <a:r>
               <a:rPr sz="1100">
                 <a:solidFill>
-                  <a:srgbClr val="1750EB"/>
+                  <a:srgbClr val="C45E00"/>
                 </a:solidFill>
                 <a:latin typeface="JetBrains Mono"/>
                 <a:ea typeface="JetBrains Mono"/>
@@ -9055,24 +9055,89 @@
             <a:r>
               <a:rPr sz="1100">
                 <a:solidFill>
+                  <a:srgbClr val="C45E00"/>
+                </a:solidFill>
+                <a:latin typeface="JetBrains Mono"/>
+                <a:ea typeface="JetBrains Mono"/>
+                <a:cs typeface="JetBrains Mono"/>
+              </a:rPr>
+              <a:t>True</a:t>
+            </a:r>
+            <a:r>
+              <a:rPr sz="1100">
+                <a:solidFill>
+                  <a:srgbClr val="080808"/>
+                </a:solidFill>
+                <a:latin typeface="JetBrains Mono"/>
+                <a:ea typeface="JetBrains Mono"/>
+                <a:cs typeface="JetBrains Mono"/>
+              </a:rPr>
+              <a:t>:</a:t>
+            </a:r>
+            <a:br>
+              <a:rPr sz="1100">
+                <a:solidFill>
+                  <a:srgbClr val="080808"/>
+                </a:solidFill>
+                <a:latin typeface="JetBrains Mono"/>
+                <a:ea typeface="JetBrains Mono"/>
+                <a:cs typeface="JetBrains Mono"/>
+              </a:rPr>
+            </a:br>
+            <a:r>
+              <a:rPr sz="1100">
+                <a:solidFill>
+                  <a:srgbClr val="080808"/>
+                </a:solidFill>
+                <a:latin typeface="JetBrains Mono"/>
+                <a:ea typeface="JetBrains Mono"/>
+                <a:cs typeface="JetBrains Mono"/>
+              </a:rPr>
+              <a:t>    choice = </a:t>
+            </a:r>
+            <a:r>
+              <a:rPr sz="1100">
+                <a:solidFill>
                   <a:srgbClr val="1750EB"/>
                 </a:solidFill>
                 <a:latin typeface="JetBrains Mono"/>
                 <a:ea typeface="JetBrains Mono"/>
                 <a:cs typeface="JetBrains Mono"/>
               </a:rPr>
-              <a:t>True</a:t>
-            </a:r>
-            <a:r>
-              <a:rPr sz="1100">
-                <a:solidFill>
-                  <a:srgbClr val="080808"/>
-                </a:solidFill>
-                <a:latin typeface="JetBrains Mono"/>
-                <a:ea typeface="JetBrains Mono"/>
-                <a:cs typeface="JetBrains Mono"/>
-              </a:rPr>
-              <a:t>:</a:t>
+              <a:t>input</a:t>
+            </a:r>
+            <a:r>
+              <a:rPr sz="1100">
+                <a:solidFill>
+                  <a:srgbClr val="080808"/>
+                </a:solidFill>
+                <a:latin typeface="JetBrains Mono"/>
+                <a:ea typeface="JetBrains Mono"/>
+                <a:cs typeface="JetBrains Mono"/>
+              </a:rPr>
+              <a:t>(</a:t>
+            </a:r>
+            <a:r>
+              <a:rPr sz="1100">
+                <a:solidFill>
+                  <a:srgbClr val="067D17"/>
+                </a:solidFill>
+                <a:latin typeface="JetBrains Mono"/>
+                <a:ea typeface="JetBrains Mono"/>
+                <a:cs typeface="JetBrains Mono"/>
+              </a:rPr>
+              <a:t>"1: greet, 2: leave: "</a:t>
+            </a:r>
+            <a:r>
+              <a:rPr sz="1100">
+                <a:solidFill>
+                  <a:srgbClr val="080808"/>
+                </a:solidFill>
+                <a:latin typeface="JetBrains Mono"/>
+                <a:ea typeface="JetBrains Mono"/>
+                <a:cs typeface="JetBrains Mono"/>
+              </a:rPr>
+              <a:t>)</a:t>
             </a:r>
             <a:br>
               <a:rPr sz="1100">
@@ -9093,51 +9158,7 @@
                 <a:ea typeface="JetBrains Mono"/>
                 <a:cs typeface="JetBrains Mono"/>
               </a:rPr>
-              <a:t>    choice = </a:t>
-            </a:r>
-            <a:r>
-              <a:rPr sz="1100">
-                <a:solidFill>
-                  <a:srgbClr val="1750EB"/>
-                </a:solidFill>
-                <a:latin typeface="JetBrains Mono"/>
-                <a:ea typeface="JetBrains Mono"/>
-                <a:cs typeface="JetBrains Mono"/>
-              </a:rPr>
-              <a:t>input</a:t>
-            </a:r>
-            <a:r>
-              <a:rPr sz="1100">
-                <a:solidFill>
-                  <a:srgbClr val="080808"/>
-                </a:solidFill>
-                <a:latin typeface="JetBrains Mono"/>
-                <a:ea typeface="JetBrains Mono"/>
-                <a:cs typeface="JetBrains Mono"/>
-              </a:rPr>
-              <a:t>(</a:t>
-            </a:r>
-            <a:r>
-              <a:rPr sz="1100">
-                <a:solidFill>
-                  <a:srgbClr val="067D17"/>
-                </a:solidFill>
-                <a:latin typeface="JetBrains Mono"/>
-                <a:ea typeface="JetBrains Mono"/>
-                <a:cs typeface="JetBrains Mono"/>
-              </a:rPr>
-              <a:t>"1: greet, 2: leave: "</a:t>
-            </a:r>
-            <a:r>
-              <a:rPr sz="1100">
-                <a:solidFill>
-                  <a:srgbClr val="080808"/>
-                </a:solidFill>
-                <a:latin typeface="JetBrains Mono"/>
-                <a:ea typeface="JetBrains Mono"/>
-                <a:cs typeface="JetBrains Mono"/>
-              </a:rPr>
-              <a:t>)</a:t>
+              <a:t>    choice = choice.lower()</a:t>
             </a:r>
             <a:br>
               <a:rPr sz="1100">
@@ -9158,33 +9179,12 @@
                 <a:ea typeface="JetBrains Mono"/>
                 <a:cs typeface="JetBrains Mono"/>
               </a:rPr>
-              <a:t>    choice = choice.lower()</a:t>
-            </a:r>
-            <a:br>
-              <a:rPr sz="1100">
-                <a:solidFill>
-                  <a:srgbClr val="080808"/>
-                </a:solidFill>
-                <a:latin typeface="JetBrains Mono"/>
-                <a:ea typeface="JetBrains Mono"/>
-                <a:cs typeface="JetBrains Mono"/>
-              </a:rPr>
-            </a:br>
-            <a:r>
-              <a:rPr sz="1100">
-                <a:solidFill>
-                  <a:srgbClr val="080808"/>
-                </a:solidFill>
-                <a:latin typeface="JetBrains Mono"/>
-                <a:ea typeface="JetBrains Mono"/>
-                <a:cs typeface="JetBrains Mono"/>
-              </a:rPr>
               <a:t>    </a:t>
             </a:r>
             <a:r>
               <a:rPr sz="1100">
                 <a:solidFill>
-                  <a:srgbClr val="1750EB"/>
+                  <a:srgbClr val="C45E00"/>
                 </a:solidFill>
                 <a:latin typeface="JetBrains Mono"/>
                 <a:ea typeface="JetBrains Mono"/>
@@ -9336,7 +9336,7 @@
             <a:r>
               <a:rPr sz="1100">
                 <a:solidFill>
-                  <a:srgbClr val="1750EB"/>
+                  <a:srgbClr val="C45E00"/>
                 </a:solidFill>
                 <a:latin typeface="JetBrains Mono"/>
                 <a:ea typeface="JetBrains Mono"/>
@@ -9423,7 +9423,7 @@
             <a:r>
               <a:rPr sz="1100">
                 <a:solidFill>
-                  <a:srgbClr val="1750EB"/>
+                  <a:srgbClr val="C45E00"/>
                 </a:solidFill>
                 <a:latin typeface="JetBrains Mono"/>
                 <a:ea typeface="JetBrains Mono"/>
@@ -9455,7 +9455,7 @@
             <a:r>
               <a:rPr sz="1100">
                 <a:solidFill>
-                  <a:srgbClr val="1750EB"/>
+                  <a:srgbClr val="C45E00"/>
                 </a:solidFill>
                 <a:latin typeface="JetBrains Mono"/>
                 <a:ea typeface="JetBrains Mono"/>
@@ -9722,7 +9722,7 @@
             <a:r>
               <a:rPr sz="2050" b="0">
                 <a:solidFill>
-                  <a:srgbClr val="1750EB"/>
+                  <a:srgbClr val="C45E00"/>
                 </a:solidFill>
                 <a:latin typeface="JetBrains Mono"/>
                 <a:ea typeface="JetBrains Mono"/>
@@ -10147,7 +10147,7 @@
             <a:r>
               <a:rPr sz="1100">
                 <a:solidFill>
-                  <a:srgbClr val="1750EB"/>
+                  <a:srgbClr val="C45E00"/>
                 </a:solidFill>
                 <a:latin typeface="JetBrains Mono"/>
                 <a:ea typeface="JetBrains Mono"/>
@@ -10168,7 +10168,7 @@
             <a:r>
               <a:rPr sz="1100">
                 <a:solidFill>
-                  <a:srgbClr val="1750EB"/>
+                  <a:srgbClr val="C45E00"/>
                 </a:solidFill>
                 <a:latin typeface="JetBrains Mono"/>
                 <a:ea typeface="JetBrains Mono"/>
@@ -10212,24 +10212,89 @@
             <a:r>
               <a:rPr sz="1100">
                 <a:solidFill>
+                  <a:srgbClr val="C45E00"/>
+                </a:solidFill>
+                <a:latin typeface="JetBrains Mono"/>
+                <a:ea typeface="JetBrains Mono"/>
+                <a:cs typeface="JetBrains Mono"/>
+              </a:rPr>
+              <a:t>True</a:t>
+            </a:r>
+            <a:r>
+              <a:rPr sz="1100">
+                <a:solidFill>
+                  <a:srgbClr val="080808"/>
+                </a:solidFill>
+                <a:latin typeface="JetBrains Mono"/>
+                <a:ea typeface="JetBrains Mono"/>
+                <a:cs typeface="JetBrains Mono"/>
+              </a:rPr>
+              <a:t>:</a:t>
+            </a:r>
+            <a:br>
+              <a:rPr sz="1100">
+                <a:solidFill>
+                  <a:srgbClr val="080808"/>
+                </a:solidFill>
+                <a:latin typeface="JetBrains Mono"/>
+                <a:ea typeface="JetBrains Mono"/>
+                <a:cs typeface="JetBrains Mono"/>
+              </a:rPr>
+            </a:br>
+            <a:r>
+              <a:rPr sz="1100">
+                <a:solidFill>
+                  <a:srgbClr val="080808"/>
+                </a:solidFill>
+                <a:latin typeface="JetBrains Mono"/>
+                <a:ea typeface="JetBrains Mono"/>
+                <a:cs typeface="JetBrains Mono"/>
+              </a:rPr>
+              <a:t>    choice = </a:t>
+            </a:r>
+            <a:r>
+              <a:rPr sz="1100">
+                <a:solidFill>
                   <a:srgbClr val="1750EB"/>
                 </a:solidFill>
                 <a:latin typeface="JetBrains Mono"/>
                 <a:ea typeface="JetBrains Mono"/>
                 <a:cs typeface="JetBrains Mono"/>
               </a:rPr>
-              <a:t>True</a:t>
-            </a:r>
-            <a:r>
-              <a:rPr sz="1100">
-                <a:solidFill>
-                  <a:srgbClr val="080808"/>
-                </a:solidFill>
-                <a:latin typeface="JetBrains Mono"/>
-                <a:ea typeface="JetBrains Mono"/>
-                <a:cs typeface="JetBrains Mono"/>
-              </a:rPr>
-              <a:t>:</a:t>
+              <a:t>input</a:t>
+            </a:r>
+            <a:r>
+              <a:rPr sz="1100">
+                <a:solidFill>
+                  <a:srgbClr val="080808"/>
+                </a:solidFill>
+                <a:latin typeface="JetBrains Mono"/>
+                <a:ea typeface="JetBrains Mono"/>
+                <a:cs typeface="JetBrains Mono"/>
+              </a:rPr>
+              <a:t>(</a:t>
+            </a:r>
+            <a:r>
+              <a:rPr sz="1100">
+                <a:solidFill>
+                  <a:srgbClr val="067D17"/>
+                </a:solidFill>
+                <a:latin typeface="JetBrains Mono"/>
+                <a:ea typeface="JetBrains Mono"/>
+                <a:cs typeface="JetBrains Mono"/>
+              </a:rPr>
+              <a:t>"1: greet, 2: leave: "</a:t>
+            </a:r>
+            <a:r>
+              <a:rPr sz="1100">
+                <a:solidFill>
+                  <a:srgbClr val="080808"/>
+                </a:solidFill>
+                <a:latin typeface="JetBrains Mono"/>
+                <a:ea typeface="JetBrains Mono"/>
+                <a:cs typeface="JetBrains Mono"/>
+              </a:rPr>
+              <a:t>)</a:t>
             </a:r>
             <a:br>
               <a:rPr sz="1100">
@@ -10250,51 +10315,7 @@
                 <a:ea typeface="JetBrains Mono"/>
                 <a:cs typeface="JetBrains Mono"/>
               </a:rPr>
-              <a:t>    choice = </a:t>
-            </a:r>
-            <a:r>
-              <a:rPr sz="1100">
-                <a:solidFill>
-                  <a:srgbClr val="1750EB"/>
-                </a:solidFill>
-                <a:latin typeface="JetBrains Mono"/>
-                <a:ea typeface="JetBrains Mono"/>
-                <a:cs typeface="JetBrains Mono"/>
-              </a:rPr>
-              <a:t>input</a:t>
-            </a:r>
-            <a:r>
-              <a:rPr sz="1100">
-                <a:solidFill>
-                  <a:srgbClr val="080808"/>
-                </a:solidFill>
-                <a:latin typeface="JetBrains Mono"/>
-                <a:ea typeface="JetBrains Mono"/>
-                <a:cs typeface="JetBrains Mono"/>
-              </a:rPr>
-              <a:t>(</a:t>
-            </a:r>
-            <a:r>
-              <a:rPr sz="1100">
-                <a:solidFill>
-                  <a:srgbClr val="067D17"/>
-                </a:solidFill>
-                <a:latin typeface="JetBrains Mono"/>
-                <a:ea typeface="JetBrains Mono"/>
-                <a:cs typeface="JetBrains Mono"/>
-              </a:rPr>
-              <a:t>"1: greet, 2: leave: "</a:t>
-            </a:r>
-            <a:r>
-              <a:rPr sz="1100">
-                <a:solidFill>
-                  <a:srgbClr val="080808"/>
-                </a:solidFill>
-                <a:latin typeface="JetBrains Mono"/>
-                <a:ea typeface="JetBrains Mono"/>
-                <a:cs typeface="JetBrains Mono"/>
-              </a:rPr>
-              <a:t>)</a:t>
+              <a:t>    choice = choice.lower()</a:t>
             </a:r>
             <a:br>
               <a:rPr sz="1100">
@@ -10315,33 +10336,12 @@
                 <a:ea typeface="JetBrains Mono"/>
                 <a:cs typeface="JetBrains Mono"/>
               </a:rPr>
-              <a:t>    choice = choice.lower()</a:t>
-            </a:r>
-            <a:br>
-              <a:rPr sz="1100">
-                <a:solidFill>
-                  <a:srgbClr val="080808"/>
-                </a:solidFill>
-                <a:latin typeface="JetBrains Mono"/>
-                <a:ea typeface="JetBrains Mono"/>
-                <a:cs typeface="JetBrains Mono"/>
-              </a:rPr>
-            </a:br>
-            <a:r>
-              <a:rPr sz="1100">
-                <a:solidFill>
-                  <a:srgbClr val="080808"/>
-                </a:solidFill>
-                <a:latin typeface="JetBrains Mono"/>
-                <a:ea typeface="JetBrains Mono"/>
-                <a:cs typeface="JetBrains Mono"/>
-              </a:rPr>
               <a:t>    </a:t>
             </a:r>
             <a:r>
               <a:rPr sz="1100">
                 <a:solidFill>
-                  <a:srgbClr val="1750EB"/>
+                  <a:srgbClr val="C45E00"/>
                 </a:solidFill>
                 <a:latin typeface="JetBrains Mono"/>
                 <a:ea typeface="JetBrains Mono"/>
@@ -10493,7 +10493,7 @@
             <a:r>
               <a:rPr sz="1100">
                 <a:solidFill>
-                  <a:srgbClr val="1750EB"/>
+                  <a:srgbClr val="C45E00"/>
                 </a:solidFill>
                 <a:latin typeface="JetBrains Mono"/>
                 <a:ea typeface="JetBrains Mono"/>
@@ -10580,7 +10580,7 @@
             <a:r>
               <a:rPr sz="1100">
                 <a:solidFill>
-                  <a:srgbClr val="1750EB"/>
+                  <a:srgbClr val="C45E00"/>
                 </a:solidFill>
                 <a:latin typeface="JetBrains Mono"/>
                 <a:ea typeface="JetBrains Mono"/>
@@ -10612,7 +10612,7 @@
             <a:r>
               <a:rPr sz="1100">
                 <a:solidFill>
-                  <a:srgbClr val="1750EB"/>
+                  <a:srgbClr val="C45E00"/>
                 </a:solidFill>
                 <a:latin typeface="JetBrains Mono"/>
                 <a:ea typeface="JetBrains Mono"/>
@@ -10879,7 +10879,7 @@
             <a:r>
               <a:rPr sz="2050" b="0">
                 <a:solidFill>
-                  <a:srgbClr val="1750EB"/>
+                  <a:srgbClr val="C45E00"/>
                 </a:solidFill>
                 <a:latin typeface="JetBrains Mono"/>
                 <a:ea typeface="JetBrains Mono"/>
@@ -10923,7 +10923,7 @@
             <a:r>
               <a:rPr sz="2050" b="0">
                 <a:solidFill>
-                  <a:srgbClr val="1750EB"/>
+                  <a:srgbClr val="C45E00"/>
                 </a:solidFill>
                 <a:latin typeface="JetBrains Mono"/>
                 <a:ea typeface="JetBrains Mono"/>
@@ -10945,7 +10945,7 @@
             <a:r>
               <a:rPr sz="2050" b="0">
                 <a:solidFill>
-                  <a:srgbClr val="1750EB"/>
+                  <a:srgbClr val="C45E00"/>
                 </a:solidFill>
                 <a:latin typeface="JetBrains Mono"/>
                 <a:ea typeface="JetBrains Mono"/>
@@ -11392,7 +11392,7 @@
             <a:r>
               <a:rPr sz="1100">
                 <a:solidFill>
-                  <a:srgbClr val="1750EB"/>
+                  <a:srgbClr val="C45E00"/>
                 </a:solidFill>
                 <a:latin typeface="JetBrains Mono"/>
                 <a:ea typeface="JetBrains Mono"/>
@@ -11413,7 +11413,7 @@
             <a:r>
               <a:rPr sz="1100">
                 <a:solidFill>
-                  <a:srgbClr val="1750EB"/>
+                  <a:srgbClr val="C45E00"/>
                 </a:solidFill>
                 <a:latin typeface="JetBrains Mono"/>
                 <a:ea typeface="JetBrains Mono"/>
@@ -11457,24 +11457,89 @@
             <a:r>
               <a:rPr sz="1100">
                 <a:solidFill>
+                  <a:srgbClr val="C45E00"/>
+                </a:solidFill>
+                <a:latin typeface="JetBrains Mono"/>
+                <a:ea typeface="JetBrains Mono"/>
+                <a:cs typeface="JetBrains Mono"/>
+              </a:rPr>
+              <a:t>True</a:t>
+            </a:r>
+            <a:r>
+              <a:rPr sz="1100">
+                <a:solidFill>
+                  <a:srgbClr val="080808"/>
+                </a:solidFill>
+                <a:latin typeface="JetBrains Mono"/>
+                <a:ea typeface="JetBrains Mono"/>
+                <a:cs typeface="JetBrains Mono"/>
+              </a:rPr>
+              <a:t>:</a:t>
+            </a:r>
+            <a:br>
+              <a:rPr sz="1100">
+                <a:solidFill>
+                  <a:srgbClr val="080808"/>
+                </a:solidFill>
+                <a:latin typeface="JetBrains Mono"/>
+                <a:ea typeface="JetBrains Mono"/>
+                <a:cs typeface="JetBrains Mono"/>
+              </a:rPr>
+            </a:br>
+            <a:r>
+              <a:rPr sz="1100">
+                <a:solidFill>
+                  <a:srgbClr val="080808"/>
+                </a:solidFill>
+                <a:latin typeface="JetBrains Mono"/>
+                <a:ea typeface="JetBrains Mono"/>
+                <a:cs typeface="JetBrains Mono"/>
+              </a:rPr>
+              <a:t>    choice = </a:t>
+            </a:r>
+            <a:r>
+              <a:rPr sz="1100">
+                <a:solidFill>
                   <a:srgbClr val="1750EB"/>
                 </a:solidFill>
                 <a:latin typeface="JetBrains Mono"/>
                 <a:ea typeface="JetBrains Mono"/>
                 <a:cs typeface="JetBrains Mono"/>
               </a:rPr>
-              <a:t>True</a:t>
-            </a:r>
-            <a:r>
-              <a:rPr sz="1100">
-                <a:solidFill>
-                  <a:srgbClr val="080808"/>
-                </a:solidFill>
-                <a:latin typeface="JetBrains Mono"/>
-                <a:ea typeface="JetBrains Mono"/>
-                <a:cs typeface="JetBrains Mono"/>
-              </a:rPr>
-              <a:t>:</a:t>
+              <a:t>input</a:t>
+            </a:r>
+            <a:r>
+              <a:rPr sz="1100">
+                <a:solidFill>
+                  <a:srgbClr val="080808"/>
+                </a:solidFill>
+                <a:latin typeface="JetBrains Mono"/>
+                <a:ea typeface="JetBrains Mono"/>
+                <a:cs typeface="JetBrains Mono"/>
+              </a:rPr>
+              <a:t>(</a:t>
+            </a:r>
+            <a:r>
+              <a:rPr sz="1100">
+                <a:solidFill>
+                  <a:srgbClr val="067D17"/>
+                </a:solidFill>
+                <a:latin typeface="JetBrains Mono"/>
+                <a:ea typeface="JetBrains Mono"/>
+                <a:cs typeface="JetBrains Mono"/>
+              </a:rPr>
+              <a:t>"1: greet, 2: leave: "</a:t>
+            </a:r>
+            <a:r>
+              <a:rPr sz="1100">
+                <a:solidFill>
+                  <a:srgbClr val="080808"/>
+                </a:solidFill>
+                <a:latin typeface="JetBrains Mono"/>
+                <a:ea typeface="JetBrains Mono"/>
+                <a:cs typeface="JetBrains Mono"/>
+              </a:rPr>
+              <a:t>)</a:t>
             </a:r>
             <a:br>
               <a:rPr sz="1100">
@@ -11495,51 +11560,7 @@
                 <a:ea typeface="JetBrains Mono"/>
                 <a:cs typeface="JetBrains Mono"/>
               </a:rPr>
-              <a:t>    choice = </a:t>
-            </a:r>
-            <a:r>
-              <a:rPr sz="1100">
-                <a:solidFill>
-                  <a:srgbClr val="1750EB"/>
-                </a:solidFill>
-                <a:latin typeface="JetBrains Mono"/>
-                <a:ea typeface="JetBrains Mono"/>
-                <a:cs typeface="JetBrains Mono"/>
-              </a:rPr>
-              <a:t>input</a:t>
-            </a:r>
-            <a:r>
-              <a:rPr sz="1100">
-                <a:solidFill>
-                  <a:srgbClr val="080808"/>
-                </a:solidFill>
-                <a:latin typeface="JetBrains Mono"/>
-                <a:ea typeface="JetBrains Mono"/>
-                <a:cs typeface="JetBrains Mono"/>
-              </a:rPr>
-              <a:t>(</a:t>
-            </a:r>
-            <a:r>
-              <a:rPr sz="1100">
-                <a:solidFill>
-                  <a:srgbClr val="067D17"/>
-                </a:solidFill>
-                <a:latin typeface="JetBrains Mono"/>
-                <a:ea typeface="JetBrains Mono"/>
-                <a:cs typeface="JetBrains Mono"/>
-              </a:rPr>
-              <a:t>"1: greet, 2: leave: "</a:t>
-            </a:r>
-            <a:r>
-              <a:rPr sz="1100">
-                <a:solidFill>
-                  <a:srgbClr val="080808"/>
-                </a:solidFill>
-                <a:latin typeface="JetBrains Mono"/>
-                <a:ea typeface="JetBrains Mono"/>
-                <a:cs typeface="JetBrains Mono"/>
-              </a:rPr>
-              <a:t>)</a:t>
+              <a:t>    choice = choice.lower()</a:t>
             </a:r>
             <a:br>
               <a:rPr sz="1100">
@@ -11560,33 +11581,12 @@
                 <a:ea typeface="JetBrains Mono"/>
                 <a:cs typeface="JetBrains Mono"/>
               </a:rPr>
-              <a:t>    choice = choice.lower()</a:t>
-            </a:r>
-            <a:br>
-              <a:rPr sz="1100">
-                <a:solidFill>
-                  <a:srgbClr val="080808"/>
-                </a:solidFill>
-                <a:latin typeface="JetBrains Mono"/>
-                <a:ea typeface="JetBrains Mono"/>
-                <a:cs typeface="JetBrains Mono"/>
-              </a:rPr>
-            </a:br>
-            <a:r>
-              <a:rPr sz="1100">
-                <a:solidFill>
-                  <a:srgbClr val="080808"/>
-                </a:solidFill>
-                <a:latin typeface="JetBrains Mono"/>
-                <a:ea typeface="JetBrains Mono"/>
-                <a:cs typeface="JetBrains Mono"/>
-              </a:rPr>
               <a:t>    </a:t>
             </a:r>
             <a:r>
               <a:rPr sz="1100">
                 <a:solidFill>
-                  <a:srgbClr val="1750EB"/>
+                  <a:srgbClr val="C45E00"/>
                 </a:solidFill>
                 <a:latin typeface="JetBrains Mono"/>
                 <a:ea typeface="JetBrains Mono"/>
@@ -11738,7 +11738,7 @@
             <a:r>
               <a:rPr sz="1100">
                 <a:solidFill>
-                  <a:srgbClr val="1750EB"/>
+                  <a:srgbClr val="C45E00"/>
                 </a:solidFill>
                 <a:latin typeface="JetBrains Mono"/>
                 <a:ea typeface="JetBrains Mono"/>
@@ -11825,7 +11825,7 @@
             <a:r>
               <a:rPr sz="1100">
                 <a:solidFill>
-                  <a:srgbClr val="1750EB"/>
+                  <a:srgbClr val="C45E00"/>
                 </a:solidFill>
                 <a:latin typeface="JetBrains Mono"/>
                 <a:ea typeface="JetBrains Mono"/>
@@ -11857,7 +11857,7 @@
             <a:r>
               <a:rPr sz="1100">
                 <a:solidFill>
-                  <a:srgbClr val="1750EB"/>
+                  <a:srgbClr val="C45E00"/>
                 </a:solidFill>
                 <a:latin typeface="JetBrains Mono"/>
                 <a:ea typeface="JetBrains Mono"/>
@@ -12161,7 +12161,7 @@
             <a:r>
               <a:rPr sz="1800">
                 <a:solidFill>
-                  <a:srgbClr val="1750EB"/>
+                  <a:srgbClr val="C45E00"/>
                 </a:solidFill>
                 <a:latin typeface="JetBrains Mono"/>
                 <a:ea typeface="JetBrains Mono"/>
@@ -12205,7 +12205,7 @@
             <a:r>
               <a:rPr sz="1800">
                 <a:solidFill>
-                  <a:srgbClr val="1750EB"/>
+                  <a:srgbClr val="C45E00"/>
                 </a:solidFill>
                 <a:latin typeface="JetBrains Mono"/>
                 <a:ea typeface="JetBrains Mono"/>
@@ -12309,7 +12309,7 @@
             <a:r>
               <a:rPr sz="1800">
                 <a:solidFill>
-                  <a:srgbClr val="1750EB"/>
+                  <a:srgbClr val="C45E00"/>
                 </a:solidFill>
                 <a:latin typeface="JetBrains Mono"/>
                 <a:ea typeface="JetBrains Mono"/>
@@ -12457,7 +12457,7 @@
             <a:r>
               <a:rPr sz="1800">
                 <a:solidFill>
-                  <a:srgbClr val="1750EB"/>
+                  <a:srgbClr val="C45E00"/>
                 </a:solidFill>
                 <a:latin typeface="JetBrains Mono"/>
                 <a:ea typeface="JetBrains Mono"/>
@@ -12564,7 +12564,7 @@
             <a:r>
               <a:rPr sz="1800">
                 <a:solidFill>
-                  <a:srgbClr val="1750EB"/>
+                  <a:srgbClr val="C45E00"/>
                 </a:solidFill>
                 <a:latin typeface="JetBrains Mono"/>
                 <a:ea typeface="JetBrains Mono"/>

--- a/Mapped Curriculum Lessons/Grade 7/Lesson 20 - Reliable Menus/Reliable Menus - Slides.pptx
+++ b/Mapped Curriculum Lessons/Grade 7/Lesson 20 - Reliable Menus/Reliable Menus - Slides.pptx
@@ -2,28 +2,28 @@
 <file path=ppt/presentation.xml><?xml version="1.0" encoding="utf-8"?>
 <p:presentation xmlns:p="http://schemas.openxmlformats.org/presentationml/2006/main" embedTrueTypeFonts="1" saveSubsetFonts="0">
   <p:sldMasterIdLst>
-    <p:sldMasterId xmlns:r="http://schemas.openxmlformats.org/officeDocument/2006/relationships" id="2147483648" r:id="R108e432a69b745c5"/>
+    <p:sldMasterId xmlns:r="http://schemas.openxmlformats.org/officeDocument/2006/relationships" id="2147483648" r:id="Rab00ab2bd57f4895"/>
   </p:sldMasterIdLst>
   <p:notesMasterIdLst>
-    <p:notesMasterId xmlns:r="http://schemas.openxmlformats.org/officeDocument/2006/relationships" r:id="R9e9a15d0bc274248"/>
+    <p:notesMasterId xmlns:r="http://schemas.openxmlformats.org/officeDocument/2006/relationships" r:id="R5a5ac0708d824790"/>
   </p:notesMasterIdLst>
   <p:sldIdLst>
-    <p:sldId xmlns:r="http://schemas.openxmlformats.org/officeDocument/2006/relationships" id="256" r:id="Re59986b64a074725"/>
-    <p:sldId xmlns:r="http://schemas.openxmlformats.org/officeDocument/2006/relationships" id="257" r:id="Rb4655916410b413b"/>
-    <p:sldId xmlns:r="http://schemas.openxmlformats.org/officeDocument/2006/relationships" id="258" r:id="R0066aa724a124b20"/>
-    <p:sldId xmlns:r="http://schemas.openxmlformats.org/officeDocument/2006/relationships" id="259" r:id="R33d6f1841ffa4e1b"/>
-    <p:sldId xmlns:r="http://schemas.openxmlformats.org/officeDocument/2006/relationships" id="260" r:id="R5ef613087fd846c6"/>
-    <p:sldId xmlns:r="http://schemas.openxmlformats.org/officeDocument/2006/relationships" id="261" r:id="Rbc675149d06546ae"/>
-    <p:sldId xmlns:r="http://schemas.openxmlformats.org/officeDocument/2006/relationships" id="262" r:id="Rc6bf029011f04e34"/>
-    <p:sldId xmlns:r="http://schemas.openxmlformats.org/officeDocument/2006/relationships" id="263" r:id="R49d535ecb54d4fe0"/>
-    <p:sldId xmlns:r="http://schemas.openxmlformats.org/officeDocument/2006/relationships" id="264" r:id="R5be0bd72d3374461"/>
+    <p:sldId xmlns:r="http://schemas.openxmlformats.org/officeDocument/2006/relationships" id="256" r:id="Rbae264ff03f847b7"/>
+    <p:sldId xmlns:r="http://schemas.openxmlformats.org/officeDocument/2006/relationships" id="257" r:id="R2d6d7af16d6648a1"/>
+    <p:sldId xmlns:r="http://schemas.openxmlformats.org/officeDocument/2006/relationships" id="258" r:id="R2749a478db2b4d24"/>
+    <p:sldId xmlns:r="http://schemas.openxmlformats.org/officeDocument/2006/relationships" id="259" r:id="R01073a1b4b524c32"/>
+    <p:sldId xmlns:r="http://schemas.openxmlformats.org/officeDocument/2006/relationships" id="260" r:id="Rf0539271633442b6"/>
+    <p:sldId xmlns:r="http://schemas.openxmlformats.org/officeDocument/2006/relationships" id="261" r:id="R687a708551704404"/>
+    <p:sldId xmlns:r="http://schemas.openxmlformats.org/officeDocument/2006/relationships" id="262" r:id="R9d1ce8dadde84e54"/>
+    <p:sldId xmlns:r="http://schemas.openxmlformats.org/officeDocument/2006/relationships" id="263" r:id="R63ed6adf9c8b403d"/>
+    <p:sldId xmlns:r="http://schemas.openxmlformats.org/officeDocument/2006/relationships" id="264" r:id="Rd7abf0a298264790"/>
   </p:sldIdLst>
   <p:sldSz cx="12192000" cy="6858000"/>
   <p:notesSz cx="6858000" cy="9144000"/>
   <p:embeddedFontLst>
     <p:embeddedFont>
       <p:font typeface="JetBrains Mono"/>
-      <p:regular xmlns:r="http://schemas.openxmlformats.org/officeDocument/2006/relationships" r:id="Rc3d6ceeae3e24877"/>
+      <p:regular xmlns:r="http://schemas.openxmlformats.org/officeDocument/2006/relationships" r:id="R4eba46d8c7ad4cc5"/>
     </p:embeddedFont>
   </p:embeddedFontLst>
 </p:presentation>
@@ -1071,7 +1071,7 @@
           <p:nvPr/>
         </p:nvPicPr>
         <p:blipFill rotWithShape="1">
-          <a:blip xmlns:r="http://schemas.openxmlformats.org/officeDocument/2006/relationships" xmlns:a="http://schemas.openxmlformats.org/drawingml/2006/main" r:embed="R90129f4424704849"/>
+          <a:blip xmlns:r="http://schemas.openxmlformats.org/officeDocument/2006/relationships" xmlns:a="http://schemas.openxmlformats.org/drawingml/2006/main" r:embed="Rc40ae22a2b034fe1"/>
           <a:stretch xmlns:a="http://schemas.openxmlformats.org/drawingml/2006/main"/>
         </p:blipFill>
         <p:spPr>
@@ -1451,7 +1451,7 @@
           <p:nvPr/>
         </p:nvPicPr>
         <p:blipFill rotWithShape="1">
-          <a:blip xmlns:r="http://schemas.openxmlformats.org/officeDocument/2006/relationships" xmlns:a="http://schemas.openxmlformats.org/drawingml/2006/main" r:embed="Rd03f2f2f4d1b4316">
+          <a:blip xmlns:r="http://schemas.openxmlformats.org/officeDocument/2006/relationships" xmlns:a="http://schemas.openxmlformats.org/drawingml/2006/main" r:embed="Rb0f0aaf87b7f4dd5">
             <a:alphaModFix amt="28000"/>
           </a:blip>
           <a:stretch xmlns:a="http://schemas.openxmlformats.org/drawingml/2006/main"/>
@@ -1664,7 +1664,7 @@
           <p:nvPr/>
         </p:nvPicPr>
         <p:blipFill rotWithShape="1">
-          <a:blip xmlns:r="http://schemas.openxmlformats.org/officeDocument/2006/relationships" xmlns:a="http://schemas.openxmlformats.org/drawingml/2006/main" r:embed="Rc2a82153d06c4c5a">
+          <a:blip xmlns:r="http://schemas.openxmlformats.org/officeDocument/2006/relationships" xmlns:a="http://schemas.openxmlformats.org/drawingml/2006/main" r:embed="Rd9fbf4d8152d451d">
             <a:alphaModFix amt="28000"/>
           </a:blip>
           <a:stretch xmlns:a="http://schemas.openxmlformats.org/drawingml/2006/main"/>
@@ -1899,7 +1899,7 @@
           <p:nvPr/>
         </p:nvPicPr>
         <p:blipFill rotWithShape="1">
-          <a:blip xmlns:r="http://schemas.openxmlformats.org/officeDocument/2006/relationships" xmlns:a="http://schemas.openxmlformats.org/drawingml/2006/main" r:embed="Rcbc052db3b6a4c15">
+          <a:blip xmlns:r="http://schemas.openxmlformats.org/officeDocument/2006/relationships" xmlns:a="http://schemas.openxmlformats.org/drawingml/2006/main" r:embed="Rf39de68a3bf24f7b">
             <a:alphaModFix amt="28000"/>
           </a:blip>
           <a:stretch xmlns:a="http://schemas.openxmlformats.org/drawingml/2006/main"/>
@@ -2176,7 +2176,7 @@
           <p:nvPr/>
         </p:nvPicPr>
         <p:blipFill rotWithShape="1">
-          <a:blip xmlns:r="http://schemas.openxmlformats.org/officeDocument/2006/relationships" xmlns:a="http://schemas.openxmlformats.org/drawingml/2006/main" r:embed="R9d12a4e1ccbf4649">
+          <a:blip xmlns:r="http://schemas.openxmlformats.org/officeDocument/2006/relationships" xmlns:a="http://schemas.openxmlformats.org/drawingml/2006/main" r:embed="Re0f05cbe3aa847af">
             <a:alphaModFix amt="28000"/>
           </a:blip>
           <a:stretch xmlns:a="http://schemas.openxmlformats.org/drawingml/2006/main"/>
@@ -2451,7 +2451,7 @@
           <p:nvPr/>
         </p:nvPicPr>
         <p:blipFill rotWithShape="1">
-          <a:blip xmlns:r="http://schemas.openxmlformats.org/officeDocument/2006/relationships" xmlns:a="http://schemas.openxmlformats.org/drawingml/2006/main" r:embed="R0a45b89a845f4249">
+          <a:blip xmlns:r="http://schemas.openxmlformats.org/officeDocument/2006/relationships" xmlns:a="http://schemas.openxmlformats.org/drawingml/2006/main" r:embed="Raf29a1d138e64022">
             <a:alphaModFix amt="28000"/>
           </a:blip>
           <a:stretch xmlns:a="http://schemas.openxmlformats.org/drawingml/2006/main"/>
@@ -2875,7 +2875,7 @@
           <p:nvPr/>
         </p:nvPicPr>
         <p:blipFill rotWithShape="1">
-          <a:blip xmlns:r="http://schemas.openxmlformats.org/officeDocument/2006/relationships" xmlns:a="http://schemas.openxmlformats.org/drawingml/2006/main" r:embed="R3ddb4276fa9a4bd6">
+          <a:blip xmlns:r="http://schemas.openxmlformats.org/officeDocument/2006/relationships" xmlns:a="http://schemas.openxmlformats.org/drawingml/2006/main" r:embed="Rc3f5e5237fd14e97">
             <a:alphaModFix amt="28000"/>
           </a:blip>
           <a:stretch xmlns:a="http://schemas.openxmlformats.org/drawingml/2006/main"/>
@@ -3016,7 +3016,7 @@
           <p:nvPr/>
         </p:nvPicPr>
         <p:blipFill rotWithShape="1">
-          <a:blip xmlns:r="http://schemas.openxmlformats.org/officeDocument/2006/relationships" xmlns:a="http://schemas.openxmlformats.org/drawingml/2006/main" r:embed="R22bc0901cacc46a9">
+          <a:blip xmlns:r="http://schemas.openxmlformats.org/officeDocument/2006/relationships" xmlns:a="http://schemas.openxmlformats.org/drawingml/2006/main" r:embed="R9934f0679ff4463e">
             <a:alphaModFix amt="28000"/>
           </a:blip>
           <a:stretch xmlns:a="http://schemas.openxmlformats.org/drawingml/2006/main"/>
@@ -3130,7 +3130,7 @@
           <p:nvPr/>
         </p:nvPicPr>
         <p:blipFill rotWithShape="1">
-          <a:blip xmlns:r="http://schemas.openxmlformats.org/officeDocument/2006/relationships" xmlns:a="http://schemas.openxmlformats.org/drawingml/2006/main" r:embed="Rc6d46e867f0c4f7f">
+          <a:blip xmlns:r="http://schemas.openxmlformats.org/officeDocument/2006/relationships" xmlns:a="http://schemas.openxmlformats.org/drawingml/2006/main" r:embed="R233e13aa8946482b">
             <a:alphaModFix amt="28000"/>
           </a:blip>
           <a:stretch xmlns:a="http://schemas.openxmlformats.org/drawingml/2006/main"/>
@@ -3457,7 +3457,7 @@
           <p:nvPr/>
         </p:nvPicPr>
         <p:blipFill rotWithShape="1">
-          <a:blip xmlns:r="http://schemas.openxmlformats.org/officeDocument/2006/relationships" xmlns:a="http://schemas.openxmlformats.org/drawingml/2006/main" r:embed="Rb6c8892268e64023">
+          <a:blip xmlns:r="http://schemas.openxmlformats.org/officeDocument/2006/relationships" xmlns:a="http://schemas.openxmlformats.org/drawingml/2006/main" r:embed="Rd30f110e67ca453b">
             <a:alphaModFix amt="28000"/>
           </a:blip>
           <a:stretch xmlns:a="http://schemas.openxmlformats.org/drawingml/2006/main"/>
@@ -3745,7 +3745,7 @@
           <p:nvPr/>
         </p:nvPicPr>
         <p:blipFill rotWithShape="1">
-          <a:blip xmlns:r="http://schemas.openxmlformats.org/officeDocument/2006/relationships" xmlns:a="http://schemas.openxmlformats.org/drawingml/2006/main" r:embed="Rb7836ad108124bcc">
+          <a:blip xmlns:r="http://schemas.openxmlformats.org/officeDocument/2006/relationships" xmlns:a="http://schemas.openxmlformats.org/drawingml/2006/main" r:embed="Ra2f16971b86843c2">
             <a:alphaModFix amt="28000"/>
           </a:blip>
           <a:stretch xmlns:a="http://schemas.openxmlformats.org/drawingml/2006/main"/>
@@ -3982,17 +3982,17 @@
   </p:cSld>
   <p:clrMap bg1="lt1" tx1="dk1" bg2="lt2" tx2="dk2" accent1="accent1" accent2="accent2" accent3="accent3" accent4="accent4" accent5="accent5" accent6="accent6" hlink="hlink" folHlink="folHlink"/>
   <p:sldLayoutIdLst>
-    <p:sldLayoutId xmlns:r="http://schemas.openxmlformats.org/officeDocument/2006/relationships" id="2147483649" r:id="R94727401eaf24437"/>
-    <p:sldLayoutId xmlns:r="http://schemas.openxmlformats.org/officeDocument/2006/relationships" id="2147483650" r:id="R91c853d820784ef7"/>
-    <p:sldLayoutId xmlns:r="http://schemas.openxmlformats.org/officeDocument/2006/relationships" id="2147483651" r:id="R117e4c9e8e07417f"/>
-    <p:sldLayoutId xmlns:r="http://schemas.openxmlformats.org/officeDocument/2006/relationships" id="2147483652" r:id="Rc4bbb1df15d84624"/>
-    <p:sldLayoutId xmlns:r="http://schemas.openxmlformats.org/officeDocument/2006/relationships" id="2147483653" r:id="Rd3d77b6a32754672"/>
-    <p:sldLayoutId xmlns:r="http://schemas.openxmlformats.org/officeDocument/2006/relationships" id="2147483654" r:id="R1bddce5e9a184d96"/>
-    <p:sldLayoutId xmlns:r="http://schemas.openxmlformats.org/officeDocument/2006/relationships" id="2147483655" r:id="R3fc32416db5947f1"/>
-    <p:sldLayoutId xmlns:r="http://schemas.openxmlformats.org/officeDocument/2006/relationships" id="2147483656" r:id="R36fa2db855814c06"/>
-    <p:sldLayoutId xmlns:r="http://schemas.openxmlformats.org/officeDocument/2006/relationships" id="2147483657" r:id="Rf24f639d04b84e96"/>
-    <p:sldLayoutId xmlns:r="http://schemas.openxmlformats.org/officeDocument/2006/relationships" id="2147483658" r:id="R604d06ce14904c23"/>
-    <p:sldLayoutId xmlns:r="http://schemas.openxmlformats.org/officeDocument/2006/relationships" id="2147483659" r:id="Rfc060c64c0f84ef3"/>
+    <p:sldLayoutId xmlns:r="http://schemas.openxmlformats.org/officeDocument/2006/relationships" id="2147483649" r:id="Raa935f3f02f1408b"/>
+    <p:sldLayoutId xmlns:r="http://schemas.openxmlformats.org/officeDocument/2006/relationships" id="2147483650" r:id="R313ffd8863254e9e"/>
+    <p:sldLayoutId xmlns:r="http://schemas.openxmlformats.org/officeDocument/2006/relationships" id="2147483651" r:id="Rcbe049abfa96459d"/>
+    <p:sldLayoutId xmlns:r="http://schemas.openxmlformats.org/officeDocument/2006/relationships" id="2147483652" r:id="R04c81c6adcc84ca5"/>
+    <p:sldLayoutId xmlns:r="http://schemas.openxmlformats.org/officeDocument/2006/relationships" id="2147483653" r:id="R66ac6fc8933b4ade"/>
+    <p:sldLayoutId xmlns:r="http://schemas.openxmlformats.org/officeDocument/2006/relationships" id="2147483654" r:id="Rbf30dd93484f4115"/>
+    <p:sldLayoutId xmlns:r="http://schemas.openxmlformats.org/officeDocument/2006/relationships" id="2147483655" r:id="R5b3d1f1b9df74e64"/>
+    <p:sldLayoutId xmlns:r="http://schemas.openxmlformats.org/officeDocument/2006/relationships" id="2147483656" r:id="Rd999bd1d49624747"/>
+    <p:sldLayoutId xmlns:r="http://schemas.openxmlformats.org/officeDocument/2006/relationships" id="2147483657" r:id="Rd4b38e84accb492c"/>
+    <p:sldLayoutId xmlns:r="http://schemas.openxmlformats.org/officeDocument/2006/relationships" id="2147483658" r:id="R29d18ac50d404399"/>
+    <p:sldLayoutId xmlns:r="http://schemas.openxmlformats.org/officeDocument/2006/relationships" id="2147483659" r:id="R37fce5ab2c9c464a"/>
   </p:sldLayoutIdLst>
   <p:hf hdr="0" ftr="0" dt="0"/>
   <p:txStyles>

--- a/Mapped Curriculum Lessons/Grade 7/Lesson 20 - Reliable Menus/Reliable Menus - Slides.pptx
+++ b/Mapped Curriculum Lessons/Grade 7/Lesson 20 - Reliable Menus/Reliable Menus - Slides.pptx
@@ -2,28 +2,28 @@
 <file path=ppt/presentation.xml><?xml version="1.0" encoding="utf-8"?>
 <p:presentation xmlns:p="http://schemas.openxmlformats.org/presentationml/2006/main" embedTrueTypeFonts="1" saveSubsetFonts="0">
   <p:sldMasterIdLst>
-    <p:sldMasterId xmlns:r="http://schemas.openxmlformats.org/officeDocument/2006/relationships" id="2147483648" r:id="Rab00ab2bd57f4895"/>
+    <p:sldMasterId xmlns:r="http://schemas.openxmlformats.org/officeDocument/2006/relationships" id="2147483648" r:id="R316f647bf9c04da9"/>
   </p:sldMasterIdLst>
   <p:notesMasterIdLst>
-    <p:notesMasterId xmlns:r="http://schemas.openxmlformats.org/officeDocument/2006/relationships" r:id="R5a5ac0708d824790"/>
+    <p:notesMasterId xmlns:r="http://schemas.openxmlformats.org/officeDocument/2006/relationships" r:id="R63c752bdbabd47bb"/>
   </p:notesMasterIdLst>
   <p:sldIdLst>
-    <p:sldId xmlns:r="http://schemas.openxmlformats.org/officeDocument/2006/relationships" id="256" r:id="Rbae264ff03f847b7"/>
-    <p:sldId xmlns:r="http://schemas.openxmlformats.org/officeDocument/2006/relationships" id="257" r:id="R2d6d7af16d6648a1"/>
-    <p:sldId xmlns:r="http://schemas.openxmlformats.org/officeDocument/2006/relationships" id="258" r:id="R2749a478db2b4d24"/>
-    <p:sldId xmlns:r="http://schemas.openxmlformats.org/officeDocument/2006/relationships" id="259" r:id="R01073a1b4b524c32"/>
-    <p:sldId xmlns:r="http://schemas.openxmlformats.org/officeDocument/2006/relationships" id="260" r:id="Rf0539271633442b6"/>
-    <p:sldId xmlns:r="http://schemas.openxmlformats.org/officeDocument/2006/relationships" id="261" r:id="R687a708551704404"/>
-    <p:sldId xmlns:r="http://schemas.openxmlformats.org/officeDocument/2006/relationships" id="262" r:id="R9d1ce8dadde84e54"/>
-    <p:sldId xmlns:r="http://schemas.openxmlformats.org/officeDocument/2006/relationships" id="263" r:id="R63ed6adf9c8b403d"/>
-    <p:sldId xmlns:r="http://schemas.openxmlformats.org/officeDocument/2006/relationships" id="264" r:id="Rd7abf0a298264790"/>
+    <p:sldId xmlns:r="http://schemas.openxmlformats.org/officeDocument/2006/relationships" id="256" r:id="R29ab6296ea494f17"/>
+    <p:sldId xmlns:r="http://schemas.openxmlformats.org/officeDocument/2006/relationships" id="257" r:id="Rdb13e298983540c9"/>
+    <p:sldId xmlns:r="http://schemas.openxmlformats.org/officeDocument/2006/relationships" id="258" r:id="Ree74bf90b3b54243"/>
+    <p:sldId xmlns:r="http://schemas.openxmlformats.org/officeDocument/2006/relationships" id="259" r:id="Re2bb56e8618c433c"/>
+    <p:sldId xmlns:r="http://schemas.openxmlformats.org/officeDocument/2006/relationships" id="260" r:id="Re45b0801d2ac4945"/>
+    <p:sldId xmlns:r="http://schemas.openxmlformats.org/officeDocument/2006/relationships" id="261" r:id="Rf8c4851529274f2d"/>
+    <p:sldId xmlns:r="http://schemas.openxmlformats.org/officeDocument/2006/relationships" id="262" r:id="R600c45a9ab044196"/>
+    <p:sldId xmlns:r="http://schemas.openxmlformats.org/officeDocument/2006/relationships" id="263" r:id="R9d3d4d1177b04b9d"/>
+    <p:sldId xmlns:r="http://schemas.openxmlformats.org/officeDocument/2006/relationships" id="264" r:id="R11488cd724bb4c64"/>
   </p:sldIdLst>
   <p:sldSz cx="12192000" cy="6858000"/>
   <p:notesSz cx="6858000" cy="9144000"/>
   <p:embeddedFontLst>
     <p:embeddedFont>
       <p:font typeface="JetBrains Mono"/>
-      <p:regular xmlns:r="http://schemas.openxmlformats.org/officeDocument/2006/relationships" r:id="R4eba46d8c7ad4cc5"/>
+      <p:regular xmlns:r="http://schemas.openxmlformats.org/officeDocument/2006/relationships" r:id="Ref5496ecd4ca451d"/>
     </p:embeddedFont>
   </p:embeddedFontLst>
 </p:presentation>
@@ -1071,7 +1071,7 @@
           <p:nvPr/>
         </p:nvPicPr>
         <p:blipFill rotWithShape="1">
-          <a:blip xmlns:r="http://schemas.openxmlformats.org/officeDocument/2006/relationships" xmlns:a="http://schemas.openxmlformats.org/drawingml/2006/main" r:embed="Rc40ae22a2b034fe1"/>
+          <a:blip xmlns:r="http://schemas.openxmlformats.org/officeDocument/2006/relationships" xmlns:a="http://schemas.openxmlformats.org/drawingml/2006/main" r:embed="Re5a32a87db84420e"/>
           <a:stretch xmlns:a="http://schemas.openxmlformats.org/drawingml/2006/main"/>
         </p:blipFill>
         <p:spPr>
@@ -1451,7 +1451,7 @@
           <p:nvPr/>
         </p:nvPicPr>
         <p:blipFill rotWithShape="1">
-          <a:blip xmlns:r="http://schemas.openxmlformats.org/officeDocument/2006/relationships" xmlns:a="http://schemas.openxmlformats.org/drawingml/2006/main" r:embed="Rb0f0aaf87b7f4dd5">
+          <a:blip xmlns:r="http://schemas.openxmlformats.org/officeDocument/2006/relationships" xmlns:a="http://schemas.openxmlformats.org/drawingml/2006/main" r:embed="Re6a1868e6e5740b8">
             <a:alphaModFix amt="28000"/>
           </a:blip>
           <a:stretch xmlns:a="http://schemas.openxmlformats.org/drawingml/2006/main"/>
@@ -1664,7 +1664,7 @@
           <p:nvPr/>
         </p:nvPicPr>
         <p:blipFill rotWithShape="1">
-          <a:blip xmlns:r="http://schemas.openxmlformats.org/officeDocument/2006/relationships" xmlns:a="http://schemas.openxmlformats.org/drawingml/2006/main" r:embed="Rd9fbf4d8152d451d">
+          <a:blip xmlns:r="http://schemas.openxmlformats.org/officeDocument/2006/relationships" xmlns:a="http://schemas.openxmlformats.org/drawingml/2006/main" r:embed="R46ad9e4604fc4b06">
             <a:alphaModFix amt="28000"/>
           </a:blip>
           <a:stretch xmlns:a="http://schemas.openxmlformats.org/drawingml/2006/main"/>
@@ -1899,7 +1899,7 @@
           <p:nvPr/>
         </p:nvPicPr>
         <p:blipFill rotWithShape="1">
-          <a:blip xmlns:r="http://schemas.openxmlformats.org/officeDocument/2006/relationships" xmlns:a="http://schemas.openxmlformats.org/drawingml/2006/main" r:embed="Rf39de68a3bf24f7b">
+          <a:blip xmlns:r="http://schemas.openxmlformats.org/officeDocument/2006/relationships" xmlns:a="http://schemas.openxmlformats.org/drawingml/2006/main" r:embed="R447937278346431b">
             <a:alphaModFix amt="28000"/>
           </a:blip>
           <a:stretch xmlns:a="http://schemas.openxmlformats.org/drawingml/2006/main"/>
@@ -2176,7 +2176,7 @@
           <p:nvPr/>
         </p:nvPicPr>
         <p:blipFill rotWithShape="1">
-          <a:blip xmlns:r="http://schemas.openxmlformats.org/officeDocument/2006/relationships" xmlns:a="http://schemas.openxmlformats.org/drawingml/2006/main" r:embed="Re0f05cbe3aa847af">
+          <a:blip xmlns:r="http://schemas.openxmlformats.org/officeDocument/2006/relationships" xmlns:a="http://schemas.openxmlformats.org/drawingml/2006/main" r:embed="Rd5b9fc79e3ba4ec8">
             <a:alphaModFix amt="28000"/>
           </a:blip>
           <a:stretch xmlns:a="http://schemas.openxmlformats.org/drawingml/2006/main"/>
@@ -2451,7 +2451,7 @@
           <p:nvPr/>
         </p:nvPicPr>
         <p:blipFill rotWithShape="1">
-          <a:blip xmlns:r="http://schemas.openxmlformats.org/officeDocument/2006/relationships" xmlns:a="http://schemas.openxmlformats.org/drawingml/2006/main" r:embed="Raf29a1d138e64022">
+          <a:blip xmlns:r="http://schemas.openxmlformats.org/officeDocument/2006/relationships" xmlns:a="http://schemas.openxmlformats.org/drawingml/2006/main" r:embed="R74a30619dab34fe8">
             <a:alphaModFix amt="28000"/>
           </a:blip>
           <a:stretch xmlns:a="http://schemas.openxmlformats.org/drawingml/2006/main"/>
@@ -2875,7 +2875,7 @@
           <p:nvPr/>
         </p:nvPicPr>
         <p:blipFill rotWithShape="1">
-          <a:blip xmlns:r="http://schemas.openxmlformats.org/officeDocument/2006/relationships" xmlns:a="http://schemas.openxmlformats.org/drawingml/2006/main" r:embed="Rc3f5e5237fd14e97">
+          <a:blip xmlns:r="http://schemas.openxmlformats.org/officeDocument/2006/relationships" xmlns:a="http://schemas.openxmlformats.org/drawingml/2006/main" r:embed="R3c3c9cdded2f400e">
             <a:alphaModFix amt="28000"/>
           </a:blip>
           <a:stretch xmlns:a="http://schemas.openxmlformats.org/drawingml/2006/main"/>
@@ -3016,7 +3016,7 @@
           <p:nvPr/>
         </p:nvPicPr>
         <p:blipFill rotWithShape="1">
-          <a:blip xmlns:r="http://schemas.openxmlformats.org/officeDocument/2006/relationships" xmlns:a="http://schemas.openxmlformats.org/drawingml/2006/main" r:embed="R9934f0679ff4463e">
+          <a:blip xmlns:r="http://schemas.openxmlformats.org/officeDocument/2006/relationships" xmlns:a="http://schemas.openxmlformats.org/drawingml/2006/main" r:embed="Rb256d009950b4a6a">
             <a:alphaModFix amt="28000"/>
           </a:blip>
           <a:stretch xmlns:a="http://schemas.openxmlformats.org/drawingml/2006/main"/>
@@ -3130,7 +3130,7 @@
           <p:nvPr/>
         </p:nvPicPr>
         <p:blipFill rotWithShape="1">
-          <a:blip xmlns:r="http://schemas.openxmlformats.org/officeDocument/2006/relationships" xmlns:a="http://schemas.openxmlformats.org/drawingml/2006/main" r:embed="R233e13aa8946482b">
+          <a:blip xmlns:r="http://schemas.openxmlformats.org/officeDocument/2006/relationships" xmlns:a="http://schemas.openxmlformats.org/drawingml/2006/main" r:embed="R12c20193e7274fa0">
             <a:alphaModFix amt="28000"/>
           </a:blip>
           <a:stretch xmlns:a="http://schemas.openxmlformats.org/drawingml/2006/main"/>
@@ -3457,7 +3457,7 @@
           <p:nvPr/>
         </p:nvPicPr>
         <p:blipFill rotWithShape="1">
-          <a:blip xmlns:r="http://schemas.openxmlformats.org/officeDocument/2006/relationships" xmlns:a="http://schemas.openxmlformats.org/drawingml/2006/main" r:embed="Rd30f110e67ca453b">
+          <a:blip xmlns:r="http://schemas.openxmlformats.org/officeDocument/2006/relationships" xmlns:a="http://schemas.openxmlformats.org/drawingml/2006/main" r:embed="R4f440feba34647f4">
             <a:alphaModFix amt="28000"/>
           </a:blip>
           <a:stretch xmlns:a="http://schemas.openxmlformats.org/drawingml/2006/main"/>
@@ -3745,7 +3745,7 @@
           <p:nvPr/>
         </p:nvPicPr>
         <p:blipFill rotWithShape="1">
-          <a:blip xmlns:r="http://schemas.openxmlformats.org/officeDocument/2006/relationships" xmlns:a="http://schemas.openxmlformats.org/drawingml/2006/main" r:embed="Ra2f16971b86843c2">
+          <a:blip xmlns:r="http://schemas.openxmlformats.org/officeDocument/2006/relationships" xmlns:a="http://schemas.openxmlformats.org/drawingml/2006/main" r:embed="R7a96d59a1cf14af0">
             <a:alphaModFix amt="28000"/>
           </a:blip>
           <a:stretch xmlns:a="http://schemas.openxmlformats.org/drawingml/2006/main"/>
@@ -3982,17 +3982,17 @@
   </p:cSld>
   <p:clrMap bg1="lt1" tx1="dk1" bg2="lt2" tx2="dk2" accent1="accent1" accent2="accent2" accent3="accent3" accent4="accent4" accent5="accent5" accent6="accent6" hlink="hlink" folHlink="folHlink"/>
   <p:sldLayoutIdLst>
-    <p:sldLayoutId xmlns:r="http://schemas.openxmlformats.org/officeDocument/2006/relationships" id="2147483649" r:id="Raa935f3f02f1408b"/>
-    <p:sldLayoutId xmlns:r="http://schemas.openxmlformats.org/officeDocument/2006/relationships" id="2147483650" r:id="R313ffd8863254e9e"/>
-    <p:sldLayoutId xmlns:r="http://schemas.openxmlformats.org/officeDocument/2006/relationships" id="2147483651" r:id="Rcbe049abfa96459d"/>
-    <p:sldLayoutId xmlns:r="http://schemas.openxmlformats.org/officeDocument/2006/relationships" id="2147483652" r:id="R04c81c6adcc84ca5"/>
-    <p:sldLayoutId xmlns:r="http://schemas.openxmlformats.org/officeDocument/2006/relationships" id="2147483653" r:id="R66ac6fc8933b4ade"/>
-    <p:sldLayoutId xmlns:r="http://schemas.openxmlformats.org/officeDocument/2006/relationships" id="2147483654" r:id="Rbf30dd93484f4115"/>
-    <p:sldLayoutId xmlns:r="http://schemas.openxmlformats.org/officeDocument/2006/relationships" id="2147483655" r:id="R5b3d1f1b9df74e64"/>
-    <p:sldLayoutId xmlns:r="http://schemas.openxmlformats.org/officeDocument/2006/relationships" id="2147483656" r:id="Rd999bd1d49624747"/>
-    <p:sldLayoutId xmlns:r="http://schemas.openxmlformats.org/officeDocument/2006/relationships" id="2147483657" r:id="Rd4b38e84accb492c"/>
-    <p:sldLayoutId xmlns:r="http://schemas.openxmlformats.org/officeDocument/2006/relationships" id="2147483658" r:id="R29d18ac50d404399"/>
-    <p:sldLayoutId xmlns:r="http://schemas.openxmlformats.org/officeDocument/2006/relationships" id="2147483659" r:id="R37fce5ab2c9c464a"/>
+    <p:sldLayoutId xmlns:r="http://schemas.openxmlformats.org/officeDocument/2006/relationships" id="2147483649" r:id="Rdc97edd23aab412d"/>
+    <p:sldLayoutId xmlns:r="http://schemas.openxmlformats.org/officeDocument/2006/relationships" id="2147483650" r:id="R7f69560468a64478"/>
+    <p:sldLayoutId xmlns:r="http://schemas.openxmlformats.org/officeDocument/2006/relationships" id="2147483651" r:id="R266bb804278c4ccf"/>
+    <p:sldLayoutId xmlns:r="http://schemas.openxmlformats.org/officeDocument/2006/relationships" id="2147483652" r:id="R7201edc889644204"/>
+    <p:sldLayoutId xmlns:r="http://schemas.openxmlformats.org/officeDocument/2006/relationships" id="2147483653" r:id="R1c74a789f2124c20"/>
+    <p:sldLayoutId xmlns:r="http://schemas.openxmlformats.org/officeDocument/2006/relationships" id="2147483654" r:id="R3e78c262e3e14ad3"/>
+    <p:sldLayoutId xmlns:r="http://schemas.openxmlformats.org/officeDocument/2006/relationships" id="2147483655" r:id="Rb2fcef501898473c"/>
+    <p:sldLayoutId xmlns:r="http://schemas.openxmlformats.org/officeDocument/2006/relationships" id="2147483656" r:id="R2b8f54dd16a149af"/>
+    <p:sldLayoutId xmlns:r="http://schemas.openxmlformats.org/officeDocument/2006/relationships" id="2147483657" r:id="R977288e829964da1"/>
+    <p:sldLayoutId xmlns:r="http://schemas.openxmlformats.org/officeDocument/2006/relationships" id="2147483658" r:id="R878980e788cc45d6"/>
+    <p:sldLayoutId xmlns:r="http://schemas.openxmlformats.org/officeDocument/2006/relationships" id="2147483659" r:id="R2403ad7be7a14dba"/>
   </p:sldLayoutIdLst>
   <p:hf hdr="0" ftr="0" dt="0"/>
   <p:txStyles>
@@ -4961,24 +4961,13 @@
             <a:r>
               <a:rPr sz="2400">
                 <a:solidFill>
-                  <a:srgbClr val="080808"/>
-                </a:solidFill>
-                <a:latin typeface="JetBrains Mono"/>
-                <a:ea typeface="JetBrains Mono"/>
-                <a:cs typeface="JetBrains Mono"/>
-              </a:rPr>
-              <a:t> </a:t>
-            </a:r>
-            <a:r>
-              <a:rPr sz="2400">
-                <a:solidFill>
                   <a:srgbClr val="C45E00"/>
                 </a:solidFill>
                 <a:latin typeface="JetBrains Mono"/>
                 <a:ea typeface="JetBrains Mono"/>
                 <a:cs typeface="JetBrains Mono"/>
               </a:rPr>
-              <a:t>True</a:t>
+              <a:t> True</a:t>
             </a:r>
             <a:r>
               <a:rPr sz="2400">
@@ -5084,24 +5073,13 @@
             <a:r>
               <a:rPr sz="2400">
                 <a:solidFill>
-                  <a:srgbClr val="080808"/>
-                </a:solidFill>
-                <a:latin typeface="JetBrains Mono"/>
-                <a:ea typeface="JetBrains Mono"/>
-                <a:cs typeface="JetBrains Mono"/>
-              </a:rPr>
-              <a:t>    </a:t>
-            </a:r>
-            <a:r>
-              <a:rPr sz="2400">
-                <a:solidFill>
                   <a:srgbClr val="C45E00"/>
                 </a:solidFill>
                 <a:latin typeface="JetBrains Mono"/>
                 <a:ea typeface="JetBrains Mono"/>
                 <a:cs typeface="JetBrains Mono"/>
               </a:rPr>
-              <a:t>if</a:t>
+              <a:t>    if</a:t>
             </a:r>
             <a:r>
               <a:rPr sz="2400">
@@ -5128,24 +5106,13 @@
             <a:r>
               <a:rPr sz="2400">
                 <a:solidFill>
-                  <a:srgbClr val="080808"/>
-                </a:solidFill>
-                <a:latin typeface="JetBrains Mono"/>
-                <a:ea typeface="JetBrains Mono"/>
-                <a:cs typeface="JetBrains Mono"/>
-              </a:rPr>
-              <a:t> </a:t>
-            </a:r>
-            <a:r>
-              <a:rPr sz="2400">
-                <a:solidFill>
                   <a:srgbClr val="067D17"/>
                 </a:solidFill>
                 <a:latin typeface="JetBrains Mono"/>
                 <a:ea typeface="JetBrains Mono"/>
                 <a:cs typeface="JetBrains Mono"/>
               </a:rPr>
-              <a:t>"1"</a:t>
+              <a:t> "1"</a:t>
             </a:r>
             <a:r>
               <a:rPr sz="2400">
@@ -5169,24 +5136,13 @@
             <a:r>
               <a:rPr sz="2400">
                 <a:solidFill>
-                  <a:srgbClr val="080808"/>
-                </a:solidFill>
-                <a:latin typeface="JetBrains Mono"/>
-                <a:ea typeface="JetBrains Mono"/>
-                <a:cs typeface="JetBrains Mono"/>
-              </a:rPr>
-              <a:t>        </a:t>
-            </a:r>
-            <a:r>
-              <a:rPr sz="2400">
-                <a:solidFill>
                   <a:srgbClr val="1750EB"/>
                 </a:solidFill>
                 <a:latin typeface="JetBrains Mono"/>
                 <a:ea typeface="JetBrains Mono"/>
                 <a:cs typeface="JetBrains Mono"/>
               </a:rPr>
-              <a:t>print</a:t>
+              <a:t>        print</a:t>
             </a:r>
             <a:r>
               <a:rPr sz="2400">
@@ -5232,24 +5188,13 @@
             <a:r>
               <a:rPr sz="2400">
                 <a:solidFill>
-                  <a:srgbClr val="080808"/>
-                </a:solidFill>
-                <a:latin typeface="JetBrains Mono"/>
-                <a:ea typeface="JetBrains Mono"/>
-                <a:cs typeface="JetBrains Mono"/>
-              </a:rPr>
-              <a:t>    </a:t>
-            </a:r>
-            <a:r>
-              <a:rPr sz="2400">
-                <a:solidFill>
                   <a:srgbClr val="C45E00"/>
                 </a:solidFill>
                 <a:latin typeface="JetBrains Mono"/>
                 <a:ea typeface="JetBrains Mono"/>
                 <a:cs typeface="JetBrains Mono"/>
               </a:rPr>
-              <a:t>elif</a:t>
+              <a:t>    elif</a:t>
             </a:r>
             <a:r>
               <a:rPr sz="2400">
@@ -5276,24 +5221,13 @@
             <a:r>
               <a:rPr sz="2400">
                 <a:solidFill>
-                  <a:srgbClr val="080808"/>
-                </a:solidFill>
-                <a:latin typeface="JetBrains Mono"/>
-                <a:ea typeface="JetBrains Mono"/>
-                <a:cs typeface="JetBrains Mono"/>
-              </a:rPr>
-              <a:t> </a:t>
-            </a:r>
-            <a:r>
-              <a:rPr sz="2400">
-                <a:solidFill>
                   <a:srgbClr val="067D17"/>
                 </a:solidFill>
                 <a:latin typeface="JetBrains Mono"/>
                 <a:ea typeface="JetBrains Mono"/>
                 <a:cs typeface="JetBrains Mono"/>
               </a:rPr>
-              <a:t>"2"</a:t>
+              <a:t> "2"</a:t>
             </a:r>
             <a:r>
               <a:rPr sz="2400">
@@ -5347,24 +5281,13 @@
             <a:r>
               <a:rPr sz="2400">
                 <a:solidFill>
-                  <a:srgbClr val="080808"/>
-                </a:solidFill>
-                <a:latin typeface="JetBrains Mono"/>
-                <a:ea typeface="JetBrains Mono"/>
-                <a:cs typeface="JetBrains Mono"/>
-              </a:rPr>
-              <a:t>    </a:t>
-            </a:r>
-            <a:r>
-              <a:rPr sz="2400">
-                <a:solidFill>
                   <a:srgbClr val="C45E00"/>
                 </a:solidFill>
                 <a:latin typeface="JetBrains Mono"/>
                 <a:ea typeface="JetBrains Mono"/>
                 <a:cs typeface="JetBrains Mono"/>
               </a:rPr>
-              <a:t>else</a:t>
+              <a:t>    else</a:t>
             </a:r>
             <a:r>
               <a:rPr sz="2400">
@@ -5388,24 +5311,13 @@
             <a:r>
               <a:rPr sz="2400">
                 <a:solidFill>
-                  <a:srgbClr val="080808"/>
-                </a:solidFill>
-                <a:latin typeface="JetBrains Mono"/>
-                <a:ea typeface="JetBrains Mono"/>
-                <a:cs typeface="JetBrains Mono"/>
-              </a:rPr>
-              <a:t>        </a:t>
-            </a:r>
-            <a:r>
-              <a:rPr sz="2400">
-                <a:solidFill>
                   <a:srgbClr val="1750EB"/>
                 </a:solidFill>
                 <a:latin typeface="JetBrains Mono"/>
                 <a:ea typeface="JetBrains Mono"/>
                 <a:cs typeface="JetBrains Mono"/>
               </a:rPr>
-              <a:t>print</a:t>
+              <a:t>        print</a:t>
             </a:r>
             <a:r>
               <a:rPr sz="2400">
@@ -5843,24 +5755,13 @@
             <a:r>
               <a:rPr sz="2400">
                 <a:solidFill>
-                  <a:srgbClr val="080808"/>
-                </a:solidFill>
-                <a:latin typeface="JetBrains Mono"/>
-                <a:ea typeface="JetBrains Mono"/>
-                <a:cs typeface="JetBrains Mono"/>
-              </a:rPr>
-              <a:t> </a:t>
-            </a:r>
-            <a:r>
-              <a:rPr sz="2400">
-                <a:solidFill>
                   <a:srgbClr val="C45E00"/>
                 </a:solidFill>
                 <a:latin typeface="JetBrains Mono"/>
                 <a:ea typeface="JetBrains Mono"/>
                 <a:cs typeface="JetBrains Mono"/>
               </a:rPr>
-              <a:t>True</a:t>
+              <a:t> True</a:t>
             </a:r>
             <a:r>
               <a:rPr sz="2400">
@@ -5966,24 +5867,13 @@
             <a:r>
               <a:rPr sz="2400">
                 <a:solidFill>
-                  <a:srgbClr val="080808"/>
-                </a:solidFill>
-                <a:latin typeface="JetBrains Mono"/>
-                <a:ea typeface="JetBrains Mono"/>
-                <a:cs typeface="JetBrains Mono"/>
-              </a:rPr>
-              <a:t>    </a:t>
-            </a:r>
-            <a:r>
-              <a:rPr sz="2400">
-                <a:solidFill>
                   <a:srgbClr val="C45E00"/>
                 </a:solidFill>
                 <a:latin typeface="JetBrains Mono"/>
                 <a:ea typeface="JetBrains Mono"/>
                 <a:cs typeface="JetBrains Mono"/>
               </a:rPr>
-              <a:t>if</a:t>
+              <a:t>    if</a:t>
             </a:r>
             <a:r>
               <a:rPr sz="2400">
@@ -6010,24 +5900,13 @@
             <a:r>
               <a:rPr sz="2400">
                 <a:solidFill>
-                  <a:srgbClr val="080808"/>
-                </a:solidFill>
-                <a:latin typeface="JetBrains Mono"/>
-                <a:ea typeface="JetBrains Mono"/>
-                <a:cs typeface="JetBrains Mono"/>
-              </a:rPr>
-              <a:t> </a:t>
-            </a:r>
-            <a:r>
-              <a:rPr sz="2400">
-                <a:solidFill>
                   <a:srgbClr val="067D17"/>
                 </a:solidFill>
                 <a:latin typeface="JetBrains Mono"/>
                 <a:ea typeface="JetBrains Mono"/>
                 <a:cs typeface="JetBrains Mono"/>
               </a:rPr>
-              <a:t>"1"</a:t>
+              <a:t> "1"</a:t>
             </a:r>
             <a:r>
               <a:rPr sz="2400">
@@ -6051,24 +5930,13 @@
             <a:r>
               <a:rPr sz="2400">
                 <a:solidFill>
-                  <a:srgbClr val="080808"/>
-                </a:solidFill>
-                <a:latin typeface="JetBrains Mono"/>
-                <a:ea typeface="JetBrains Mono"/>
-                <a:cs typeface="JetBrains Mono"/>
-              </a:rPr>
-              <a:t>        </a:t>
-            </a:r>
-            <a:r>
-              <a:rPr sz="2400">
-                <a:solidFill>
                   <a:srgbClr val="1750EB"/>
                 </a:solidFill>
                 <a:latin typeface="JetBrains Mono"/>
                 <a:ea typeface="JetBrains Mono"/>
                 <a:cs typeface="JetBrains Mono"/>
               </a:rPr>
-              <a:t>print</a:t>
+              <a:t>        print</a:t>
             </a:r>
             <a:r>
               <a:rPr sz="2400">
@@ -6114,24 +5982,13 @@
             <a:r>
               <a:rPr sz="2400">
                 <a:solidFill>
-                  <a:srgbClr val="080808"/>
-                </a:solidFill>
-                <a:latin typeface="JetBrains Mono"/>
-                <a:ea typeface="JetBrains Mono"/>
-                <a:cs typeface="JetBrains Mono"/>
-              </a:rPr>
-              <a:t>    </a:t>
-            </a:r>
-            <a:r>
-              <a:rPr sz="2400">
-                <a:solidFill>
                   <a:srgbClr val="C45E00"/>
                 </a:solidFill>
                 <a:latin typeface="JetBrains Mono"/>
                 <a:ea typeface="JetBrains Mono"/>
                 <a:cs typeface="JetBrains Mono"/>
               </a:rPr>
-              <a:t>elif</a:t>
+              <a:t>    elif</a:t>
             </a:r>
             <a:r>
               <a:rPr sz="2400">
@@ -6158,24 +6015,13 @@
             <a:r>
               <a:rPr sz="2400">
                 <a:solidFill>
-                  <a:srgbClr val="080808"/>
-                </a:solidFill>
-                <a:latin typeface="JetBrains Mono"/>
-                <a:ea typeface="JetBrains Mono"/>
-                <a:cs typeface="JetBrains Mono"/>
-              </a:rPr>
-              <a:t> </a:t>
-            </a:r>
-            <a:r>
-              <a:rPr sz="2400">
-                <a:solidFill>
                   <a:srgbClr val="067D17"/>
                 </a:solidFill>
                 <a:latin typeface="JetBrains Mono"/>
                 <a:ea typeface="JetBrains Mono"/>
                 <a:cs typeface="JetBrains Mono"/>
               </a:rPr>
-              <a:t>"2"</a:t>
+              <a:t> "2"</a:t>
             </a:r>
             <a:r>
               <a:rPr sz="2400">
@@ -6229,24 +6075,13 @@
             <a:r>
               <a:rPr sz="2400">
                 <a:solidFill>
-                  <a:srgbClr val="080808"/>
-                </a:solidFill>
-                <a:latin typeface="JetBrains Mono"/>
-                <a:ea typeface="JetBrains Mono"/>
-                <a:cs typeface="JetBrains Mono"/>
-              </a:rPr>
-              <a:t>    </a:t>
-            </a:r>
-            <a:r>
-              <a:rPr sz="2400">
-                <a:solidFill>
                   <a:srgbClr val="C45E00"/>
                 </a:solidFill>
                 <a:latin typeface="JetBrains Mono"/>
                 <a:ea typeface="JetBrains Mono"/>
                 <a:cs typeface="JetBrains Mono"/>
               </a:rPr>
-              <a:t>else</a:t>
+              <a:t>    else</a:t>
             </a:r>
             <a:r>
               <a:rPr sz="2400">
@@ -6270,24 +6105,13 @@
             <a:r>
               <a:rPr sz="2400">
                 <a:solidFill>
-                  <a:srgbClr val="080808"/>
-                </a:solidFill>
-                <a:latin typeface="JetBrains Mono"/>
-                <a:ea typeface="JetBrains Mono"/>
-                <a:cs typeface="JetBrains Mono"/>
-              </a:rPr>
-              <a:t>        </a:t>
-            </a:r>
-            <a:r>
-              <a:rPr sz="2400">
-                <a:solidFill>
                   <a:srgbClr val="1750EB"/>
                 </a:solidFill>
                 <a:latin typeface="JetBrains Mono"/>
                 <a:ea typeface="JetBrains Mono"/>
                 <a:cs typeface="JetBrains Mono"/>
               </a:rPr>
-              <a:t>print</a:t>
+              <a:t>        print</a:t>
             </a:r>
             <a:r>
               <a:rPr sz="2400">
@@ -6725,24 +6549,13 @@
             <a:r>
               <a:rPr sz="2400">
                 <a:solidFill>
-                  <a:srgbClr val="080808"/>
-                </a:solidFill>
-                <a:latin typeface="JetBrains Mono"/>
-                <a:ea typeface="JetBrains Mono"/>
-                <a:cs typeface="JetBrains Mono"/>
-              </a:rPr>
-              <a:t> </a:t>
-            </a:r>
-            <a:r>
-              <a:rPr sz="2400">
-                <a:solidFill>
                   <a:srgbClr val="C45E00"/>
                 </a:solidFill>
                 <a:latin typeface="JetBrains Mono"/>
                 <a:ea typeface="JetBrains Mono"/>
                 <a:cs typeface="JetBrains Mono"/>
               </a:rPr>
-              <a:t>True</a:t>
+              <a:t> True</a:t>
             </a:r>
             <a:r>
               <a:rPr sz="2400">
@@ -6848,24 +6661,13 @@
             <a:r>
               <a:rPr sz="2400">
                 <a:solidFill>
-                  <a:srgbClr val="080808"/>
-                </a:solidFill>
-                <a:latin typeface="JetBrains Mono"/>
-                <a:ea typeface="JetBrains Mono"/>
-                <a:cs typeface="JetBrains Mono"/>
-              </a:rPr>
-              <a:t>    </a:t>
-            </a:r>
-            <a:r>
-              <a:rPr sz="2400">
-                <a:solidFill>
                   <a:srgbClr val="C45E00"/>
                 </a:solidFill>
                 <a:latin typeface="JetBrains Mono"/>
                 <a:ea typeface="JetBrains Mono"/>
                 <a:cs typeface="JetBrains Mono"/>
               </a:rPr>
-              <a:t>if</a:t>
+              <a:t>    if</a:t>
             </a:r>
             <a:r>
               <a:rPr sz="2400">
@@ -6892,24 +6694,13 @@
             <a:r>
               <a:rPr sz="2400">
                 <a:solidFill>
-                  <a:srgbClr val="080808"/>
-                </a:solidFill>
-                <a:latin typeface="JetBrains Mono"/>
-                <a:ea typeface="JetBrains Mono"/>
-                <a:cs typeface="JetBrains Mono"/>
-              </a:rPr>
-              <a:t> </a:t>
-            </a:r>
-            <a:r>
-              <a:rPr sz="2400">
-                <a:solidFill>
                   <a:srgbClr val="067D17"/>
                 </a:solidFill>
                 <a:latin typeface="JetBrains Mono"/>
                 <a:ea typeface="JetBrains Mono"/>
                 <a:cs typeface="JetBrains Mono"/>
               </a:rPr>
-              <a:t>"1"</a:t>
+              <a:t> "1"</a:t>
             </a:r>
             <a:r>
               <a:rPr sz="2400">
@@ -6933,24 +6724,13 @@
             <a:r>
               <a:rPr sz="2400">
                 <a:solidFill>
-                  <a:srgbClr val="080808"/>
-                </a:solidFill>
-                <a:latin typeface="JetBrains Mono"/>
-                <a:ea typeface="JetBrains Mono"/>
-                <a:cs typeface="JetBrains Mono"/>
-              </a:rPr>
-              <a:t>        </a:t>
-            </a:r>
-            <a:r>
-              <a:rPr sz="2400">
-                <a:solidFill>
                   <a:srgbClr val="1750EB"/>
                 </a:solidFill>
                 <a:latin typeface="JetBrains Mono"/>
                 <a:ea typeface="JetBrains Mono"/>
                 <a:cs typeface="JetBrains Mono"/>
               </a:rPr>
-              <a:t>print</a:t>
+              <a:t>        print</a:t>
             </a:r>
             <a:r>
               <a:rPr sz="2400">
@@ -6996,24 +6776,13 @@
             <a:r>
               <a:rPr sz="2400">
                 <a:solidFill>
-                  <a:srgbClr val="080808"/>
-                </a:solidFill>
-                <a:latin typeface="JetBrains Mono"/>
-                <a:ea typeface="JetBrains Mono"/>
-                <a:cs typeface="JetBrains Mono"/>
-              </a:rPr>
-              <a:t>    </a:t>
-            </a:r>
-            <a:r>
-              <a:rPr sz="2400">
-                <a:solidFill>
                   <a:srgbClr val="C45E00"/>
                 </a:solidFill>
                 <a:latin typeface="JetBrains Mono"/>
                 <a:ea typeface="JetBrains Mono"/>
                 <a:cs typeface="JetBrains Mono"/>
               </a:rPr>
-              <a:t>elif</a:t>
+              <a:t>    elif</a:t>
             </a:r>
             <a:r>
               <a:rPr sz="2400">
@@ -7040,24 +6809,13 @@
             <a:r>
               <a:rPr sz="2400">
                 <a:solidFill>
-                  <a:srgbClr val="080808"/>
-                </a:solidFill>
-                <a:latin typeface="JetBrains Mono"/>
-                <a:ea typeface="JetBrains Mono"/>
-                <a:cs typeface="JetBrains Mono"/>
-              </a:rPr>
-              <a:t> </a:t>
-            </a:r>
-            <a:r>
-              <a:rPr sz="2400">
-                <a:solidFill>
                   <a:srgbClr val="067D17"/>
                 </a:solidFill>
                 <a:latin typeface="JetBrains Mono"/>
                 <a:ea typeface="JetBrains Mono"/>
                 <a:cs typeface="JetBrains Mono"/>
               </a:rPr>
-              <a:t>"2"</a:t>
+              <a:t> "2"</a:t>
             </a:r>
             <a:r>
               <a:rPr sz="2400">
@@ -7111,24 +6869,13 @@
             <a:r>
               <a:rPr sz="2400">
                 <a:solidFill>
-                  <a:srgbClr val="080808"/>
-                </a:solidFill>
-                <a:latin typeface="JetBrains Mono"/>
-                <a:ea typeface="JetBrains Mono"/>
-                <a:cs typeface="JetBrains Mono"/>
-              </a:rPr>
-              <a:t>    </a:t>
-            </a:r>
-            <a:r>
-              <a:rPr sz="2400">
-                <a:solidFill>
                   <a:srgbClr val="C45E00"/>
                 </a:solidFill>
                 <a:latin typeface="JetBrains Mono"/>
                 <a:ea typeface="JetBrains Mono"/>
                 <a:cs typeface="JetBrains Mono"/>
               </a:rPr>
-              <a:t>else</a:t>
+              <a:t>    else</a:t>
             </a:r>
             <a:r>
               <a:rPr sz="2400">
@@ -7152,24 +6899,13 @@
             <a:r>
               <a:rPr sz="2400">
                 <a:solidFill>
-                  <a:srgbClr val="080808"/>
-                </a:solidFill>
-                <a:latin typeface="JetBrains Mono"/>
-                <a:ea typeface="JetBrains Mono"/>
-                <a:cs typeface="JetBrains Mono"/>
-              </a:rPr>
-              <a:t>        </a:t>
-            </a:r>
-            <a:r>
-              <a:rPr sz="2400">
-                <a:solidFill>
                   <a:srgbClr val="1750EB"/>
                 </a:solidFill>
                 <a:latin typeface="JetBrains Mono"/>
                 <a:ea typeface="JetBrains Mono"/>
                 <a:cs typeface="JetBrains Mono"/>
               </a:rPr>
-              <a:t>print</a:t>
+              <a:t>        print</a:t>
             </a:r>
             <a:r>
               <a:rPr sz="2400">
@@ -7848,24 +7584,13 @@
             <a:r>
               <a:rPr sz="1100">
                 <a:solidFill>
-                  <a:srgbClr val="080808"/>
-                </a:solidFill>
-                <a:latin typeface="JetBrains Mono"/>
-                <a:ea typeface="JetBrains Mono"/>
-                <a:cs typeface="JetBrains Mono"/>
-              </a:rPr>
-              <a:t> </a:t>
-            </a:r>
-            <a:r>
-              <a:rPr sz="1100">
-                <a:solidFill>
                   <a:srgbClr val="C45E00"/>
                 </a:solidFill>
                 <a:latin typeface="JetBrains Mono"/>
                 <a:ea typeface="JetBrains Mono"/>
                 <a:cs typeface="JetBrains Mono"/>
               </a:rPr>
-              <a:t>True</a:t>
+              <a:t> True</a:t>
             </a:r>
             <a:r>
               <a:rPr sz="1100">
@@ -7977,24 +7702,13 @@
             <a:r>
               <a:rPr sz="1100">
                 <a:solidFill>
-                  <a:srgbClr val="080808"/>
-                </a:solidFill>
-                <a:latin typeface="JetBrains Mono"/>
-                <a:ea typeface="JetBrains Mono"/>
-                <a:cs typeface="JetBrains Mono"/>
-              </a:rPr>
-              <a:t>    </a:t>
-            </a:r>
-            <a:r>
-              <a:rPr sz="1100">
-                <a:solidFill>
                   <a:srgbClr val="C45E00"/>
                 </a:solidFill>
                 <a:latin typeface="JetBrains Mono"/>
                 <a:ea typeface="JetBrains Mono"/>
                 <a:cs typeface="JetBrains Mono"/>
               </a:rPr>
-              <a:t>if</a:t>
+              <a:t>    if</a:t>
             </a:r>
             <a:r>
               <a:rPr sz="1100">
@@ -8021,24 +7735,13 @@
             <a:r>
               <a:rPr sz="1100">
                 <a:solidFill>
-                  <a:srgbClr val="080808"/>
-                </a:solidFill>
-                <a:latin typeface="JetBrains Mono"/>
-                <a:ea typeface="JetBrains Mono"/>
-                <a:cs typeface="JetBrains Mono"/>
-              </a:rPr>
-              <a:t> </a:t>
-            </a:r>
-            <a:r>
-              <a:rPr sz="1100">
-                <a:solidFill>
                   <a:srgbClr val="067D17"/>
                 </a:solidFill>
                 <a:latin typeface="JetBrains Mono"/>
                 <a:ea typeface="JetBrains Mono"/>
                 <a:cs typeface="JetBrains Mono"/>
               </a:rPr>
-              <a:t>"1"</a:t>
+              <a:t> "1"</a:t>
             </a:r>
             <a:r>
               <a:rPr sz="1100">
@@ -8064,24 +7767,13 @@
             <a:r>
               <a:rPr sz="1100">
                 <a:solidFill>
-                  <a:srgbClr val="080808"/>
-                </a:solidFill>
-                <a:latin typeface="JetBrains Mono"/>
-                <a:ea typeface="JetBrains Mono"/>
-                <a:cs typeface="JetBrains Mono"/>
-              </a:rPr>
-              <a:t>        </a:t>
-            </a:r>
-            <a:r>
-              <a:rPr sz="1100">
-                <a:solidFill>
                   <a:srgbClr val="1750EB"/>
                 </a:solidFill>
                 <a:latin typeface="JetBrains Mono"/>
                 <a:ea typeface="JetBrains Mono"/>
                 <a:cs typeface="JetBrains Mono"/>
               </a:rPr>
-              <a:t>print</a:t>
+              <a:t>        print</a:t>
             </a:r>
             <a:r>
               <a:rPr sz="1100">
@@ -8129,24 +7821,13 @@
             <a:r>
               <a:rPr sz="1100">
                 <a:solidFill>
-                  <a:srgbClr val="080808"/>
-                </a:solidFill>
-                <a:latin typeface="JetBrains Mono"/>
-                <a:ea typeface="JetBrains Mono"/>
-                <a:cs typeface="JetBrains Mono"/>
-              </a:rPr>
-              <a:t>    </a:t>
-            </a:r>
-            <a:r>
-              <a:rPr sz="1100">
-                <a:solidFill>
                   <a:srgbClr val="C45E00"/>
                 </a:solidFill>
                 <a:latin typeface="JetBrains Mono"/>
                 <a:ea typeface="JetBrains Mono"/>
                 <a:cs typeface="JetBrains Mono"/>
               </a:rPr>
-              <a:t>elif</a:t>
+              <a:t>    elif</a:t>
             </a:r>
             <a:r>
               <a:rPr sz="1100">
@@ -8173,24 +7854,13 @@
             <a:r>
               <a:rPr sz="1100">
                 <a:solidFill>
-                  <a:srgbClr val="080808"/>
-                </a:solidFill>
-                <a:latin typeface="JetBrains Mono"/>
-                <a:ea typeface="JetBrains Mono"/>
-                <a:cs typeface="JetBrains Mono"/>
-              </a:rPr>
-              <a:t> </a:t>
-            </a:r>
-            <a:r>
-              <a:rPr sz="1100">
-                <a:solidFill>
                   <a:srgbClr val="067D17"/>
                 </a:solidFill>
                 <a:latin typeface="JetBrains Mono"/>
                 <a:ea typeface="JetBrains Mono"/>
                 <a:cs typeface="JetBrains Mono"/>
               </a:rPr>
-              <a:t>"2"</a:t>
+              <a:t> "2"</a:t>
             </a:r>
             <a:r>
               <a:rPr sz="1100">
@@ -8248,24 +7918,13 @@
             <a:r>
               <a:rPr sz="1100">
                 <a:solidFill>
-                  <a:srgbClr val="080808"/>
-                </a:solidFill>
-                <a:latin typeface="JetBrains Mono"/>
-                <a:ea typeface="JetBrains Mono"/>
-                <a:cs typeface="JetBrains Mono"/>
-              </a:rPr>
-              <a:t>    </a:t>
-            </a:r>
-            <a:r>
-              <a:rPr sz="1100">
-                <a:solidFill>
                   <a:srgbClr val="C45E00"/>
                 </a:solidFill>
                 <a:latin typeface="JetBrains Mono"/>
                 <a:ea typeface="JetBrains Mono"/>
                 <a:cs typeface="JetBrains Mono"/>
               </a:rPr>
-              <a:t>else</a:t>
+              <a:t>    else</a:t>
             </a:r>
             <a:r>
               <a:rPr sz="1100">
@@ -8291,24 +7950,13 @@
             <a:r>
               <a:rPr sz="1100">
                 <a:solidFill>
-                  <a:srgbClr val="080808"/>
-                </a:solidFill>
-                <a:latin typeface="JetBrains Mono"/>
-                <a:ea typeface="JetBrains Mono"/>
-                <a:cs typeface="JetBrains Mono"/>
-              </a:rPr>
-              <a:t>        </a:t>
-            </a:r>
-            <a:r>
-              <a:rPr sz="1100">
-                <a:solidFill>
                   <a:srgbClr val="1750EB"/>
                 </a:solidFill>
                 <a:latin typeface="JetBrains Mono"/>
                 <a:ea typeface="JetBrains Mono"/>
                 <a:cs typeface="JetBrains Mono"/>
               </a:rPr>
-              <a:t>print</a:t>
+              <a:t>        print</a:t>
             </a:r>
             <a:r>
               <a:rPr sz="1100">
@@ -9044,24 +8692,13 @@
             <a:r>
               <a:rPr sz="1100">
                 <a:solidFill>
-                  <a:srgbClr val="080808"/>
-                </a:solidFill>
-                <a:latin typeface="JetBrains Mono"/>
-                <a:ea typeface="JetBrains Mono"/>
-                <a:cs typeface="JetBrains Mono"/>
-              </a:rPr>
-              <a:t> </a:t>
-            </a:r>
-            <a:r>
-              <a:rPr sz="1100">
-                <a:solidFill>
                   <a:srgbClr val="C45E00"/>
                 </a:solidFill>
                 <a:latin typeface="JetBrains Mono"/>
                 <a:ea typeface="JetBrains Mono"/>
                 <a:cs typeface="JetBrains Mono"/>
               </a:rPr>
-              <a:t>True</a:t>
+              <a:t> True</a:t>
             </a:r>
             <a:r>
               <a:rPr sz="1100">
@@ -9173,24 +8810,13 @@
             <a:r>
               <a:rPr sz="1100">
                 <a:solidFill>
-                  <a:srgbClr val="080808"/>
-                </a:solidFill>
-                <a:latin typeface="JetBrains Mono"/>
-                <a:ea typeface="JetBrains Mono"/>
-                <a:cs typeface="JetBrains Mono"/>
-              </a:rPr>
-              <a:t>    </a:t>
-            </a:r>
-            <a:r>
-              <a:rPr sz="1100">
-                <a:solidFill>
                   <a:srgbClr val="C45E00"/>
                 </a:solidFill>
                 <a:latin typeface="JetBrains Mono"/>
                 <a:ea typeface="JetBrains Mono"/>
                 <a:cs typeface="JetBrains Mono"/>
               </a:rPr>
-              <a:t>if</a:t>
+              <a:t>    if</a:t>
             </a:r>
             <a:r>
               <a:rPr sz="1100">
@@ -9217,24 +8843,13 @@
             <a:r>
               <a:rPr sz="1100">
                 <a:solidFill>
-                  <a:srgbClr val="080808"/>
-                </a:solidFill>
-                <a:latin typeface="JetBrains Mono"/>
-                <a:ea typeface="JetBrains Mono"/>
-                <a:cs typeface="JetBrains Mono"/>
-              </a:rPr>
-              <a:t> </a:t>
-            </a:r>
-            <a:r>
-              <a:rPr sz="1100">
-                <a:solidFill>
                   <a:srgbClr val="067D17"/>
                 </a:solidFill>
                 <a:latin typeface="JetBrains Mono"/>
                 <a:ea typeface="JetBrains Mono"/>
                 <a:cs typeface="JetBrains Mono"/>
               </a:rPr>
-              <a:t>"1"</a:t>
+              <a:t> "1"</a:t>
             </a:r>
             <a:r>
               <a:rPr sz="1100">
@@ -9260,24 +8875,13 @@
             <a:r>
               <a:rPr sz="1100">
                 <a:solidFill>
-                  <a:srgbClr val="080808"/>
-                </a:solidFill>
-                <a:latin typeface="JetBrains Mono"/>
-                <a:ea typeface="JetBrains Mono"/>
-                <a:cs typeface="JetBrains Mono"/>
-              </a:rPr>
-              <a:t>        </a:t>
-            </a:r>
-            <a:r>
-              <a:rPr sz="1100">
-                <a:solidFill>
                   <a:srgbClr val="1750EB"/>
                 </a:solidFill>
                 <a:latin typeface="JetBrains Mono"/>
                 <a:ea typeface="JetBrains Mono"/>
                 <a:cs typeface="JetBrains Mono"/>
               </a:rPr>
-              <a:t>print</a:t>
+              <a:t>        print</a:t>
             </a:r>
             <a:r>
               <a:rPr sz="1100">
@@ -9325,24 +8929,13 @@
             <a:r>
               <a:rPr sz="1100">
                 <a:solidFill>
-                  <a:srgbClr val="080808"/>
-                </a:solidFill>
-                <a:latin typeface="JetBrains Mono"/>
-                <a:ea typeface="JetBrains Mono"/>
-                <a:cs typeface="JetBrains Mono"/>
-              </a:rPr>
-              <a:t>    </a:t>
-            </a:r>
-            <a:r>
-              <a:rPr sz="1100">
-                <a:solidFill>
                   <a:srgbClr val="C45E00"/>
                 </a:solidFill>
                 <a:latin typeface="JetBrains Mono"/>
                 <a:ea typeface="JetBrains Mono"/>
                 <a:cs typeface="JetBrains Mono"/>
               </a:rPr>
-              <a:t>elif</a:t>
+              <a:t>    elif</a:t>
             </a:r>
             <a:r>
               <a:rPr sz="1100">
@@ -9369,24 +8962,13 @@
             <a:r>
               <a:rPr sz="1100">
                 <a:solidFill>
-                  <a:srgbClr val="080808"/>
-                </a:solidFill>
-                <a:latin typeface="JetBrains Mono"/>
-                <a:ea typeface="JetBrains Mono"/>
-                <a:cs typeface="JetBrains Mono"/>
-              </a:rPr>
-              <a:t> </a:t>
-            </a:r>
-            <a:r>
-              <a:rPr sz="1100">
-                <a:solidFill>
                   <a:srgbClr val="067D17"/>
                 </a:solidFill>
                 <a:latin typeface="JetBrains Mono"/>
                 <a:ea typeface="JetBrains Mono"/>
                 <a:cs typeface="JetBrains Mono"/>
               </a:rPr>
-              <a:t>"2"</a:t>
+              <a:t> "2"</a:t>
             </a:r>
             <a:r>
               <a:rPr sz="1100">
@@ -9444,24 +9026,13 @@
             <a:r>
               <a:rPr sz="1100">
                 <a:solidFill>
-                  <a:srgbClr val="080808"/>
-                </a:solidFill>
-                <a:latin typeface="JetBrains Mono"/>
-                <a:ea typeface="JetBrains Mono"/>
-                <a:cs typeface="JetBrains Mono"/>
-              </a:rPr>
-              <a:t>    </a:t>
-            </a:r>
-            <a:r>
-              <a:rPr sz="1100">
-                <a:solidFill>
                   <a:srgbClr val="C45E00"/>
                 </a:solidFill>
                 <a:latin typeface="JetBrains Mono"/>
                 <a:ea typeface="JetBrains Mono"/>
                 <a:cs typeface="JetBrains Mono"/>
               </a:rPr>
-              <a:t>else</a:t>
+              <a:t>    else</a:t>
             </a:r>
             <a:r>
               <a:rPr sz="1100">
@@ -9487,24 +9058,13 @@
             <a:r>
               <a:rPr sz="1100">
                 <a:solidFill>
-                  <a:srgbClr val="080808"/>
-                </a:solidFill>
-                <a:latin typeface="JetBrains Mono"/>
-                <a:ea typeface="JetBrains Mono"/>
-                <a:cs typeface="JetBrains Mono"/>
-              </a:rPr>
-              <a:t>        </a:t>
-            </a:r>
-            <a:r>
-              <a:rPr sz="1100">
-                <a:solidFill>
                   <a:srgbClr val="1750EB"/>
                 </a:solidFill>
                 <a:latin typeface="JetBrains Mono"/>
                 <a:ea typeface="JetBrains Mono"/>
                 <a:cs typeface="JetBrains Mono"/>
               </a:rPr>
-              <a:t>print</a:t>
+              <a:t>        print</a:t>
             </a:r>
             <a:r>
               <a:rPr sz="1100">
@@ -10201,24 +9761,13 @@
             <a:r>
               <a:rPr sz="1100">
                 <a:solidFill>
-                  <a:srgbClr val="080808"/>
-                </a:solidFill>
-                <a:latin typeface="JetBrains Mono"/>
-                <a:ea typeface="JetBrains Mono"/>
-                <a:cs typeface="JetBrains Mono"/>
-              </a:rPr>
-              <a:t> </a:t>
-            </a:r>
-            <a:r>
-              <a:rPr sz="1100">
-                <a:solidFill>
                   <a:srgbClr val="C45E00"/>
                 </a:solidFill>
                 <a:latin typeface="JetBrains Mono"/>
                 <a:ea typeface="JetBrains Mono"/>
                 <a:cs typeface="JetBrains Mono"/>
               </a:rPr>
-              <a:t>True</a:t>
+              <a:t> True</a:t>
             </a:r>
             <a:r>
               <a:rPr sz="1100">
@@ -10330,24 +9879,13 @@
             <a:r>
               <a:rPr sz="1100">
                 <a:solidFill>
-                  <a:srgbClr val="080808"/>
-                </a:solidFill>
-                <a:latin typeface="JetBrains Mono"/>
-                <a:ea typeface="JetBrains Mono"/>
-                <a:cs typeface="JetBrains Mono"/>
-              </a:rPr>
-              <a:t>    </a:t>
-            </a:r>
-            <a:r>
-              <a:rPr sz="1100">
-                <a:solidFill>
                   <a:srgbClr val="C45E00"/>
                 </a:solidFill>
                 <a:latin typeface="JetBrains Mono"/>
                 <a:ea typeface="JetBrains Mono"/>
                 <a:cs typeface="JetBrains Mono"/>
               </a:rPr>
-              <a:t>if</a:t>
+              <a:t>    if</a:t>
             </a:r>
             <a:r>
               <a:rPr sz="1100">
@@ -10374,24 +9912,13 @@
             <a:r>
               <a:rPr sz="1100">
                 <a:solidFill>
-                  <a:srgbClr val="080808"/>
-                </a:solidFill>
-                <a:latin typeface="JetBrains Mono"/>
-                <a:ea typeface="JetBrains Mono"/>
-                <a:cs typeface="JetBrains Mono"/>
-              </a:rPr>
-              <a:t> </a:t>
-            </a:r>
-            <a:r>
-              <a:rPr sz="1100">
-                <a:solidFill>
                   <a:srgbClr val="067D17"/>
                 </a:solidFill>
                 <a:latin typeface="JetBrains Mono"/>
                 <a:ea typeface="JetBrains Mono"/>
                 <a:cs typeface="JetBrains Mono"/>
               </a:rPr>
-              <a:t>"1"</a:t>
+              <a:t> "1"</a:t>
             </a:r>
             <a:r>
               <a:rPr sz="1100">
@@ -10417,24 +9944,13 @@
             <a:r>
               <a:rPr sz="1100">
                 <a:solidFill>
-                  <a:srgbClr val="080808"/>
-                </a:solidFill>
-                <a:latin typeface="JetBrains Mono"/>
-                <a:ea typeface="JetBrains Mono"/>
-                <a:cs typeface="JetBrains Mono"/>
-              </a:rPr>
-              <a:t>        </a:t>
-            </a:r>
-            <a:r>
-              <a:rPr sz="1100">
-                <a:solidFill>
                   <a:srgbClr val="1750EB"/>
                 </a:solidFill>
                 <a:latin typeface="JetBrains Mono"/>
                 <a:ea typeface="JetBrains Mono"/>
                 <a:cs typeface="JetBrains Mono"/>
               </a:rPr>
-              <a:t>print</a:t>
+              <a:t>        print</a:t>
             </a:r>
             <a:r>
               <a:rPr sz="1100">
@@ -10482,24 +9998,13 @@
             <a:r>
               <a:rPr sz="1100">
                 <a:solidFill>
-                  <a:srgbClr val="080808"/>
-                </a:solidFill>
-                <a:latin typeface="JetBrains Mono"/>
-                <a:ea typeface="JetBrains Mono"/>
-                <a:cs typeface="JetBrains Mono"/>
-              </a:rPr>
-              <a:t>    </a:t>
-            </a:r>
-            <a:r>
-              <a:rPr sz="1100">
-                <a:solidFill>
                   <a:srgbClr val="C45E00"/>
                 </a:solidFill>
                 <a:latin typeface="JetBrains Mono"/>
                 <a:ea typeface="JetBrains Mono"/>
                 <a:cs typeface="JetBrains Mono"/>
               </a:rPr>
-              <a:t>elif</a:t>
+              <a:t>    elif</a:t>
             </a:r>
             <a:r>
               <a:rPr sz="1100">
@@ -10526,24 +10031,13 @@
             <a:r>
               <a:rPr sz="1100">
                 <a:solidFill>
-                  <a:srgbClr val="080808"/>
-                </a:solidFill>
-                <a:latin typeface="JetBrains Mono"/>
-                <a:ea typeface="JetBrains Mono"/>
-                <a:cs typeface="JetBrains Mono"/>
-              </a:rPr>
-              <a:t> </a:t>
-            </a:r>
-            <a:r>
-              <a:rPr sz="1100">
-                <a:solidFill>
                   <a:srgbClr val="067D17"/>
                 </a:solidFill>
                 <a:latin typeface="JetBrains Mono"/>
                 <a:ea typeface="JetBrains Mono"/>
                 <a:cs typeface="JetBrains Mono"/>
               </a:rPr>
-              <a:t>"2"</a:t>
+              <a:t> "2"</a:t>
             </a:r>
             <a:r>
               <a:rPr sz="1100">
@@ -10601,24 +10095,13 @@
             <a:r>
               <a:rPr sz="1100">
                 <a:solidFill>
-                  <a:srgbClr val="080808"/>
-                </a:solidFill>
-                <a:latin typeface="JetBrains Mono"/>
-                <a:ea typeface="JetBrains Mono"/>
-                <a:cs typeface="JetBrains Mono"/>
-              </a:rPr>
-              <a:t>    </a:t>
-            </a:r>
-            <a:r>
-              <a:rPr sz="1100">
-                <a:solidFill>
                   <a:srgbClr val="C45E00"/>
                 </a:solidFill>
                 <a:latin typeface="JetBrains Mono"/>
                 <a:ea typeface="JetBrains Mono"/>
                 <a:cs typeface="JetBrains Mono"/>
               </a:rPr>
-              <a:t>else</a:t>
+              <a:t>    else</a:t>
             </a:r>
             <a:r>
               <a:rPr sz="1100">
@@ -10644,24 +10127,13 @@
             <a:r>
               <a:rPr sz="1100">
                 <a:solidFill>
-                  <a:srgbClr val="080808"/>
-                </a:solidFill>
-                <a:latin typeface="JetBrains Mono"/>
-                <a:ea typeface="JetBrains Mono"/>
-                <a:cs typeface="JetBrains Mono"/>
-              </a:rPr>
-              <a:t>        </a:t>
-            </a:r>
-            <a:r>
-              <a:rPr sz="1100">
-                <a:solidFill>
                   <a:srgbClr val="1750EB"/>
                 </a:solidFill>
                 <a:latin typeface="JetBrains Mono"/>
                 <a:ea typeface="JetBrains Mono"/>
                 <a:cs typeface="JetBrains Mono"/>
               </a:rPr>
-              <a:t>print</a:t>
+              <a:t>        print</a:t>
             </a:r>
             <a:r>
               <a:rPr sz="1100">
@@ -11446,24 +10918,13 @@
             <a:r>
               <a:rPr sz="1100">
                 <a:solidFill>
-                  <a:srgbClr val="080808"/>
-                </a:solidFill>
-                <a:latin typeface="JetBrains Mono"/>
-                <a:ea typeface="JetBrains Mono"/>
-                <a:cs typeface="JetBrains Mono"/>
-              </a:rPr>
-              <a:t> </a:t>
-            </a:r>
-            <a:r>
-              <a:rPr sz="1100">
-                <a:solidFill>
                   <a:srgbClr val="C45E00"/>
                 </a:solidFill>
                 <a:latin typeface="JetBrains Mono"/>
                 <a:ea typeface="JetBrains Mono"/>
                 <a:cs typeface="JetBrains Mono"/>
               </a:rPr>
-              <a:t>True</a:t>
+              <a:t> True</a:t>
             </a:r>
             <a:r>
               <a:rPr sz="1100">
@@ -11575,24 +11036,13 @@
             <a:r>
               <a:rPr sz="1100">
                 <a:solidFill>
-                  <a:srgbClr val="080808"/>
-                </a:solidFill>
-                <a:latin typeface="JetBrains Mono"/>
-                <a:ea typeface="JetBrains Mono"/>
-                <a:cs typeface="JetBrains Mono"/>
-              </a:rPr>
-              <a:t>    </a:t>
-            </a:r>
-            <a:r>
-              <a:rPr sz="1100">
-                <a:solidFill>
                   <a:srgbClr val="C45E00"/>
                 </a:solidFill>
                 <a:latin typeface="JetBrains Mono"/>
                 <a:ea typeface="JetBrains Mono"/>
                 <a:cs typeface="JetBrains Mono"/>
               </a:rPr>
-              <a:t>if</a:t>
+              <a:t>    if</a:t>
             </a:r>
             <a:r>
               <a:rPr sz="1100">
@@ -11619,24 +11069,13 @@
             <a:r>
               <a:rPr sz="1100">
                 <a:solidFill>
-                  <a:srgbClr val="080808"/>
-                </a:solidFill>
-                <a:latin typeface="JetBrains Mono"/>
-                <a:ea typeface="JetBrains Mono"/>
-                <a:cs typeface="JetBrains Mono"/>
-              </a:rPr>
-              <a:t> </a:t>
-            </a:r>
-            <a:r>
-              <a:rPr sz="1100">
-                <a:solidFill>
                   <a:srgbClr val="067D17"/>
                 </a:solidFill>
                 <a:latin typeface="JetBrains Mono"/>
                 <a:ea typeface="JetBrains Mono"/>
                 <a:cs typeface="JetBrains Mono"/>
               </a:rPr>
-              <a:t>"1"</a:t>
+              <a:t> "1"</a:t>
             </a:r>
             <a:r>
               <a:rPr sz="1100">
@@ -11662,24 +11101,13 @@
             <a:r>
               <a:rPr sz="1100">
                 <a:solidFill>
-                  <a:srgbClr val="080808"/>
-                </a:solidFill>
-                <a:latin typeface="JetBrains Mono"/>
-                <a:ea typeface="JetBrains Mono"/>
-                <a:cs typeface="JetBrains Mono"/>
-              </a:rPr>
-              <a:t>        </a:t>
-            </a:r>
-            <a:r>
-              <a:rPr sz="1100">
-                <a:solidFill>
                   <a:srgbClr val="1750EB"/>
                 </a:solidFill>
                 <a:latin typeface="JetBrains Mono"/>
                 <a:ea typeface="JetBrains Mono"/>
                 <a:cs typeface="JetBrains Mono"/>
               </a:rPr>
-              <a:t>print</a:t>
+              <a:t>        print</a:t>
             </a:r>
             <a:r>
               <a:rPr sz="1100">
@@ -11727,24 +11155,13 @@
             <a:r>
               <a:rPr sz="1100">
                 <a:solidFill>
-                  <a:srgbClr val="080808"/>
-                </a:solidFill>
-                <a:latin typeface="JetBrains Mono"/>
-                <a:ea typeface="JetBrains Mono"/>
-                <a:cs typeface="JetBrains Mono"/>
-              </a:rPr>
-              <a:t>    </a:t>
-            </a:r>
-            <a:r>
-              <a:rPr sz="1100">
-                <a:solidFill>
                   <a:srgbClr val="C45E00"/>
                 </a:solidFill>
                 <a:latin typeface="JetBrains Mono"/>
                 <a:ea typeface="JetBrains Mono"/>
                 <a:cs typeface="JetBrains Mono"/>
               </a:rPr>
-              <a:t>elif</a:t>
+              <a:t>    elif</a:t>
             </a:r>
             <a:r>
               <a:rPr sz="1100">
@@ -11771,24 +11188,13 @@
             <a:r>
               <a:rPr sz="1100">
                 <a:solidFill>
-                  <a:srgbClr val="080808"/>
-                </a:solidFill>
-                <a:latin typeface="JetBrains Mono"/>
-                <a:ea typeface="JetBrains Mono"/>
-                <a:cs typeface="JetBrains Mono"/>
-              </a:rPr>
-              <a:t> </a:t>
-            </a:r>
-            <a:r>
-              <a:rPr sz="1100">
-                <a:solidFill>
                   <a:srgbClr val="067D17"/>
                 </a:solidFill>
                 <a:latin typeface="JetBrains Mono"/>
                 <a:ea typeface="JetBrains Mono"/>
                 <a:cs typeface="JetBrains Mono"/>
               </a:rPr>
-              <a:t>"2"</a:t>
+              <a:t> "2"</a:t>
             </a:r>
             <a:r>
               <a:rPr sz="1100">
@@ -11846,24 +11252,13 @@
             <a:r>
               <a:rPr sz="1100">
                 <a:solidFill>
-                  <a:srgbClr val="080808"/>
-                </a:solidFill>
-                <a:latin typeface="JetBrains Mono"/>
-                <a:ea typeface="JetBrains Mono"/>
-                <a:cs typeface="JetBrains Mono"/>
-              </a:rPr>
-              <a:t>    </a:t>
-            </a:r>
-            <a:r>
-              <a:rPr sz="1100">
-                <a:solidFill>
                   <a:srgbClr val="C45E00"/>
                 </a:solidFill>
                 <a:latin typeface="JetBrains Mono"/>
                 <a:ea typeface="JetBrains Mono"/>
                 <a:cs typeface="JetBrains Mono"/>
               </a:rPr>
-              <a:t>else</a:t>
+              <a:t>    else</a:t>
             </a:r>
             <a:r>
               <a:rPr sz="1100">
@@ -11889,24 +11284,13 @@
             <a:r>
               <a:rPr sz="1100">
                 <a:solidFill>
-                  <a:srgbClr val="080808"/>
-                </a:solidFill>
-                <a:latin typeface="JetBrains Mono"/>
-                <a:ea typeface="JetBrains Mono"/>
-                <a:cs typeface="JetBrains Mono"/>
-              </a:rPr>
-              <a:t>        </a:t>
-            </a:r>
-            <a:r>
-              <a:rPr sz="1100">
-                <a:solidFill>
                   <a:srgbClr val="1750EB"/>
                 </a:solidFill>
                 <a:latin typeface="JetBrains Mono"/>
                 <a:ea typeface="JetBrains Mono"/>
                 <a:cs typeface="JetBrains Mono"/>
               </a:rPr>
-              <a:t>print</a:t>
+              <a:t>        print</a:t>
             </a:r>
             <a:r>
               <a:rPr sz="1100">
@@ -12194,24 +11578,13 @@
             <a:r>
               <a:rPr sz="1800">
                 <a:solidFill>
-                  <a:srgbClr val="080808"/>
-                </a:solidFill>
-                <a:latin typeface="JetBrains Mono"/>
-                <a:ea typeface="JetBrains Mono"/>
-                <a:cs typeface="JetBrains Mono"/>
-              </a:rPr>
-              <a:t> </a:t>
-            </a:r>
-            <a:r>
-              <a:rPr sz="1800">
-                <a:solidFill>
                   <a:srgbClr val="C45E00"/>
                 </a:solidFill>
                 <a:latin typeface="JetBrains Mono"/>
                 <a:ea typeface="JetBrains Mono"/>
                 <a:cs typeface="JetBrains Mono"/>
               </a:rPr>
-              <a:t>True</a:t>
+              <a:t> True</a:t>
             </a:r>
             <a:r>
               <a:rPr sz="1800">
@@ -12298,24 +11671,13 @@
             <a:r>
               <a:rPr sz="1800">
                 <a:solidFill>
-                  <a:srgbClr val="080808"/>
-                </a:solidFill>
-                <a:latin typeface="JetBrains Mono"/>
-                <a:ea typeface="JetBrains Mono"/>
-                <a:cs typeface="JetBrains Mono"/>
-              </a:rPr>
-              <a:t>    </a:t>
-            </a:r>
-            <a:r>
-              <a:rPr sz="1800">
-                <a:solidFill>
                   <a:srgbClr val="C45E00"/>
                 </a:solidFill>
                 <a:latin typeface="JetBrains Mono"/>
                 <a:ea typeface="JetBrains Mono"/>
                 <a:cs typeface="JetBrains Mono"/>
               </a:rPr>
-              <a:t>if</a:t>
+              <a:t>    if</a:t>
             </a:r>
             <a:r>
               <a:rPr sz="1800">
@@ -12342,24 +11704,13 @@
             <a:r>
               <a:rPr sz="1800">
                 <a:solidFill>
-                  <a:srgbClr val="080808"/>
-                </a:solidFill>
-                <a:latin typeface="JetBrains Mono"/>
-                <a:ea typeface="JetBrains Mono"/>
-                <a:cs typeface="JetBrains Mono"/>
-              </a:rPr>
-              <a:t> </a:t>
-            </a:r>
-            <a:r>
-              <a:rPr sz="1800">
-                <a:solidFill>
                   <a:srgbClr val="067D17"/>
                 </a:solidFill>
                 <a:latin typeface="JetBrains Mono"/>
                 <a:ea typeface="JetBrains Mono"/>
                 <a:cs typeface="JetBrains Mono"/>
               </a:rPr>
-              <a:t>"1"</a:t>
+              <a:t> "1"</a:t>
             </a:r>
             <a:r>
               <a:rPr sz="1800">
@@ -12383,24 +11734,13 @@
             <a:r>
               <a:rPr sz="1800">
                 <a:solidFill>
-                  <a:srgbClr val="080808"/>
-                </a:solidFill>
-                <a:latin typeface="JetBrains Mono"/>
-                <a:ea typeface="JetBrains Mono"/>
-                <a:cs typeface="JetBrains Mono"/>
-              </a:rPr>
-              <a:t>        </a:t>
-            </a:r>
-            <a:r>
-              <a:rPr sz="1800">
-                <a:solidFill>
                   <a:srgbClr val="1750EB"/>
                 </a:solidFill>
                 <a:latin typeface="JetBrains Mono"/>
                 <a:ea typeface="JetBrains Mono"/>
                 <a:cs typeface="JetBrains Mono"/>
               </a:rPr>
-              <a:t>print</a:t>
+              <a:t>        print</a:t>
             </a:r>
             <a:r>
               <a:rPr sz="1800">
@@ -12446,24 +11786,13 @@
             <a:r>
               <a:rPr sz="1800">
                 <a:solidFill>
-                  <a:srgbClr val="080808"/>
-                </a:solidFill>
-                <a:latin typeface="JetBrains Mono"/>
-                <a:ea typeface="JetBrains Mono"/>
-                <a:cs typeface="JetBrains Mono"/>
-              </a:rPr>
-              <a:t>    </a:t>
-            </a:r>
-            <a:r>
-              <a:rPr sz="1800">
-                <a:solidFill>
                   <a:srgbClr val="C45E00"/>
                 </a:solidFill>
                 <a:latin typeface="JetBrains Mono"/>
                 <a:ea typeface="JetBrains Mono"/>
                 <a:cs typeface="JetBrains Mono"/>
               </a:rPr>
-              <a:t>elif</a:t>
+              <a:t>    elif</a:t>
             </a:r>
             <a:r>
               <a:rPr sz="1800">
@@ -12490,24 +11819,13 @@
             <a:r>
               <a:rPr sz="1800">
                 <a:solidFill>
-                  <a:srgbClr val="080808"/>
-                </a:solidFill>
-                <a:latin typeface="JetBrains Mono"/>
-                <a:ea typeface="JetBrains Mono"/>
-                <a:cs typeface="JetBrains Mono"/>
-              </a:rPr>
-              <a:t> </a:t>
-            </a:r>
-            <a:r>
-              <a:rPr sz="1800">
-                <a:solidFill>
                   <a:srgbClr val="067D17"/>
                 </a:solidFill>
                 <a:latin typeface="JetBrains Mono"/>
                 <a:ea typeface="JetBrains Mono"/>
                 <a:cs typeface="JetBrains Mono"/>
               </a:rPr>
-              <a:t>"2"</a:t>
+              <a:t> "2"</a:t>
             </a:r>
             <a:r>
               <a:rPr sz="1800">
@@ -12553,24 +11871,13 @@
             <a:r>
               <a:rPr sz="1800">
                 <a:solidFill>
-                  <a:srgbClr val="080808"/>
-                </a:solidFill>
-                <a:latin typeface="JetBrains Mono"/>
-                <a:ea typeface="JetBrains Mono"/>
-                <a:cs typeface="JetBrains Mono"/>
-              </a:rPr>
-              <a:t> </a:t>
-            </a:r>
-            <a:r>
-              <a:rPr sz="1800">
-                <a:solidFill>
                   <a:srgbClr val="C45E00"/>
                 </a:solidFill>
                 <a:latin typeface="JetBrains Mono"/>
                 <a:ea typeface="JetBrains Mono"/>
                 <a:cs typeface="JetBrains Mono"/>
               </a:rPr>
-              <a:t>False</a:t>
+              <a:t> False</a:t>
             </a:r>
           </a:p>
         </p:txBody>
